--- a/docs/session_results_2026-08-18_pid_tuning.pptx
+++ b/docs/session_results_2026-08-18_pid_tuning.pptx
@@ -24,6 +24,8 @@
     <p:sldId id="272" r:id="rId19"/>
     <p:sldId id="274" r:id="rId21"/>
     <p:sldId id="273" r:id="rId20"/>
+    <p:sldId id="275" r:id="rId22"/>
+    <p:sldId id="276" r:id="rId23"/>
   </p:sldIdLst>
   <p:sldSz cx="12192000" cy="6858000"/>
   <p:notesSz cx="7772400" cy="10058400"/>
@@ -4983,6 +4985,943 @@
       <p:transition spd="slow"/>
     </mc:Fallback>
   </mc:AlternateContent>
+</p:sld>
+</file>
+
+<file path=ppt/slides/slide20.xml><?xml version="1.0" encoding="utf-8"?>
+<p:sld xmlns:a="http://schemas.openxmlformats.org/drawingml/2006/main" xmlns:p="http://schemas.openxmlformats.org/presentationml/2006/main" xmlns:r="http://schemas.openxmlformats.org/officeDocument/2006/relationships">
+  <p:cSld>
+    <p:spTree>
+      <p:nvGrpSpPr>
+        <p:cNvPr id="1" name=""/>
+        <p:cNvGrpSpPr/>
+        <p:nvPr/>
+      </p:nvGrpSpPr>
+      <p:grpSpPr/>
+      <p:sp>
+        <p:nvSpPr>
+          <p:cNvPr id="2" name="TextBox 1"/>
+          <p:cNvSpPr txBox="1"/>
+          <p:nvPr/>
+        </p:nvSpPr>
+        <p:spPr>
+          <a:xfrm>
+            <a:off x="457200" y="228600"/>
+            <a:ext cx="11246760" cy="486360"/>
+          </a:xfrm>
+          <a:prstGeom prst="rect">
+            <a:avLst/>
+          </a:prstGeom>
+          <a:noFill/>
+        </p:spPr>
+        <p:txBody>
+          <a:bodyPr wrap="square">
+            <a:spAutoFit/>
+          </a:bodyPr>
+          <a:lstStyle/>
+          <a:p>
+            <a:r>
+              <a:rPr sz="2400" b="1">
+                <a:solidFill>
+                  <a:srgbClr val="1A1A2E"/>
+                </a:solidFill>
+                <a:latin typeface="Calibri"/>
+              </a:rPr>
+              <a:t>Bench resonance runs ~20% below FEA — rescaling the 0.75mm-arm prediction</a:t>
+            </a:r>
+          </a:p>
+        </p:txBody>
+      </p:sp>
+      <p:cxnSp>
+        <p:nvCxnSpPr>
+          <p:cNvPr id="3" name="Connector 2"/>
+          <p:cNvCxnSpPr/>
+          <p:nvPr/>
+        </p:nvCxnSpPr>
+        <p:spPr>
+          <a:xfrm>
+            <a:off x="457200" y="960120"/>
+            <a:ext cx="11247120" cy="0"/>
+          </a:xfrm>
+          <a:prstGeom prst="line">
+            <a:avLst/>
+          </a:prstGeom>
+          <a:ln w="19080">
+            <a:solidFill>
+              <a:srgbClr val="2E5C8A"/>
+            </a:solidFill>
+          </a:ln>
+        </p:spPr>
+        <p:style>
+          <a:lnRef idx="2">
+            <a:schemeClr val="accent1"/>
+          </a:lnRef>
+          <a:fillRef idx="0">
+            <a:schemeClr val="accent1"/>
+          </a:fillRef>
+          <a:effectRef idx="1">
+            <a:schemeClr val="accent1"/>
+          </a:effectRef>
+          <a:fontRef idx="minor">
+            <a:schemeClr val="tx1"/>
+          </a:fontRef>
+        </p:style>
+      </p:cxnSp>
+      <p:sp>
+        <p:nvSpPr>
+          <p:cNvPr id="4" name="TextBox 3"/>
+          <p:cNvSpPr txBox="1"/>
+          <p:nvPr/>
+        </p:nvSpPr>
+        <p:spPr>
+          <a:xfrm>
+            <a:off x="457200" y="1143000"/>
+            <a:ext cx="11246760" cy="2130000"/>
+          </a:xfrm>
+          <a:prstGeom prst="rect">
+            <a:avLst/>
+          </a:prstGeom>
+          <a:noFill/>
+        </p:spPr>
+        <p:txBody>
+          <a:bodyPr wrap="square">
+            <a:spAutoFit/>
+          </a:bodyPr>
+          <a:lstStyle/>
+          <a:p>
+            <a:pPr>
+              <a:spcAft>
+                <a:spcPts val="900"/>
+              </a:spcAft>
+            </a:pPr>
+            <a:r>
+              <a:rPr sz="1250">
+                <a:solidFill>
+                  <a:srgbClr val="333333"/>
+                </a:solidFill>
+                <a:latin typeface="Calibri"/>
+              </a:rPr>
+              <a:t>• </a:t>
+            </a:r>
+            <a:r>
+              <a:rPr sz="1250">
+                <a:solidFill>
+                  <a:srgbClr val="333333"/>
+                </a:solidFill>
+                <a:latin typeface="Calibri"/>
+              </a:rPr>
+              <a:t>The cross-validated bench resonance for the current 0.5mm flexure is 38.5Hz (bode peak + ring-down peak-spacing, previous slides) — the FEA modal analysis on the same 0.5mm part predicts mode 1 at 48.19Hz, mode 2 at 52.92Hz.</a:t>
+            </a:r>
+          </a:p>
+          <a:p>
+            <a:pPr>
+              <a:spcAft>
+                <a:spcPts val="900"/>
+              </a:spcAft>
+            </a:pPr>
+            <a:r>
+              <a:rPr sz="1250">
+                <a:solidFill>
+                  <a:srgbClr val="333333"/>
+                </a:solidFill>
+                <a:latin typeface="Calibri"/>
+              </a:rPr>
+              <a:t>• </a:t>
+            </a:r>
+            <a:r>
+              <a:rPr sz="1250">
+                <a:solidFill>
+                  <a:srgbClr val="333333"/>
+                </a:solidFill>
+                <a:latin typeface="Calibri"/>
+              </a:rPr>
+              <a:t>That's the model running ~20% high (measured/FEA = 0.80) — expected for a bolted flexure: FEA assumes a perfectly rigid clamp, the real joint has bolt-preload/contact compliance plus unmodeled fiber and connector mass, both of which lower the true frequency.</a:t>
+            </a:r>
+          </a:p>
+          <a:p>
+            <a:pPr>
+              <a:spcAft>
+                <a:spcPts val="900"/>
+              </a:spcAft>
+            </a:pPr>
+            <a:r>
+              <a:rPr sz="1250">
+                <a:solidFill>
+                  <a:srgbClr val="333333"/>
+                </a:solidFill>
+                <a:latin typeface="Calibri"/>
+              </a:rPr>
+              <a:t>• </a:t>
+            </a:r>
+            <a:r>
+              <a:rPr sz="1250">
+                <a:solidFill>
+                  <a:srgbClr val="333333"/>
+                </a:solidFill>
+                <a:latin typeface="Calibri"/>
+              </a:rPr>
+              <a:t>Applying that 0.80 correction to the just-ordered 0.75mm-arm FEA (mode 1 = 81.35Hz, mode 2 = 90.55Hz, below) gives a revised bench estimate of ~65Hz / ~72Hz, not the raw FEA numbers.</a:t>
+            </a:r>
+          </a:p>
+          <a:p>
+            <a:pPr>
+              <a:spcAft>
+                <a:spcPts val="900"/>
+              </a:spcAft>
+            </a:pPr>
+            <a:r>
+              <a:rPr sz="1250">
+                <a:solidFill>
+                  <a:srgbClr val="333333"/>
+                </a:solidFill>
+                <a:latin typeface="Calibri"/>
+              </a:rPr>
+              <a:t>• </a:t>
+            </a:r>
+            <a:r>
+              <a:rPr sz="1250">
+                <a:solidFill>
+                  <a:srgbClr val="333333"/>
+                </a:solidFill>
+                <a:latin typeface="Calibri"/>
+              </a:rPr>
+              <a:t>Against the 20Hz PID target that's ~3.25x margin corrected vs. 4.1x from raw FEA — still a real win over today's ~1.9x (38.5Hz/20Hz), just less headroom than FEA alone suggested.</a:t>
+            </a:r>
+          </a:p>
+          <a:p>
+            <a:pPr>
+              <a:spcAft>
+                <a:spcPts val="900"/>
+              </a:spcAft>
+            </a:pPr>
+            <a:r>
+              <a:rPr sz="1250">
+                <a:solidFill>
+                  <a:srgbClr val="333333"/>
+                </a:solidFill>
+                <a:latin typeface="Calibri"/>
+              </a:rPr>
+              <a:t>• </a:t>
+            </a:r>
+            <a:r>
+              <a:rPr sz="1250" b="1">
+                <a:solidFill>
+                  <a:srgbClr val="333333"/>
+                </a:solidFill>
+                <a:latin typeface="Calibri"/>
+              </a:rPr>
+              <a:t>Action: </a:t>
+            </a:r>
+            <a:r>
+              <a:rPr sz="1250">
+                <a:solidFill>
+                  <a:srgbClr val="333333"/>
+                </a:solidFill>
+                <a:latin typeface="Calibri"/>
+              </a:rPr>
+              <a:t>rerun the bode sweep and ring-down test on the 0.75mm part once installed to confirm directly, rather than relying on the scaled estimate.</a:t>
+            </a:r>
+          </a:p>
+        </p:txBody>
+      </p:sp>
+      <p:pic>
+        <p:nvPicPr>
+          <p:cNvPr id="5" name="Picture 4" descr="main_flexure_v3_FEM_mode1_48.19Hz.png"/>
+          <p:cNvPicPr>
+            <a:picLocks noChangeAspect="1"/>
+          </p:cNvPicPr>
+          <p:nvPr/>
+        </p:nvPicPr>
+        <p:blipFill>
+          <a:blip r:embed="rId2"/>
+          <a:stretch>
+            <a:fillRect/>
+          </a:stretch>
+        </p:blipFill>
+        <p:spPr>
+          <a:xfrm>
+            <a:off x="2466609" y="3423000"/>
+            <a:ext cx="3282334" cy="3010680"/>
+          </a:xfrm>
+          <a:prstGeom prst="rect">
+            <a:avLst/>
+          </a:prstGeom>
+        </p:spPr>
+      </p:pic>
+      <p:pic>
+        <p:nvPicPr>
+          <p:cNvPr id="6" name="Picture 5" descr="PCB_FTA_assembly_FEM_mode1_81.35Hz.png"/>
+          <p:cNvPicPr>
+            <a:picLocks noChangeAspect="1"/>
+          </p:cNvPicPr>
+          <p:nvPr/>
+        </p:nvPicPr>
+        <p:blipFill>
+          <a:blip r:embed="rId3"/>
+          <a:stretch>
+            <a:fillRect/>
+          </a:stretch>
+        </p:blipFill>
+        <p:spPr>
+          <a:xfrm>
+            <a:off x="6048943" y="3423000"/>
+            <a:ext cx="3676448" cy="3010680"/>
+          </a:xfrm>
+          <a:prstGeom prst="rect">
+            <a:avLst/>
+          </a:prstGeom>
+        </p:spPr>
+      </p:pic>
+    </p:spTree>
+  </p:cSld>
+  <p:clrMapOvr>
+    <a:masterClrMapping/>
+  </p:clrMapOvr>
+</p:sld>
+</file>
+
+<file path=ppt/slides/slide21.xml><?xml version="1.0" encoding="utf-8"?>
+<p:sld xmlns:a="http://schemas.openxmlformats.org/drawingml/2006/main" xmlns:p="http://schemas.openxmlformats.org/presentationml/2006/main" xmlns:r="http://schemas.openxmlformats.org/officeDocument/2006/relationships">
+  <p:cSld>
+    <p:spTree>
+      <p:nvGrpSpPr>
+        <p:cNvPr id="1" name=""/>
+        <p:cNvGrpSpPr/>
+        <p:nvPr/>
+      </p:nvGrpSpPr>
+      <p:grpSpPr/>
+      <p:sp>
+        <p:nvSpPr>
+          <p:cNvPr id="2" name="TextBox 1"/>
+          <p:cNvSpPr txBox="1"/>
+          <p:nvPr/>
+        </p:nvSpPr>
+        <p:spPr>
+          <a:xfrm>
+            <a:off x="457200" y="228600"/>
+            <a:ext cx="11246760" cy="486360"/>
+          </a:xfrm>
+          <a:prstGeom prst="rect">
+            <a:avLst/>
+          </a:prstGeom>
+          <a:noFill/>
+        </p:spPr>
+        <p:txBody>
+          <a:bodyPr wrap="square">
+            <a:spAutoFit/>
+          </a:bodyPr>
+          <a:lstStyle/>
+          <a:p>
+            <a:r>
+              <a:rPr sz="2400" b="1">
+                <a:solidFill>
+                  <a:srgbClr val="1A1A2E"/>
+                </a:solidFill>
+                <a:latin typeface="Calibri"/>
+              </a:rPr>
+              <a:t>FEA mode frequencies — 0.5mm vs. 0.75mm flexure arms</a:t>
+            </a:r>
+          </a:p>
+        </p:txBody>
+      </p:sp>
+      <p:cxnSp>
+        <p:nvCxnSpPr>
+          <p:cNvPr id="3" name="Connector 2"/>
+          <p:cNvCxnSpPr/>
+          <p:nvPr/>
+        </p:nvCxnSpPr>
+        <p:spPr>
+          <a:xfrm>
+            <a:off x="457200" y="960120"/>
+            <a:ext cx="11247120" cy="0"/>
+          </a:xfrm>
+          <a:prstGeom prst="line">
+            <a:avLst/>
+          </a:prstGeom>
+          <a:ln w="19080">
+            <a:solidFill>
+              <a:srgbClr val="2E5C8A"/>
+            </a:solidFill>
+          </a:ln>
+        </p:spPr>
+        <p:style>
+          <a:lnRef idx="2">
+            <a:schemeClr val="accent1"/>
+          </a:lnRef>
+          <a:fillRef idx="0">
+            <a:schemeClr val="accent1"/>
+          </a:fillRef>
+          <a:effectRef idx="1">
+            <a:schemeClr val="accent1"/>
+          </a:effectRef>
+          <a:fontRef idx="minor">
+            <a:schemeClr val="tx1"/>
+          </a:fontRef>
+        </p:style>
+      </p:cxnSp>
+      <p:graphicFrame>
+        <p:nvGraphicFramePr>
+          <p:cNvPr id="4" name="Table 3"/>
+          <p:cNvGraphicFramePr>
+            <a:graphicFrameLocks noGrp="1"/>
+          </p:cNvGraphicFramePr>
+          <p:nvPr/>
+        </p:nvGraphicFramePr>
+        <p:xfrm>
+          <a:off x="1596000" y="1600200"/>
+          <a:ext cx="9000000" cy="2700000"/>
+        </p:xfrm>
+        <a:graphic>
+          <a:graphicData uri="http://schemas.openxmlformats.org/drawingml/2006/table">
+            <a:tbl>
+              <a:tblPr firstRow="1" bandRow="1">
+                <a:tableStyleId>{5C22544A-7EE6-4342-B048-85BDC9FD1C3A}</a:tableStyleId>
+              </a:tblPr>
+              <a:tblGrid>
+                <a:gridCol w="2400000"/>
+                <a:gridCol w="3300000"/>
+                <a:gridCol w="3300000"/>
+              </a:tblGrid>
+              <a:tr h="450000">
+                <a:tc>
+                  <a:txBody>
+                    <a:bodyPr/>
+                    <a:lstStyle/>
+                    <a:p>
+                      <a:pPr algn="ctr"/>
+                      <a:r>
+                        <a:rPr sz="1400" b="1">
+                          <a:solidFill>
+                            <a:srgbClr val="FFFFFF"/>
+                          </a:solidFill>
+                          <a:latin typeface="Calibri"/>
+                        </a:rPr>
+                        <a:t>Mode</a:t>
+                      </a:r>
+                    </a:p>
+                  </a:txBody>
+                  <a:tcPr anchor="ctr">
+                    <a:solidFill>
+                      <a:srgbClr val="2E5C8A"/>
+                    </a:solidFill>
+                  </a:tcPr>
+                </a:tc>
+                <a:tc>
+                  <a:txBody>
+                    <a:bodyPr/>
+                    <a:lstStyle/>
+                    <a:p>
+                      <a:pPr algn="ctr"/>
+                      <a:r>
+                        <a:rPr sz="1400" b="1">
+                          <a:solidFill>
+                            <a:srgbClr val="FFFFFF"/>
+                          </a:solidFill>
+                          <a:latin typeface="Calibri"/>
+                        </a:rPr>
+                        <a:t>0.5mm arms (Hz)</a:t>
+                      </a:r>
+                    </a:p>
+                  </a:txBody>
+                  <a:tcPr anchor="ctr">
+                    <a:solidFill>
+                      <a:srgbClr val="2E5C8A"/>
+                    </a:solidFill>
+                  </a:tcPr>
+                </a:tc>
+                <a:tc>
+                  <a:txBody>
+                    <a:bodyPr/>
+                    <a:lstStyle/>
+                    <a:p>
+                      <a:pPr algn="ctr"/>
+                      <a:r>
+                        <a:rPr sz="1400" b="1">
+                          <a:solidFill>
+                            <a:srgbClr val="FFFFFF"/>
+                          </a:solidFill>
+                          <a:latin typeface="Calibri"/>
+                        </a:rPr>
+                        <a:t>0.75mm arms (Hz)</a:t>
+                      </a:r>
+                    </a:p>
+                  </a:txBody>
+                  <a:tcPr anchor="ctr">
+                    <a:solidFill>
+                      <a:srgbClr val="2E5C8A"/>
+                    </a:solidFill>
+                  </a:tcPr>
+                </a:tc>
+              </a:tr>
+              <a:tr h="375000">
+                <a:tc>
+                  <a:txBody>
+                    <a:bodyPr/>
+                    <a:lstStyle/>
+                    <a:p>
+                      <a:pPr algn="ctr"/>
+                      <a:r>
+                        <a:rPr sz="1400">
+                          <a:solidFill>
+                            <a:srgbClr val="333333"/>
+                          </a:solidFill>
+                          <a:latin typeface="Calibri"/>
+                        </a:rPr>
+                        <a:t>1</a:t>
+                      </a:r>
+                    </a:p>
+                  </a:txBody>
+                  <a:tcPr anchor="ctr">
+                    <a:solidFill>
+                      <a:srgbClr val="FFFFFF"/>
+                    </a:solidFill>
+                  </a:tcPr>
+                </a:tc>
+                <a:tc>
+                  <a:txBody>
+                    <a:bodyPr/>
+                    <a:lstStyle/>
+                    <a:p>
+                      <a:pPr algn="ctr"/>
+                      <a:r>
+                        <a:rPr sz="1400">
+                          <a:solidFill>
+                            <a:srgbClr val="333333"/>
+                          </a:solidFill>
+                          <a:latin typeface="Calibri"/>
+                        </a:rPr>
+                        <a:t>48.19</a:t>
+                      </a:r>
+                    </a:p>
+                  </a:txBody>
+                  <a:tcPr anchor="ctr">
+                    <a:solidFill>
+                      <a:srgbClr val="FFFFFF"/>
+                    </a:solidFill>
+                  </a:tcPr>
+                </a:tc>
+                <a:tc>
+                  <a:txBody>
+                    <a:bodyPr/>
+                    <a:lstStyle/>
+                    <a:p>
+                      <a:pPr algn="ctr"/>
+                      <a:r>
+                        <a:rPr sz="1400">
+                          <a:solidFill>
+                            <a:srgbClr val="333333"/>
+                          </a:solidFill>
+                          <a:latin typeface="Calibri"/>
+                        </a:rPr>
+                        <a:t>81.35</a:t>
+                      </a:r>
+                    </a:p>
+                  </a:txBody>
+                  <a:tcPr anchor="ctr">
+                    <a:solidFill>
+                      <a:srgbClr val="FFFFFF"/>
+                    </a:solidFill>
+                  </a:tcPr>
+                </a:tc>
+              </a:tr>
+              <a:tr h="375000">
+                <a:tc>
+                  <a:txBody>
+                    <a:bodyPr/>
+                    <a:lstStyle/>
+                    <a:p>
+                      <a:pPr algn="ctr"/>
+                      <a:r>
+                        <a:rPr sz="1400">
+                          <a:solidFill>
+                            <a:srgbClr val="333333"/>
+                          </a:solidFill>
+                          <a:latin typeface="Calibri"/>
+                        </a:rPr>
+                        <a:t>2</a:t>
+                      </a:r>
+                    </a:p>
+                  </a:txBody>
+                  <a:tcPr anchor="ctr">
+                    <a:solidFill>
+                      <a:srgbClr val="EDF1F7"/>
+                    </a:solidFill>
+                  </a:tcPr>
+                </a:tc>
+                <a:tc>
+                  <a:txBody>
+                    <a:bodyPr/>
+                    <a:lstStyle/>
+                    <a:p>
+                      <a:pPr algn="ctr"/>
+                      <a:r>
+                        <a:rPr sz="1400">
+                          <a:solidFill>
+                            <a:srgbClr val="333333"/>
+                          </a:solidFill>
+                          <a:latin typeface="Calibri"/>
+                        </a:rPr>
+                        <a:t>52.92</a:t>
+                      </a:r>
+                    </a:p>
+                  </a:txBody>
+                  <a:tcPr anchor="ctr">
+                    <a:solidFill>
+                      <a:srgbClr val="EDF1F7"/>
+                    </a:solidFill>
+                  </a:tcPr>
+                </a:tc>
+                <a:tc>
+                  <a:txBody>
+                    <a:bodyPr/>
+                    <a:lstStyle/>
+                    <a:p>
+                      <a:pPr algn="ctr"/>
+                      <a:r>
+                        <a:rPr sz="1400">
+                          <a:solidFill>
+                            <a:srgbClr val="333333"/>
+                          </a:solidFill>
+                          <a:latin typeface="Calibri"/>
+                        </a:rPr>
+                        <a:t>90.55</a:t>
+                      </a:r>
+                    </a:p>
+                  </a:txBody>
+                  <a:tcPr anchor="ctr">
+                    <a:solidFill>
+                      <a:srgbClr val="EDF1F7"/>
+                    </a:solidFill>
+                  </a:tcPr>
+                </a:tc>
+              </a:tr>
+              <a:tr h="375000">
+                <a:tc>
+                  <a:txBody>
+                    <a:bodyPr/>
+                    <a:lstStyle/>
+                    <a:p>
+                      <a:pPr algn="ctr"/>
+                      <a:r>
+                        <a:rPr sz="1400">
+                          <a:solidFill>
+                            <a:srgbClr val="333333"/>
+                          </a:solidFill>
+                          <a:latin typeface="Calibri"/>
+                        </a:rPr>
+                        <a:t>3</a:t>
+                      </a:r>
+                    </a:p>
+                  </a:txBody>
+                  <a:tcPr anchor="ctr">
+                    <a:solidFill>
+                      <a:srgbClr val="FFFFFF"/>
+                    </a:solidFill>
+                  </a:tcPr>
+                </a:tc>
+                <a:tc>
+                  <a:txBody>
+                    <a:bodyPr/>
+                    <a:lstStyle/>
+                    <a:p>
+                      <a:pPr algn="ctr"/>
+                      <a:r>
+                        <a:rPr sz="1400">
+                          <a:solidFill>
+                            <a:srgbClr val="333333"/>
+                          </a:solidFill>
+                          <a:latin typeface="Calibri"/>
+                        </a:rPr>
+                        <a:t>238.27</a:t>
+                      </a:r>
+                    </a:p>
+                  </a:txBody>
+                  <a:tcPr anchor="ctr">
+                    <a:solidFill>
+                      <a:srgbClr val="FFFFFF"/>
+                    </a:solidFill>
+                  </a:tcPr>
+                </a:tc>
+                <a:tc>
+                  <a:txBody>
+                    <a:bodyPr/>
+                    <a:lstStyle/>
+                    <a:p>
+                      <a:pPr algn="ctr"/>
+                      <a:r>
+                        <a:rPr sz="1400">
+                          <a:solidFill>
+                            <a:srgbClr val="333333"/>
+                          </a:solidFill>
+                          <a:latin typeface="Calibri"/>
+                        </a:rPr>
+                        <a:t>273.23</a:t>
+                      </a:r>
+                    </a:p>
+                  </a:txBody>
+                  <a:tcPr anchor="ctr">
+                    <a:solidFill>
+                      <a:srgbClr val="FFFFFF"/>
+                    </a:solidFill>
+                  </a:tcPr>
+                </a:tc>
+              </a:tr>
+              <a:tr h="375000">
+                <a:tc>
+                  <a:txBody>
+                    <a:bodyPr/>
+                    <a:lstStyle/>
+                    <a:p>
+                      <a:pPr algn="ctr"/>
+                      <a:r>
+                        <a:rPr sz="1400">
+                          <a:solidFill>
+                            <a:srgbClr val="333333"/>
+                          </a:solidFill>
+                          <a:latin typeface="Calibri"/>
+                        </a:rPr>
+                        <a:t>4</a:t>
+                      </a:r>
+                    </a:p>
+                  </a:txBody>
+                  <a:tcPr anchor="ctr">
+                    <a:solidFill>
+                      <a:srgbClr val="EDF1F7"/>
+                    </a:solidFill>
+                  </a:tcPr>
+                </a:tc>
+                <a:tc>
+                  <a:txBody>
+                    <a:bodyPr/>
+                    <a:lstStyle/>
+                    <a:p>
+                      <a:pPr algn="ctr"/>
+                      <a:r>
+                        <a:rPr sz="1400">
+                          <a:solidFill>
+                            <a:srgbClr val="333333"/>
+                          </a:solidFill>
+                          <a:latin typeface="Calibri"/>
+                        </a:rPr>
+                        <a:t>599.31</a:t>
+                      </a:r>
+                    </a:p>
+                  </a:txBody>
+                  <a:tcPr anchor="ctr">
+                    <a:solidFill>
+                      <a:srgbClr val="EDF1F7"/>
+                    </a:solidFill>
+                  </a:tcPr>
+                </a:tc>
+                <a:tc>
+                  <a:txBody>
+                    <a:bodyPr/>
+                    <a:lstStyle/>
+                    <a:p>
+                      <a:pPr algn="ctr"/>
+                      <a:r>
+                        <a:rPr sz="1400">
+                          <a:solidFill>
+                            <a:srgbClr val="333333"/>
+                          </a:solidFill>
+                          <a:latin typeface="Calibri"/>
+                        </a:rPr>
+                        <a:t>661.07</a:t>
+                      </a:r>
+                    </a:p>
+                  </a:txBody>
+                  <a:tcPr anchor="ctr">
+                    <a:solidFill>
+                      <a:srgbClr val="EDF1F7"/>
+                    </a:solidFill>
+                  </a:tcPr>
+                </a:tc>
+              </a:tr>
+              <a:tr h="375000">
+                <a:tc>
+                  <a:txBody>
+                    <a:bodyPr/>
+                    <a:lstStyle/>
+                    <a:p>
+                      <a:pPr algn="ctr"/>
+                      <a:r>
+                        <a:rPr sz="1400">
+                          <a:solidFill>
+                            <a:srgbClr val="333333"/>
+                          </a:solidFill>
+                          <a:latin typeface="Calibri"/>
+                        </a:rPr>
+                        <a:t>5</a:t>
+                      </a:r>
+                    </a:p>
+                  </a:txBody>
+                  <a:tcPr anchor="ctr">
+                    <a:solidFill>
+                      <a:srgbClr val="FFFFFF"/>
+                    </a:solidFill>
+                  </a:tcPr>
+                </a:tc>
+                <a:tc>
+                  <a:txBody>
+                    <a:bodyPr/>
+                    <a:lstStyle/>
+                    <a:p>
+                      <a:pPr algn="ctr"/>
+                      <a:r>
+                        <a:rPr sz="1400">
+                          <a:solidFill>
+                            <a:srgbClr val="333333"/>
+                          </a:solidFill>
+                          <a:latin typeface="Calibri"/>
+                        </a:rPr>
+                        <a:t>687.61</a:t>
+                      </a:r>
+                    </a:p>
+                  </a:txBody>
+                  <a:tcPr anchor="ctr">
+                    <a:solidFill>
+                      <a:srgbClr val="FFFFFF"/>
+                    </a:solidFill>
+                  </a:tcPr>
+                </a:tc>
+                <a:tc>
+                  <a:txBody>
+                    <a:bodyPr/>
+                    <a:lstStyle/>
+                    <a:p>
+                      <a:pPr algn="ctr"/>
+                      <a:r>
+                        <a:rPr sz="1400">
+                          <a:solidFill>
+                            <a:srgbClr val="333333"/>
+                          </a:solidFill>
+                          <a:latin typeface="Calibri"/>
+                        </a:rPr>
+                        <a:t>798.01</a:t>
+                      </a:r>
+                    </a:p>
+                  </a:txBody>
+                  <a:tcPr anchor="ctr">
+                    <a:solidFill>
+                      <a:srgbClr val="FFFFFF"/>
+                    </a:solidFill>
+                  </a:tcPr>
+                </a:tc>
+              </a:tr>
+              <a:tr h="375000">
+                <a:tc>
+                  <a:txBody>
+                    <a:bodyPr/>
+                    <a:lstStyle/>
+                    <a:p>
+                      <a:pPr algn="ctr"/>
+                      <a:r>
+                        <a:rPr sz="1400">
+                          <a:solidFill>
+                            <a:srgbClr val="333333"/>
+                          </a:solidFill>
+                          <a:latin typeface="Calibri"/>
+                        </a:rPr>
+                        <a:t>6</a:t>
+                      </a:r>
+                    </a:p>
+                  </a:txBody>
+                  <a:tcPr anchor="ctr">
+                    <a:solidFill>
+                      <a:srgbClr val="EDF1F7"/>
+                    </a:solidFill>
+                  </a:tcPr>
+                </a:tc>
+                <a:tc>
+                  <a:txBody>
+                    <a:bodyPr/>
+                    <a:lstStyle/>
+                    <a:p>
+                      <a:pPr algn="ctr"/>
+                      <a:r>
+                        <a:rPr sz="1400">
+                          <a:solidFill>
+                            <a:srgbClr val="333333"/>
+                          </a:solidFill>
+                          <a:latin typeface="Calibri"/>
+                        </a:rPr>
+                        <a:t>844.12</a:t>
+                      </a:r>
+                    </a:p>
+                  </a:txBody>
+                  <a:tcPr anchor="ctr">
+                    <a:solidFill>
+                      <a:srgbClr val="EDF1F7"/>
+                    </a:solidFill>
+                  </a:tcPr>
+                </a:tc>
+                <a:tc>
+                  <a:txBody>
+                    <a:bodyPr/>
+                    <a:lstStyle/>
+                    <a:p>
+                      <a:pPr algn="ctr"/>
+                      <a:r>
+                        <a:rPr sz="1400">
+                          <a:solidFill>
+                            <a:srgbClr val="333333"/>
+                          </a:solidFill>
+                          <a:latin typeface="Calibri"/>
+                        </a:rPr>
+                        <a:t>951.15</a:t>
+                      </a:r>
+                    </a:p>
+                  </a:txBody>
+                  <a:tcPr anchor="ctr">
+                    <a:solidFill>
+                      <a:srgbClr val="EDF1F7"/>
+                    </a:solidFill>
+                  </a:tcPr>
+                </a:tc>
+              </a:tr>
+            </a:tbl>
+          </a:graphicData>
+        </a:graphic>
+      </p:graphicFrame>
+      <p:sp>
+        <p:nvSpPr>
+          <p:cNvPr id="5" name="TextBox Caption"/>
+          <p:cNvSpPr txBox="1"/>
+          <p:nvPr/>
+        </p:nvSpPr>
+        <p:spPr>
+          <a:xfrm>
+            <a:off x="1596000" y="4500000"/>
+            <a:ext cx="9000000" cy="600000"/>
+          </a:xfrm>
+          <a:prstGeom prst="rect">
+            <a:avLst/>
+          </a:prstGeom>
+          <a:noFill/>
+        </p:spPr>
+        <p:txBody>
+          <a:bodyPr wrap="square">
+            <a:spAutoFit/>
+          </a:bodyPr>
+          <a:lstStyle/>
+          <a:p>
+            <a:r>
+              <a:rPr sz="1150" i="1">
+                <a:solidFill>
+                  <a:srgbClr val="666666"/>
+                </a:solidFill>
+                <a:latin typeface="Calibri"/>
+              </a:rPr>
+              <a:t>First six modes from the SOLUTION 1 real-eigenvalue tables (main_flexure_v3 / PCB_FTA_assembly .f06 results). Bench-measured resonance for the 0.5mm part is 38.5Hz — see previous slide for the FEA-vs-bench correction.</a:t>
+            </a:r>
+          </a:p>
+        </p:txBody>
+      </p:sp>
+    </p:spTree>
+  </p:cSld>
+  <p:clrMapOvr>
+    <a:masterClrMapping/>
+  </p:clrMapOvr>
 </p:sld>
 </file>
 

--- a/docs/session_results_2026-08-18_pid_tuning.pptx
+++ b/docs/session_results_2026-08-18_pid_tuning.pptx
@@ -22,6 +22,7 @@
     <p:sldId id="270" r:id="rId17"/>
     <p:sldId id="271" r:id="rId18"/>
     <p:sldId id="272" r:id="rId19"/>
+    <p:sldId id="277" r:id="rId24"/>
     <p:sldId id="274" r:id="rId21"/>
     <p:sldId id="273" r:id="rId20"/>
     <p:sldId id="275" r:id="rId22"/>
@@ -4013,6 +4014,40 @@
           </a:ln>
         </p:spPr>
       </p:pic>
+      <p:sp>
+        <p:nvSpPr>
+          <p:cNvPr id="104" name="TextBox 103"/>
+          <p:cNvSpPr txBox="1"/>
+          <p:nvPr/>
+        </p:nvSpPr>
+        <p:spPr>
+          <a:xfrm>
+            <a:off x="457200" y="4900000"/>
+            <a:ext cx="11246760" cy="500000"/>
+          </a:xfrm>
+          <a:prstGeom prst="rect">
+            <a:avLst/>
+          </a:prstGeom>
+          <a:noFill/>
+        </p:spPr>
+        <p:txBody>
+          <a:bodyPr wrap="square">
+            <a:spAutoFit/>
+          </a:bodyPr>
+          <a:lstStyle/>
+          <a:p>
+            <a:r>
+              <a:rPr sz="1200" b="1">
+                <a:solidFill>
+                  <a:srgbClr val="8A1F1F"/>
+                </a:solidFill>
+                <a:latin typeface="Calibri"/>
+              </a:rPr>
+              <a:t>⚠ CORRECTION (2026-08-27): the notch used here was mis-clocked (~16.8Hz, not 38.5Hz) due to a firmware sample-rate bug — see the following slide. Step-response Ki ceiling has been rechecked with the real notch; the 5-20Hz sine-tracking comparison above has not yet been rerun.</a:t>
+            </a:r>
+          </a:p>
+        </p:txBody>
+      </p:sp>
     </p:spTree>
   </p:cSld>
   <mc:AlternateContent>
@@ -5925,6 +5960,265 @@
 </p:sld>
 </file>
 
+<file path=ppt/slides/slide22.xml><?xml version="1.0" encoding="utf-8"?>
+<p:sld xmlns:a="http://schemas.openxmlformats.org/drawingml/2006/main" xmlns:p="http://schemas.openxmlformats.org/presentationml/2006/main" xmlns:r="http://schemas.openxmlformats.org/officeDocument/2006/relationships">
+  <p:cSld>
+    <p:spTree>
+      <p:nvGrpSpPr>
+        <p:cNvPr id="1" name=""/>
+        <p:cNvGrpSpPr/>
+        <p:nvPr/>
+      </p:nvGrpSpPr>
+      <p:grpSpPr/>
+      <p:sp>
+        <p:nvSpPr>
+          <p:cNvPr id="2" name="TextBox 1"/>
+          <p:cNvSpPr txBox="1"/>
+          <p:nvPr/>
+        </p:nvSpPr>
+        <p:spPr>
+          <a:xfrm>
+            <a:off x="457200" y="228600"/>
+            <a:ext cx="11246760" cy="486360"/>
+          </a:xfrm>
+          <a:prstGeom prst="rect">
+            <a:avLst/>
+          </a:prstGeom>
+          <a:noFill/>
+        </p:spPr>
+        <p:txBody>
+          <a:bodyPr wrap="square">
+            <a:spAutoFit/>
+          </a:bodyPr>
+          <a:lstStyle/>
+          <a:p>
+            <a:r>
+              <a:rPr sz="2300" b="1">
+                <a:solidFill>
+                  <a:srgbClr val="1A1A2E"/>
+                </a:solidFill>
+                <a:latin typeface="Calibri"/>
+              </a:rPr>
+              <a:t>Found a real notch bug: it was mis-clocked at ~16.8Hz, not 38.5Hz — fixed, and the real notch is WORSE</a:t>
+            </a:r>
+          </a:p>
+        </p:txBody>
+      </p:sp>
+      <p:cxnSp>
+        <p:nvCxnSpPr>
+          <p:cNvPr id="3" name="Connector 2"/>
+          <p:cNvCxnSpPr/>
+          <p:nvPr/>
+        </p:nvCxnSpPr>
+        <p:spPr>
+          <a:xfrm>
+            <a:off x="457200" y="960120"/>
+            <a:ext cx="11247120" cy="0"/>
+          </a:xfrm>
+          <a:prstGeom prst="line">
+            <a:avLst/>
+          </a:prstGeom>
+          <a:ln w="19080">
+            <a:solidFill>
+              <a:srgbClr val="2E5C8A"/>
+            </a:solidFill>
+          </a:ln>
+        </p:spPr>
+        <p:style>
+          <a:lnRef idx="2">
+            <a:schemeClr val="accent1"/>
+          </a:lnRef>
+          <a:fillRef idx="0">
+            <a:schemeClr val="accent1"/>
+          </a:fillRef>
+          <a:effectRef idx="1">
+            <a:schemeClr val="accent1"/>
+          </a:effectRef>
+          <a:fontRef idx="minor">
+            <a:schemeClr val="tx1"/>
+          </a:fontRef>
+        </p:style>
+      </p:cxnSp>
+      <p:sp>
+        <p:nvSpPr>
+          <p:cNvPr id="4" name="TextBox 3"/>
+          <p:cNvSpPr txBox="1"/>
+          <p:nvPr/>
+        </p:nvSpPr>
+        <p:spPr>
+          <a:xfrm>
+            <a:off x="457200" y="1143000"/>
+            <a:ext cx="5577480" cy="3565800"/>
+          </a:xfrm>
+          <a:prstGeom prst="rect">
+            <a:avLst/>
+          </a:prstGeom>
+          <a:noFill/>
+        </p:spPr>
+        <p:txBody>
+          <a:bodyPr wrap="square">
+            <a:spAutoFit/>
+          </a:bodyPr>
+          <a:lstStyle/>
+          <a:p>
+            <a:pPr>
+              <a:spcAft>
+                <a:spcPts val="900"/>
+              </a:spcAft>
+            </a:pPr>
+            <a:r>
+              <a:rPr sz="1300">
+                <a:solidFill>
+                  <a:srgbClr val="333333"/>
+                </a:solidFill>
+                <a:latin typeface="Calibri"/>
+              </a:rPr>
+              <a:t>• </a:t>
+            </a:r>
+            <a:r>
+              <a:rPr sz="1300">
+                <a:solidFill>
+                  <a:srgbClr val="333333"/>
+                </a:solidFill>
+                <a:latin typeface="Calibri"/>
+              </a:rPr>
+              <a:t>cmd_set_notch hardcoded the filter's assumed sample rate to 457.5Hz — at our throttled 200Hz operating point, a notch requested at 38.5Hz actually landed at ~16.8Hz, carving a hole in the 10-20Hz band instead of suppressing the resonance.</a:t>
+            </a:r>
+          </a:p>
+          <a:p>
+            <a:pPr>
+              <a:spcAft>
+                <a:spcPts val="900"/>
+              </a:spcAft>
+            </a:pPr>
+            <a:r>
+              <a:rPr sz="1300">
+                <a:solidFill>
+                  <a:srgbClr val="333333"/>
+                </a:solidFill>
+                <a:latin typeface="Calibri"/>
+              </a:rPr>
+              <a:t>• </a:t>
+            </a:r>
+            <a:r>
+              <a:rPr sz="1300">
+                <a:solidFill>
+                  <a:srgbClr val="333333"/>
+                </a:solidFill>
+                <a:latin typeface="Calibri"/>
+              </a:rPr>
+              <a:t>Fixed to use the real current control rate (same pattern the lead compensator's set_lead already used correctly). Built clean, flashed, hardware-verified.</a:t>
+            </a:r>
+          </a:p>
+          <a:p>
+            <a:pPr>
+              <a:spcAft>
+                <a:spcPts val="900"/>
+              </a:spcAft>
+            </a:pPr>
+            <a:r>
+              <a:rPr sz="1300">
+                <a:solidFill>
+                  <a:srgbClr val="333333"/>
+                </a:solidFill>
+                <a:latin typeface="Calibri"/>
+              </a:rPr>
+              <a:t>• </a:t>
+            </a:r>
+            <a:r>
+              <a:rPr sz="1300">
+                <a:solidFill>
+                  <a:srgbClr val="333333"/>
+                </a:solidFill>
+                <a:latin typeface="Calibri"/>
+              </a:rPr>
+              <a:t>Reran the Ki sweep with the REAL 38.5Hz notch: clean through Ki~350, rings by 400 — a LOWER ceiling than no notch at all (~500-550) and even lower than the buggy 16.8Hz version (~400). Not yet root-caused why.</a:t>
+            </a:r>
+          </a:p>
+          <a:p>
+            <a:pPr>
+              <a:spcAft>
+                <a:spcPts val="900"/>
+              </a:spcAft>
+            </a:pPr>
+            <a:r>
+              <a:rPr sz="1300">
+                <a:solidFill>
+                  <a:srgbClr val="333333"/>
+                </a:solidFill>
+                <a:latin typeface="Calibri"/>
+              </a:rPr>
+              <a:t>• </a:t>
+            </a:r>
+            <a:r>
+              <a:rPr sz="1300">
+                <a:solidFill>
+                  <a:srgbClr val="333333"/>
+                </a:solidFill>
+                <a:latin typeface="Calibri"/>
+              </a:rPr>
+              <a:t>Does NOT explain the lead-compensator divergence: every lead+notch test ran at Ki=200, which is clean under both the buggy AND the real notch — that investigation is still open.</a:t>
+            </a:r>
+          </a:p>
+          <a:p>
+            <a:pPr>
+              <a:spcAft>
+                <a:spcPts val="900"/>
+              </a:spcAft>
+            </a:pPr>
+            <a:r>
+              <a:rPr sz="1300">
+                <a:solidFill>
+                  <a:srgbClr val="333333"/>
+                </a:solidFill>
+                <a:latin typeface="Calibri"/>
+              </a:rPr>
+              <a:t>• </a:t>
+            </a:r>
+            <a:r>
+              <a:rPr sz="1300">
+                <a:solidFill>
+                  <a:srgbClr val="333333"/>
+                </a:solidFill>
+                <a:latin typeface="Calibri"/>
+              </a:rPr>
+              <a:t>Every notch number on record before this fix (including the previous slide's 5-20Hz sine comparison) should be treated as unverified until rerun.</a:t>
+            </a:r>
+          </a:p>
+        </p:txBody>
+      </p:sp>
+      <p:pic>
+        <p:nvPicPr>
+          <p:cNvPr id="5" name="Picture 4" descr="fta_notch_ki_ceiling_comparison.png"/>
+          <p:cNvPicPr>
+            <a:picLocks noChangeAspect="1"/>
+          </p:cNvPicPr>
+          <p:nvPr/>
+        </p:nvPicPr>
+        <p:blipFill>
+          <a:blip r:embed="rId2"/>
+          <a:stretch>
+            <a:fillRect/>
+          </a:stretch>
+        </p:blipFill>
+        <p:spPr>
+          <a:xfrm>
+            <a:off x="6378030" y="1143000"/>
+            <a:ext cx="5348700" cy="3565800"/>
+          </a:xfrm>
+          <a:prstGeom prst="rect">
+            <a:avLst/>
+          </a:prstGeom>
+        </p:spPr>
+      </p:pic>
+    </p:spTree>
+  </p:cSld>
+  <p:clrMapOvr>
+    <a:masterClrMapping/>
+  </p:clrMapOvr>
+</p:sld>
+</file>
+
 <file path=ppt/slides/slide3.xml><?xml version="1.0" encoding="utf-8"?>
 <p:sld xmlns:a="http://schemas.openxmlformats.org/drawingml/2006/main" xmlns:p="http://schemas.openxmlformats.org/presentationml/2006/main" xmlns:r="http://schemas.openxmlformats.org/officeDocument/2006/relationships" xmlns:p14="http://schemas.microsoft.com/office/powerpoint/2010/main" xmlns:p15="http://schemas.microsoft.com/office/powerpoint/2012/main" xmlns:mc="http://schemas.openxmlformats.org/markup-compatibility/2006">
   <p:cSld>

--- a/docs/session_results_2026-08-18_pid_tuning.pptx
+++ b/docs/session_results_2026-08-18_pid_tuning.pptx
@@ -4094,13 +4094,13 @@
           <a:lstStyle/>
           <a:p>
             <a:r>
-              <a:rPr sz="2400" b="1">
+              <a:rPr sz="2300" b="1">
                 <a:solidFill>
                   <a:srgbClr val="1A1A2E"/>
                 </a:solidFill>
                 <a:latin typeface="Calibri"/>
               </a:rPr>
-              <a:t>Open-loop plant Bode plot — the resonance, not delay or tuning, is the ceiling</a:t>
+              <a:t>Found a real notch bug: it was mis-clocked at ~16.8Hz, not 38.5Hz — fixed, and the real notch is WORSE</a:t>
             </a:r>
           </a:p>
         </p:txBody>
@@ -4168,7 +4168,7 @@
               </a:spcAft>
             </a:pPr>
             <a:r>
-              <a:rPr sz="1250">
+              <a:rPr sz="1300">
                 <a:solidFill>
                   <a:srgbClr val="333333"/>
                 </a:solidFill>
@@ -4177,13 +4177,13 @@
               <a:t>• </a:t>
             </a:r>
             <a:r>
-              <a:rPr sz="1250">
-                <a:solidFill>
-                  <a:srgbClr val="333333"/>
-                </a:solidFill>
-                <a:latin typeface="Calibri"/>
-              </a:rPr>
-              <a:t>Built a firmware open-loop sine generator (bypasses the PID entirely, drives dac_y directly) and swept dac_y→cx across 1-50Hz — the first real open-loop frequency response measured this project.</a:t>
+              <a:rPr sz="1300">
+                <a:solidFill>
+                  <a:srgbClr val="333333"/>
+                </a:solidFill>
+                <a:latin typeface="Calibri"/>
+              </a:rPr>
+              <a:t>cmd_set_notch hardcoded the filter's assumed sample rate to 457.5Hz — at our throttled 200Hz operating point, a notch requested at 38.5Hz actually landed at ~16.8Hz, carving a hole in the 10-20Hz band instead of suppressing the resonance.</a:t>
             </a:r>
           </a:p>
           <a:p>
@@ -4193,7 +4193,7 @@
               </a:spcAft>
             </a:pPr>
             <a:r>
-              <a:rPr sz="1250">
+              <a:rPr sz="1300">
                 <a:solidFill>
                   <a:srgbClr val="333333"/>
                 </a:solidFill>
@@ -4202,13 +4202,13 @@
               <a:t>• </a:t>
             </a:r>
             <a:r>
-              <a:rPr sz="1250">
-                <a:solidFill>
-                  <a:srgbClr val="333333"/>
-                </a:solidFill>
-                <a:latin typeface="Calibri"/>
-              </a:rPr>
-              <a:t>Phase has real margin through 10-20Hz (40° at 10Hz, 79° at 20Hz) — the plant itself isn't the problem IN that band.</a:t>
+              <a:rPr sz="1300">
+                <a:solidFill>
+                  <a:srgbClr val="333333"/>
+                </a:solidFill>
+                <a:latin typeface="Calibri"/>
+              </a:rPr>
+              <a:t>Fixed to use the real current control rate (same pattern the lead compensator's set_lead already used correctly). Built clean, flashed, hardware-verified.</a:t>
             </a:r>
           </a:p>
           <a:p>
@@ -4218,7 +4218,7 @@
               </a:spcAft>
             </a:pPr>
             <a:r>
-              <a:rPr sz="1250">
+              <a:rPr sz="1300">
                 <a:solidFill>
                   <a:srgbClr val="333333"/>
                 </a:solidFill>
@@ -4227,13 +4227,13 @@
               <a:t>• </a:t>
             </a:r>
             <a:r>
-              <a:rPr sz="1250">
-                <a:solidFill>
-                  <a:srgbClr val="333333"/>
-                </a:solidFill>
-                <a:latin typeface="Calibri"/>
-              </a:rPr>
-              <a:t>Sharp resonance at 38.5Hz (gain ~7.6x DC) — matches the ring-down test exactly, from a completely independent method (forced sine vs. free decay). Strong cross-validation, not a fluke.</a:t>
+              <a:rPr sz="1300">
+                <a:solidFill>
+                  <a:srgbClr val="333333"/>
+                </a:solidFill>
+                <a:latin typeface="Calibri"/>
+              </a:rPr>
+              <a:t>Reran the Ki sweep with the REAL 38.5Hz notch: clean through Ki~350, rings by 400 — a LOWER ceiling than no notch at all (~500-550) and even lower than the buggy 16.8Hz version (~400). Not yet root-caused why.</a:t>
             </a:r>
           </a:p>
           <a:p>
@@ -4243,7 +4243,7 @@
               </a:spcAft>
             </a:pPr>
             <a:r>
-              <a:rPr sz="1250">
+              <a:rPr sz="1300">
                 <a:solidFill>
                   <a:srgbClr val="333333"/>
                 </a:solidFill>
@@ -4252,13 +4252,13 @@
               <a:t>• </a:t>
             </a:r>
             <a:r>
-              <a:rPr sz="1250">
-                <a:solidFill>
-                  <a:srgbClr val="333333"/>
-                </a:solidFill>
-                <a:latin typeface="Calibri"/>
-              </a:rPr>
-              <a:t>5Hz lag (12.0ms) matches the directly-measured pure loop delay (~11.5ms) — a third independent cross-check.</a:t>
+              <a:rPr sz="1300">
+                <a:solidFill>
+                  <a:srgbClr val="333333"/>
+                </a:solidFill>
+                <a:latin typeface="Calibri"/>
+              </a:rPr>
+              <a:t>Does NOT explain the lead-compensator divergence: every lead+notch test ran at Ki=200, which is clean under both the buggy AND the real notch — that investigation is still open.</a:t>
             </a:r>
           </a:p>
           <a:p>
@@ -4268,7 +4268,7 @@
               </a:spcAft>
             </a:pPr>
             <a:r>
-              <a:rPr sz="1250">
+              <a:rPr sz="1300">
                 <a:solidFill>
                   <a:srgbClr val="333333"/>
                 </a:solidFill>
@@ -4277,60 +4277,35 @@
               <a:t>• </a:t>
             </a:r>
             <a:r>
-              <a:rPr sz="1250">
-                <a:solidFill>
-                  <a:srgbClr val="333333"/>
-                </a:solidFill>
-                <a:latin typeface="Calibri"/>
-              </a:rPr>
-              <a:t>Any Ki high enough to push gain-crossover toward ~20-25Hz+ runs into the resonance's fast phase rotation (~140° in under two octaves) — explains the hard Ki ceiling all session, and why the notch's narrow fix gave a mixed result (previous slide).</a:t>
-            </a:r>
-          </a:p>
-          <a:p>
-            <a:pPr>
-              <a:spcAft>
-                <a:spcPts val="900"/>
-              </a:spcAft>
-            </a:pPr>
-            <a:r>
-              <a:rPr sz="1250">
-                <a:solidFill>
-                  <a:srgbClr val="333333"/>
-                </a:solidFill>
-                <a:latin typeface="Calibri"/>
-              </a:rPr>
-              <a:t>• </a:t>
-            </a:r>
-            <a:r>
-              <a:rPr sz="1250">
-                <a:solidFill>
-                  <a:srgbClr val="333333"/>
-                </a:solidFill>
-                <a:latin typeface="Calibri"/>
-              </a:rPr>
-              <a:t>Strongest evidence yet for a hardware fix (stiffen/damp the flexure) over continued controller tuning.</a:t>
+              <a:rPr sz="1300">
+                <a:solidFill>
+                  <a:srgbClr val="333333"/>
+                </a:solidFill>
+                <a:latin typeface="Calibri"/>
+              </a:rPr>
+              <a:t>Every notch number on record before this fix (including the previous slide's 5-20Hz sine comparison) should be treated as unverified until rerun.</a:t>
             </a:r>
           </a:p>
         </p:txBody>
       </p:sp>
       <p:pic>
         <p:nvPicPr>
-          <p:cNvPr id="5" name="Picture 4" descr="fta_open_loop_bode_summary.png"/>
+          <p:cNvPr id="5" name="Picture 4" descr="fta_notch_ki_ceiling_comparison.png"/>
           <p:cNvPicPr>
             <a:picLocks noChangeAspect="1"/>
           </p:cNvPicPr>
           <p:nvPr/>
         </p:nvPicPr>
         <p:blipFill>
-          <a:blip r:embed="rId3"/>
+          <a:blip r:embed="rId2"/>
           <a:stretch>
             <a:fillRect/>
           </a:stretch>
         </p:blipFill>
         <p:spPr>
           <a:xfrm>
-            <a:off x="7031760" y="1143000"/>
-            <a:ext cx="4041240" cy="3565800"/>
+            <a:off x="6378030" y="1143000"/>
+            <a:ext cx="5348700" cy="3565800"/>
           </a:xfrm>
           <a:prstGeom prst="rect">
             <a:avLst/>
@@ -4342,379 +4317,6 @@
   <p:clrMapOvr>
     <a:masterClrMapping/>
   </p:clrMapOvr>
-</p:sld>
-</file>
-
-<file path=ppt/slides/slide19.xml><?xml version="1.0" encoding="utf-8"?>
-<p:sld xmlns:a="http://schemas.openxmlformats.org/drawingml/2006/main" xmlns:p="http://schemas.openxmlformats.org/presentationml/2006/main" xmlns:r="http://schemas.openxmlformats.org/officeDocument/2006/relationships" xmlns:p14="http://schemas.microsoft.com/office/powerpoint/2010/main" xmlns:p15="http://schemas.microsoft.com/office/powerpoint/2012/main" xmlns:mc="http://schemas.openxmlformats.org/markup-compatibility/2006">
-  <p:cSld>
-    <p:spTree>
-      <p:nvGrpSpPr>
-        <p:cNvPr id="1" name=""/>
-        <p:cNvGrpSpPr/>
-        <p:nvPr/>
-      </p:nvGrpSpPr>
-      <p:grpSpPr>
-        <a:xfrm>
-          <a:off x="0" y="0"/>
-          <a:ext cx="0" cy="0"/>
-          <a:chOff x="0" y="0"/>
-          <a:chExt cx="0" cy="0"/>
-        </a:xfrm>
-      </p:grpSpPr>
-      <p:sp>
-        <p:nvSpPr>
-          <p:cNvPr id="104" name="CustomShape 1"/>
-          <p:cNvSpPr/>
-          <p:nvPr/>
-        </p:nvSpPr>
-        <p:spPr>
-          <a:xfrm>
-            <a:off x="457200" y="228600"/>
-            <a:ext cx="11246400" cy="486000"/>
-          </a:xfrm>
-          <a:prstGeom prst="rect">
-            <a:avLst/>
-          </a:prstGeom>
-          <a:noFill/>
-          <a:ln>
-            <a:noFill/>
-          </a:ln>
-        </p:spPr>
-        <p:style>
-          <a:lnRef idx="0"/>
-          <a:fillRef idx="0"/>
-          <a:effectRef idx="0"/>
-          <a:fontRef idx="minor"/>
-        </p:style>
-        <p:txBody>
-          <a:bodyPr lIns="90000" rIns="90000" tIns="45000" bIns="45000">
-            <a:spAutoFit/>
-          </a:bodyPr>
-          <a:p>
-            <a:pPr>
-              <a:lnSpc>
-                <a:spcPct val="100000"/>
-              </a:lnSpc>
-            </a:pPr>
-            <a:r>
-              <a:rPr b="1" lang="en-US" sz="2600" spc="-1" strike="noStrike">
-                <a:solidFill>
-                  <a:srgbClr val="1a1a2e"/>
-                </a:solidFill>
-                <a:latin typeface="Calibri"/>
-                <a:ea typeface="DejaVu Sans"/>
-              </a:rPr>
-              <a:t>Where this leaves us</a:t>
-            </a:r>
-            <a:endParaRPr b="0" lang="en-US" sz="2600" spc="-1" strike="noStrike">
-              <a:latin typeface="Arial"/>
-            </a:endParaRPr>
-          </a:p>
-        </p:txBody>
-      </p:sp>
-      <p:sp>
-        <p:nvSpPr>
-          <p:cNvPr id="105" name="Line 2"/>
-          <p:cNvSpPr/>
-          <p:nvPr/>
-        </p:nvSpPr>
-        <p:spPr>
-          <a:xfrm>
-            <a:off x="457200" y="960120"/>
-            <a:ext cx="11247120" cy="0"/>
-          </a:xfrm>
-          <a:prstGeom prst="line">
-            <a:avLst/>
-          </a:prstGeom>
-          <a:ln w="19080">
-            <a:solidFill>
-              <a:srgbClr val="2e5c8a"/>
-            </a:solidFill>
-            <a:round/>
-          </a:ln>
-        </p:spPr>
-        <p:style>
-          <a:lnRef idx="2">
-            <a:schemeClr val="accent1"/>
-          </a:lnRef>
-          <a:fillRef idx="0">
-            <a:schemeClr val="accent1"/>
-          </a:fillRef>
-          <a:effectRef idx="1">
-            <a:schemeClr val="accent1"/>
-          </a:effectRef>
-          <a:fontRef idx="minor"/>
-        </p:style>
-        <p:txBody>
-          <a:bodyPr/>
-          <a:p/>
-        </p:txBody>
-      </p:sp>
-      <p:sp>
-        <p:nvSpPr>
-          <p:cNvPr id="106" name="CustomShape 3"/>
-          <p:cNvSpPr/>
-          <p:nvPr/>
-        </p:nvSpPr>
-        <p:spPr>
-          <a:xfrm>
-            <a:off x="731520" y="1097280"/>
-            <a:ext cx="10697760" cy="3269520"/>
-          </a:xfrm>
-          <a:prstGeom prst="rect">
-            <a:avLst/>
-          </a:prstGeom>
-          <a:noFill/>
-          <a:ln>
-            <a:noFill/>
-          </a:ln>
-        </p:spPr>
-        <p:style>
-          <a:lnRef idx="0"/>
-          <a:fillRef idx="0"/>
-          <a:effectRef idx="0"/>
-          <a:fontRef idx="minor"/>
-        </p:style>
-        <p:txBody>
-          <a:bodyPr lIns="90000" rIns="90000" tIns="45000" bIns="45000">
-            <a:spAutoFit/>
-          </a:bodyPr>
-          <a:p>
-            <a:pPr>
-              <a:lnSpc>
-                <a:spcPct val="100000"/>
-              </a:lnSpc>
-              <a:spcAft>
-                <a:spcPts val="799"/>
-              </a:spcAft>
-            </a:pPr>
-            <a:r>
-              <a:rPr b="0" lang="en-US" sz="1350" spc="-1" strike="noStrike">
-                <a:solidFill>
-                  <a:srgbClr val="333333"/>
-                </a:solidFill>
-                <a:latin typeface="Calibri"/>
-                <a:ea typeface="DejaVu Sans"/>
-              </a:rPr>
-              <a:t>• </a:t>
-            </a:r>
-            <a:r>
-              <a:rPr b="0" lang="en-US" sz="1350" spc="-1" strike="noStrike">
-                <a:solidFill>
-                  <a:srgbClr val="333333"/>
-                </a:solidFill>
-                <a:latin typeface="Calibri"/>
-                <a:ea typeface="DejaVu Sans"/>
-              </a:rPr>
-              <a:t>Best working point found: Kp=1.75 / Ki=200, throttled to 200Hz — settling ~15x faster and tracking gain ~2-3x higher (5-20Hz) than the un-throttled Ki=15 fallback.</a:t>
-            </a:r>
-            <a:endParaRPr b="0" lang="en-US" sz="1350" spc="-1" strike="noStrike">
-              <a:latin typeface="Arial"/>
-            </a:endParaRPr>
-          </a:p>
-          <a:p>
-            <a:pPr>
-              <a:lnSpc>
-                <a:spcPct val="100000"/>
-              </a:lnSpc>
-              <a:spcAft>
-                <a:spcPts val="799"/>
-              </a:spcAft>
-            </a:pPr>
-            <a:r>
-              <a:rPr b="0" lang="en-US" sz="1350" spc="-1" strike="noStrike">
-                <a:solidFill>
-                  <a:srgbClr val="333333"/>
-                </a:solidFill>
-                <a:latin typeface="Calibri"/>
-                <a:ea typeface="DejaVu Sans"/>
-              </a:rPr>
-              <a:t>• </a:t>
-            </a:r>
-            <a:r>
-              <a:rPr b="0" lang="en-US" sz="1350" spc="-1" strike="noStrike">
-                <a:solidFill>
-                  <a:srgbClr val="333333"/>
-                </a:solidFill>
-                <a:latin typeface="Calibri"/>
-                <a:ea typeface="DejaVu Sans"/>
-              </a:rPr>
-              <a:t>But even this doesn't solve the mission: sine validation shows S (disturbance sensitivity) still 66-80% across 5-20Hz — most of a real beacon wobble would still show up as position error. Fast step settling ≠ good disturbance rejection.</a:t>
-            </a:r>
-            <a:endParaRPr b="0" lang="en-US" sz="1350" spc="-1" strike="noStrike">
-              <a:latin typeface="Arial"/>
-            </a:endParaRPr>
-          </a:p>
-          <a:p>
-            <a:pPr>
-              <a:lnSpc>
-                <a:spcPct val="100000"/>
-              </a:lnSpc>
-              <a:spcAft>
-                <a:spcPts val="799"/>
-              </a:spcAft>
-            </a:pPr>
-            <a:r>
-              <a:rPr b="0" lang="en-US" sz="1350" spc="-1" strike="noStrike">
-                <a:solidFill>
-                  <a:srgbClr val="333333"/>
-                </a:solidFill>
-                <a:latin typeface="Calibri"/>
-                <a:ea typeface="DejaVu Sans"/>
-              </a:rPr>
-              <a:t>• </a:t>
-            </a:r>
-            <a:r>
-              <a:rPr b="0" lang="en-US" sz="1350" spc="-1" strike="noStrike">
-                <a:solidFill>
-                  <a:srgbClr val="333333"/>
-                </a:solidFill>
-                <a:latin typeface="Calibri"/>
-                <a:ea typeface="DejaVu Sans"/>
-              </a:rPr>
-              <a:t>Real closed-loop delay measured directly at ~11.5ms (not the ~41ms this project had assumed) — more phase-margin headroom than feared. A full open-loop Bode sweep (previous slide) CONFIRMS the resonance (38.5Hz), not raw latency, is the dominant constraint — cross-validated against the ring-down test and the delay measurement itself.</a:t>
-            </a:r>
-            <a:endParaRPr b="0" lang="en-US" sz="1350" spc="-1" strike="noStrike">
-              <a:latin typeface="Arial"/>
-            </a:endParaRPr>
-          </a:p>
-          <a:p>
-            <a:pPr>
-              <a:lnSpc>
-                <a:spcPct val="100000"/>
-              </a:lnSpc>
-              <a:spcAft>
-                <a:spcPts val="799"/>
-              </a:spcAft>
-            </a:pPr>
-            <a:r>
-              <a:rPr b="0" lang="en-US" sz="1350" spc="-1" strike="noStrike">
-                <a:solidFill>
-                  <a:srgbClr val="333333"/>
-                </a:solidFill>
-                <a:latin typeface="Calibri"/>
-                <a:ea typeface="DejaVu Sans"/>
-              </a:rPr>
-              <a:t>• </a:t>
-            </a:r>
-            <a:r>
-              <a:rPr b="0" lang="en-US" sz="1350" spc="-1" strike="noStrike">
-                <a:solidFill>
-                  <a:srgbClr val="333333"/>
-                </a:solidFill>
-                <a:latin typeface="Calibri"/>
-                <a:ea typeface="DejaVu Sans"/>
-              </a:rPr>
-              <a:t>Boxcar smoothing tested and ruled out — throttling's rate reduction is the real lever, averaging adds nothing on top of it.</a:t>
-            </a:r>
-            <a:endParaRPr b="0" lang="en-US" sz="1350" spc="-1" strike="noStrike">
-              <a:latin typeface="Arial"/>
-            </a:endParaRPr>
-          </a:p>
-          <a:p>
-            <a:pPr>
-              <a:lnSpc>
-                <a:spcPct val="100000"/>
-              </a:lnSpc>
-              <a:spcAft>
-                <a:spcPts val="799"/>
-              </a:spcAft>
-            </a:pPr>
-            <a:r>
-              <a:rPr b="0" lang="en-US" sz="1350" spc="-1" strike="noStrike">
-                <a:solidFill>
-                  <a:srgbClr val="333333"/>
-                </a:solidFill>
-                <a:latin typeface="Calibri"/>
-                <a:ea typeface="DejaVu Sans"/>
-              </a:rPr>
-              <a:t>• </a:t>
-            </a:r>
-            <a:r>
-              <a:rPr b="0" lang="en-US" sz="1350" spc="-1" strike="noStrike">
-                <a:solidFill>
-                  <a:srgbClr val="333333"/>
-                </a:solidFill>
-                <a:latin typeface="Calibri"/>
-                <a:ea typeface="DejaVu Sans"/>
-              </a:rPr>
-              <a:t>The single most important open question: the ORIGINAL Kp=1.75/Ki=200 full-rate instability that motivated this whole day's investigation has stopped reproducing, for reasons unconnected to any software change made today. This casts real doubt on how durable ANY of today's "stable" configurations actually are — worth understanding before trusting them long-term.</a:t>
-            </a:r>
-            <a:endParaRPr b="0" lang="en-US" sz="1350" spc="-1" strike="noStrike">
-              <a:latin typeface="Arial"/>
-            </a:endParaRPr>
-          </a:p>
-          <a:p>
-            <a:pPr>
-              <a:lnSpc>
-                <a:spcPct val="100000"/>
-              </a:lnSpc>
-              <a:spcAft>
-                <a:spcPts val="799"/>
-              </a:spcAft>
-            </a:pPr>
-            <a:r>
-              <a:rPr b="0" lang="en-US" sz="1350" spc="-1" strike="noStrike">
-                <a:solidFill>
-                  <a:srgbClr val="333333"/>
-                </a:solidFill>
-                <a:latin typeface="Calibri"/>
-                <a:ea typeface="DejaVu Sans"/>
-              </a:rPr>
-              <a:t>• </a:t>
-            </a:r>
-            <a:r>
-              <a:rPr b="0" lang="en-US" sz="1350" spc="-1" strike="noStrike">
-                <a:solidFill>
-                  <a:srgbClr val="333333"/>
-                </a:solidFill>
-                <a:latin typeface="Calibri"/>
-                <a:ea typeface="DejaVu Sans"/>
-              </a:rPr>
-              <a:t>Notch filter: doesn't raise the Ki ceiling (400 vs. 500 without it) — rebuilt comparison at each config's own max speed found it helps at 5-10Hz but is worse than no notch at 15-20Hz (stopband skirt attenuates real signal there). D-term: ruled out at every setting tried, but only under the same since-fixed throttle bug — worth one clean retest.</a:t>
-            </a:r>
-            <a:endParaRPr b="0" lang="en-US" sz="1350" spc="-1" strike="noStrike">
-              <a:latin typeface="Arial"/>
-            </a:endParaRPr>
-          </a:p>
-          <a:p>
-            <a:pPr>
-              <a:spcAft>
-                <a:spcPts val="800"/>
-              </a:spcAft>
-            </a:pPr>
-            <a:r>
-              <a:rPr sz="1300">
-                <a:solidFill>
-                  <a:srgbClr val="333333"/>
-                </a:solidFill>
-                <a:latin typeface="Calibri"/>
-              </a:rPr>
-              <a:t>• </a:t>
-            </a:r>
-            <a:r>
-              <a:rPr sz="1300" b="1">
-                <a:solidFill>
-                  <a:srgbClr val="333333"/>
-                </a:solidFill>
-                <a:latin typeface="Calibri"/>
-              </a:rPr>
-              <a:t>HEADLINE: the open-loop Bode plot shows real phase margin through 10-20Hz on its own, but a sharp resonance starting ~20-25Hz caps how far Ki can push the loop's gain-crossover — this looks like a real mechanical bandwidth ceiling, not a controller-tuning problem. Recommend a hardware change (stiffen/damp the flexure) over further gain search.</a:t>
-            </a:r>
-          </a:p>
-        </p:txBody>
-      </p:sp>
-    </p:spTree>
-  </p:cSld>
-  <mc:AlternateContent>
-    <mc:Choice Requires="p14">
-      <p:transition spd="slow" p14:dur="2000"/>
-    </mc:Choice>
-    <mc:Fallback>
-      <p:transition spd="slow"/>
-    </mc:Fallback>
-  </mc:AlternateContent>
 </p:sld>
 </file>
 
@@ -5062,7 +4664,7 @@
                 </a:solidFill>
                 <a:latin typeface="Calibri"/>
               </a:rPr>
-              <a:t>Bench resonance runs ~20% below FEA — rescaling the 0.75mm-arm prediction</a:t>
+              <a:t>Open-loop plant Bode plot — the resonance, not delay or tuning, is the ceiling</a:t>
             </a:r>
           </a:p>
         </p:txBody>
@@ -5111,7 +4713,7 @@
         <p:spPr>
           <a:xfrm>
             <a:off x="457200" y="1143000"/>
-            <a:ext cx="11246760" cy="2130000"/>
+            <a:ext cx="5577480" cy="3565800"/>
           </a:xfrm>
           <a:prstGeom prst="rect">
             <a:avLst/>
@@ -5145,7 +4747,7 @@
                 </a:solidFill>
                 <a:latin typeface="Calibri"/>
               </a:rPr>
-              <a:t>The cross-validated bench resonance for the current 0.5mm flexure is 38.5Hz (bode peak + ring-down peak-spacing, previous slides) — the FEA modal analysis on the same 0.5mm part predicts mode 1 at 48.19Hz, mode 2 at 52.92Hz.</a:t>
+              <a:t>Built a firmware open-loop sine generator (bypasses the PID entirely, drives dac_y directly) and swept dac_y→cx across 1-50Hz — the first real open-loop frequency response measured this project.</a:t>
             </a:r>
           </a:p>
           <a:p>
@@ -5170,7 +4772,7 @@
                 </a:solidFill>
                 <a:latin typeface="Calibri"/>
               </a:rPr>
-              <a:t>That's the model running ~20% high (measured/FEA = 0.80) — expected for a bolted flexure: FEA assumes a perfectly rigid clamp, the real joint has bolt-preload/contact compliance plus unmodeled fiber and connector mass, both of which lower the true frequency.</a:t>
+              <a:t>Phase has real margin through 10-20Hz (40° at 10Hz, 79° at 20Hz) — the plant itself isn't the problem IN that band.</a:t>
             </a:r>
           </a:p>
           <a:p>
@@ -5195,7 +4797,7 @@
                 </a:solidFill>
                 <a:latin typeface="Calibri"/>
               </a:rPr>
-              <a:t>Applying that 0.80 correction to the just-ordered 0.75mm-arm FEA (mode 1 = 81.35Hz, mode 2 = 90.55Hz, below) gives a revised bench estimate of ~65Hz / ~72Hz, not the raw FEA numbers.</a:t>
+              <a:t>Sharp resonance at 38.5Hz (gain ~7.6x DC) — matches the ring-down test exactly, from a completely independent method (forced sine vs. free decay). Strong cross-validation, not a fluke.</a:t>
             </a:r>
           </a:p>
           <a:p>
@@ -5220,7 +4822,7 @@
                 </a:solidFill>
                 <a:latin typeface="Calibri"/>
               </a:rPr>
-              <a:t>Against the 20Hz PID target that's ~3.25x margin corrected vs. 4.1x from raw FEA — still a real win over today's ~1.9x (38.5Hz/20Hz), just less headroom than FEA alone suggested.</a:t>
+              <a:t>5Hz lag (12.0ms) matches the directly-measured pure loop delay (~11.5ms) — a third independent cross-check.</a:t>
             </a:r>
           </a:p>
           <a:p>
@@ -5239,53 +4841,45 @@
               <a:t>• </a:t>
             </a:r>
             <a:r>
-              <a:rPr sz="1250" b="1">
-                <a:solidFill>
-                  <a:srgbClr val="333333"/>
-                </a:solidFill>
-                <a:latin typeface="Calibri"/>
-              </a:rPr>
-              <a:t>Action: </a:t>
-            </a:r>
-            <a:r>
               <a:rPr sz="1250">
                 <a:solidFill>
                   <a:srgbClr val="333333"/>
                 </a:solidFill>
                 <a:latin typeface="Calibri"/>
               </a:rPr>
-              <a:t>rerun the bode sweep and ring-down test on the 0.75mm part once installed to confirm directly, rather than relying on the scaled estimate.</a:t>
+              <a:t>Any Ki high enough to push gain-crossover toward ~20-25Hz+ runs into the resonance's fast phase rotation (~140° in under two octaves) — explains the hard Ki ceiling all session, and why the notch's narrow fix gave a mixed result (previous slide).</a:t>
+            </a:r>
+          </a:p>
+          <a:p>
+            <a:pPr>
+              <a:spcAft>
+                <a:spcPts val="900"/>
+              </a:spcAft>
+            </a:pPr>
+            <a:r>
+              <a:rPr sz="1250">
+                <a:solidFill>
+                  <a:srgbClr val="333333"/>
+                </a:solidFill>
+                <a:latin typeface="Calibri"/>
+              </a:rPr>
+              <a:t>• </a:t>
+            </a:r>
+            <a:r>
+              <a:rPr sz="1250">
+                <a:solidFill>
+                  <a:srgbClr val="333333"/>
+                </a:solidFill>
+                <a:latin typeface="Calibri"/>
+              </a:rPr>
+              <a:t>Strongest evidence yet for a hardware fix (stiffen/damp the flexure) over continued controller tuning.</a:t>
             </a:r>
           </a:p>
         </p:txBody>
       </p:sp>
       <p:pic>
         <p:nvPicPr>
-          <p:cNvPr id="5" name="Picture 4" descr="main_flexure_v3_FEM_mode1_48.19Hz.png"/>
-          <p:cNvPicPr>
-            <a:picLocks noChangeAspect="1"/>
-          </p:cNvPicPr>
-          <p:nvPr/>
-        </p:nvPicPr>
-        <p:blipFill>
-          <a:blip r:embed="rId2"/>
-          <a:stretch>
-            <a:fillRect/>
-          </a:stretch>
-        </p:blipFill>
-        <p:spPr>
-          <a:xfrm>
-            <a:off x="2466609" y="3423000"/>
-            <a:ext cx="3282334" cy="3010680"/>
-          </a:xfrm>
-          <a:prstGeom prst="rect">
-            <a:avLst/>
-          </a:prstGeom>
-        </p:spPr>
-      </p:pic>
-      <p:pic>
-        <p:nvPicPr>
-          <p:cNvPr id="6" name="Picture 5" descr="PCB_FTA_assembly_FEM_mode1_81.35Hz.png"/>
+          <p:cNvPr id="5" name="Picture 4" descr="fta_open_loop_bode_summary.png"/>
           <p:cNvPicPr>
             <a:picLocks noChangeAspect="1"/>
           </p:cNvPicPr>
@@ -5299,8 +4893,8 @@
         </p:blipFill>
         <p:spPr>
           <a:xfrm>
-            <a:off x="6048943" y="3423000"/>
-            <a:ext cx="3676448" cy="3010680"/>
+            <a:off x="7031760" y="1143000"/>
+            <a:ext cx="4041240" cy="3565800"/>
           </a:xfrm>
           <a:prstGeom prst="rect">
             <a:avLst/>
@@ -5316,6 +4910,671 @@
 </file>
 
 <file path=ppt/slides/slide21.xml><?xml version="1.0" encoding="utf-8"?>
+<p:sld xmlns:a="http://schemas.openxmlformats.org/drawingml/2006/main" xmlns:p="http://schemas.openxmlformats.org/presentationml/2006/main" xmlns:r="http://schemas.openxmlformats.org/officeDocument/2006/relationships" xmlns:p14="http://schemas.microsoft.com/office/powerpoint/2010/main" xmlns:p15="http://schemas.microsoft.com/office/powerpoint/2012/main" xmlns:mc="http://schemas.openxmlformats.org/markup-compatibility/2006">
+  <p:cSld>
+    <p:spTree>
+      <p:nvGrpSpPr>
+        <p:cNvPr id="1" name=""/>
+        <p:cNvGrpSpPr/>
+        <p:nvPr/>
+      </p:nvGrpSpPr>
+      <p:grpSpPr>
+        <a:xfrm>
+          <a:off x="0" y="0"/>
+          <a:ext cx="0" cy="0"/>
+          <a:chOff x="0" y="0"/>
+          <a:chExt cx="0" cy="0"/>
+        </a:xfrm>
+      </p:grpSpPr>
+      <p:sp>
+        <p:nvSpPr>
+          <p:cNvPr id="104" name="CustomShape 1"/>
+          <p:cNvSpPr/>
+          <p:nvPr/>
+        </p:nvSpPr>
+        <p:spPr>
+          <a:xfrm>
+            <a:off x="457200" y="228600"/>
+            <a:ext cx="11246400" cy="486000"/>
+          </a:xfrm>
+          <a:prstGeom prst="rect">
+            <a:avLst/>
+          </a:prstGeom>
+          <a:noFill/>
+          <a:ln>
+            <a:noFill/>
+          </a:ln>
+        </p:spPr>
+        <p:style>
+          <a:lnRef idx="0"/>
+          <a:fillRef idx="0"/>
+          <a:effectRef idx="0"/>
+          <a:fontRef idx="minor"/>
+        </p:style>
+        <p:txBody>
+          <a:bodyPr lIns="90000" rIns="90000" tIns="45000" bIns="45000">
+            <a:spAutoFit/>
+          </a:bodyPr>
+          <a:p>
+            <a:pPr>
+              <a:lnSpc>
+                <a:spcPct val="100000"/>
+              </a:lnSpc>
+            </a:pPr>
+            <a:r>
+              <a:rPr b="1" lang="en-US" sz="2600" spc="-1" strike="noStrike">
+                <a:solidFill>
+                  <a:srgbClr val="1a1a2e"/>
+                </a:solidFill>
+                <a:latin typeface="Calibri"/>
+                <a:ea typeface="DejaVu Sans"/>
+              </a:rPr>
+              <a:t>Where this leaves us</a:t>
+            </a:r>
+            <a:endParaRPr b="0" lang="en-US" sz="2600" spc="-1" strike="noStrike">
+              <a:latin typeface="Arial"/>
+            </a:endParaRPr>
+          </a:p>
+        </p:txBody>
+      </p:sp>
+      <p:sp>
+        <p:nvSpPr>
+          <p:cNvPr id="105" name="Line 2"/>
+          <p:cNvSpPr/>
+          <p:nvPr/>
+        </p:nvSpPr>
+        <p:spPr>
+          <a:xfrm>
+            <a:off x="457200" y="960120"/>
+            <a:ext cx="11247120" cy="0"/>
+          </a:xfrm>
+          <a:prstGeom prst="line">
+            <a:avLst/>
+          </a:prstGeom>
+          <a:ln w="19080">
+            <a:solidFill>
+              <a:srgbClr val="2e5c8a"/>
+            </a:solidFill>
+            <a:round/>
+          </a:ln>
+        </p:spPr>
+        <p:style>
+          <a:lnRef idx="2">
+            <a:schemeClr val="accent1"/>
+          </a:lnRef>
+          <a:fillRef idx="0">
+            <a:schemeClr val="accent1"/>
+          </a:fillRef>
+          <a:effectRef idx="1">
+            <a:schemeClr val="accent1"/>
+          </a:effectRef>
+          <a:fontRef idx="minor"/>
+        </p:style>
+        <p:txBody>
+          <a:bodyPr/>
+          <a:p/>
+        </p:txBody>
+      </p:sp>
+      <p:sp>
+        <p:nvSpPr>
+          <p:cNvPr id="106" name="CustomShape 3"/>
+          <p:cNvSpPr/>
+          <p:nvPr/>
+        </p:nvSpPr>
+        <p:spPr>
+          <a:xfrm>
+            <a:off x="731520" y="1097280"/>
+            <a:ext cx="10697760" cy="3269520"/>
+          </a:xfrm>
+          <a:prstGeom prst="rect">
+            <a:avLst/>
+          </a:prstGeom>
+          <a:noFill/>
+          <a:ln>
+            <a:noFill/>
+          </a:ln>
+        </p:spPr>
+        <p:style>
+          <a:lnRef idx="0"/>
+          <a:fillRef idx="0"/>
+          <a:effectRef idx="0"/>
+          <a:fontRef idx="minor"/>
+        </p:style>
+        <p:txBody>
+          <a:bodyPr lIns="90000" rIns="90000" tIns="45000" bIns="45000">
+            <a:spAutoFit/>
+          </a:bodyPr>
+          <a:p>
+            <a:pPr>
+              <a:lnSpc>
+                <a:spcPct val="100000"/>
+              </a:lnSpc>
+              <a:spcAft>
+                <a:spcPts val="799"/>
+              </a:spcAft>
+            </a:pPr>
+            <a:r>
+              <a:rPr b="0" lang="en-US" sz="1350" spc="-1" strike="noStrike">
+                <a:solidFill>
+                  <a:srgbClr val="333333"/>
+                </a:solidFill>
+                <a:latin typeface="Calibri"/>
+                <a:ea typeface="DejaVu Sans"/>
+              </a:rPr>
+              <a:t>• </a:t>
+            </a:r>
+            <a:r>
+              <a:rPr b="0" lang="en-US" sz="1350" spc="-1" strike="noStrike">
+                <a:solidFill>
+                  <a:srgbClr val="333333"/>
+                </a:solidFill>
+                <a:latin typeface="Calibri"/>
+                <a:ea typeface="DejaVu Sans"/>
+              </a:rPr>
+              <a:t>Best working point found: Kp=1.75 / Ki=200, throttled to 200Hz — settling ~15x faster and tracking gain ~2-3x higher (5-20Hz) than the un-throttled Ki=15 fallback.</a:t>
+            </a:r>
+            <a:endParaRPr b="0" lang="en-US" sz="1350" spc="-1" strike="noStrike">
+              <a:latin typeface="Arial"/>
+            </a:endParaRPr>
+          </a:p>
+          <a:p>
+            <a:pPr>
+              <a:lnSpc>
+                <a:spcPct val="100000"/>
+              </a:lnSpc>
+              <a:spcAft>
+                <a:spcPts val="799"/>
+              </a:spcAft>
+            </a:pPr>
+            <a:r>
+              <a:rPr b="0" lang="en-US" sz="1350" spc="-1" strike="noStrike">
+                <a:solidFill>
+                  <a:srgbClr val="333333"/>
+                </a:solidFill>
+                <a:latin typeface="Calibri"/>
+                <a:ea typeface="DejaVu Sans"/>
+              </a:rPr>
+              <a:t>• </a:t>
+            </a:r>
+            <a:r>
+              <a:rPr b="0" lang="en-US" sz="1350" spc="-1" strike="noStrike">
+                <a:solidFill>
+                  <a:srgbClr val="333333"/>
+                </a:solidFill>
+                <a:latin typeface="Calibri"/>
+                <a:ea typeface="DejaVu Sans"/>
+              </a:rPr>
+              <a:t>But even this doesn't solve the mission: sine validation shows S (disturbance sensitivity) still 66-80% across 5-20Hz — most of a real beacon wobble would still show up as position error. Fast step settling ≠ good disturbance rejection.</a:t>
+            </a:r>
+            <a:endParaRPr b="0" lang="en-US" sz="1350" spc="-1" strike="noStrike">
+              <a:latin typeface="Arial"/>
+            </a:endParaRPr>
+          </a:p>
+          <a:p>
+            <a:pPr>
+              <a:lnSpc>
+                <a:spcPct val="100000"/>
+              </a:lnSpc>
+              <a:spcAft>
+                <a:spcPts val="799"/>
+              </a:spcAft>
+            </a:pPr>
+            <a:r>
+              <a:rPr b="0" lang="en-US" sz="1350" spc="-1" strike="noStrike">
+                <a:solidFill>
+                  <a:srgbClr val="333333"/>
+                </a:solidFill>
+                <a:latin typeface="Calibri"/>
+                <a:ea typeface="DejaVu Sans"/>
+              </a:rPr>
+              <a:t>• </a:t>
+            </a:r>
+            <a:r>
+              <a:rPr b="0" lang="en-US" sz="1350" spc="-1" strike="noStrike">
+                <a:solidFill>
+                  <a:srgbClr val="333333"/>
+                </a:solidFill>
+                <a:latin typeface="Calibri"/>
+                <a:ea typeface="DejaVu Sans"/>
+              </a:rPr>
+              <a:t>Real closed-loop delay measured directly at ~11.5ms (not the ~41ms this project had assumed) — more phase-margin headroom than feared. A full open-loop Bode sweep (previous slide) CONFIRMS the resonance (38.5Hz), not raw latency, is the dominant constraint — cross-validated against the ring-down test and the delay measurement itself.</a:t>
+            </a:r>
+            <a:endParaRPr b="0" lang="en-US" sz="1350" spc="-1" strike="noStrike">
+              <a:latin typeface="Arial"/>
+            </a:endParaRPr>
+          </a:p>
+          <a:p>
+            <a:pPr>
+              <a:lnSpc>
+                <a:spcPct val="100000"/>
+              </a:lnSpc>
+              <a:spcAft>
+                <a:spcPts val="799"/>
+              </a:spcAft>
+            </a:pPr>
+            <a:r>
+              <a:rPr b="0" lang="en-US" sz="1350" spc="-1" strike="noStrike">
+                <a:solidFill>
+                  <a:srgbClr val="333333"/>
+                </a:solidFill>
+                <a:latin typeface="Calibri"/>
+                <a:ea typeface="DejaVu Sans"/>
+              </a:rPr>
+              <a:t>• </a:t>
+            </a:r>
+            <a:r>
+              <a:rPr b="0" lang="en-US" sz="1350" spc="-1" strike="noStrike">
+                <a:solidFill>
+                  <a:srgbClr val="333333"/>
+                </a:solidFill>
+                <a:latin typeface="Calibri"/>
+                <a:ea typeface="DejaVu Sans"/>
+              </a:rPr>
+              <a:t>Boxcar smoothing tested and ruled out — throttling's rate reduction is the real lever, averaging adds nothing on top of it.</a:t>
+            </a:r>
+            <a:endParaRPr b="0" lang="en-US" sz="1350" spc="-1" strike="noStrike">
+              <a:latin typeface="Arial"/>
+            </a:endParaRPr>
+          </a:p>
+          <a:p>
+            <a:pPr>
+              <a:lnSpc>
+                <a:spcPct val="100000"/>
+              </a:lnSpc>
+              <a:spcAft>
+                <a:spcPts val="799"/>
+              </a:spcAft>
+            </a:pPr>
+            <a:r>
+              <a:rPr b="0" lang="en-US" sz="1350" spc="-1" strike="noStrike">
+                <a:solidFill>
+                  <a:srgbClr val="333333"/>
+                </a:solidFill>
+                <a:latin typeface="Calibri"/>
+                <a:ea typeface="DejaVu Sans"/>
+              </a:rPr>
+              <a:t>• </a:t>
+            </a:r>
+            <a:r>
+              <a:rPr b="0" lang="en-US" sz="1350" spc="-1" strike="noStrike">
+                <a:solidFill>
+                  <a:srgbClr val="333333"/>
+                </a:solidFill>
+                <a:latin typeface="Calibri"/>
+                <a:ea typeface="DejaVu Sans"/>
+              </a:rPr>
+              <a:t>The single most important open question: the ORIGINAL Kp=1.75/Ki=200 full-rate instability that motivated this whole day's investigation has stopped reproducing, for reasons unconnected to any software change made today. This casts real doubt on how durable ANY of today's "stable" configurations actually are — worth understanding before trusting them long-term.</a:t>
+            </a:r>
+            <a:endParaRPr b="0" lang="en-US" sz="1350" spc="-1" strike="noStrike">
+              <a:latin typeface="Arial"/>
+            </a:endParaRPr>
+          </a:p>
+          <a:p>
+            <a:pPr>
+              <a:lnSpc>
+                <a:spcPct val="100000"/>
+              </a:lnSpc>
+              <a:spcAft>
+                <a:spcPts val="799"/>
+              </a:spcAft>
+            </a:pPr>
+            <a:r>
+              <a:rPr b="0" lang="en-US" sz="1350" spc="-1" strike="noStrike">
+                <a:solidFill>
+                  <a:srgbClr val="333333"/>
+                </a:solidFill>
+                <a:latin typeface="Calibri"/>
+                <a:ea typeface="DejaVu Sans"/>
+              </a:rPr>
+              <a:t>• </a:t>
+            </a:r>
+            <a:r>
+              <a:rPr b="0" lang="en-US" sz="1350" spc="-1" strike="noStrike">
+                <a:solidFill>
+                  <a:srgbClr val="333333"/>
+                </a:solidFill>
+                <a:latin typeface="Calibri"/>
+                <a:ea typeface="DejaVu Sans"/>
+              </a:rPr>
+              <a:t>Notch filter: doesn't raise the Ki ceiling (400 vs. 500 without it) — rebuilt comparison at each config's own max speed found it helps at 5-10Hz but is worse than no notch at 15-20Hz (stopband skirt attenuates real signal there). D-term: ruled out at every setting tried, but only under the same since-fixed throttle bug — worth one clean retest.</a:t>
+            </a:r>
+            <a:endParaRPr b="0" lang="en-US" sz="1350" spc="-1" strike="noStrike">
+              <a:latin typeface="Arial"/>
+            </a:endParaRPr>
+          </a:p>
+          <a:p>
+            <a:pPr>
+              <a:spcAft>
+                <a:spcPts val="800"/>
+              </a:spcAft>
+            </a:pPr>
+            <a:r>
+              <a:rPr sz="1300">
+                <a:solidFill>
+                  <a:srgbClr val="333333"/>
+                </a:solidFill>
+                <a:latin typeface="Calibri"/>
+              </a:rPr>
+              <a:t>• </a:t>
+            </a:r>
+            <a:r>
+              <a:rPr sz="1300" b="1">
+                <a:solidFill>
+                  <a:srgbClr val="333333"/>
+                </a:solidFill>
+                <a:latin typeface="Calibri"/>
+              </a:rPr>
+              <a:t>HEADLINE: the open-loop Bode plot shows real phase margin through 10-20Hz on its own, but a sharp resonance starting ~20-25Hz caps how far Ki can push the loop's gain-crossover — this looks like a real mechanical bandwidth ceiling, not a controller-tuning problem. Recommend a hardware change (stiffen/damp the flexure) over further gain search.</a:t>
+            </a:r>
+          </a:p>
+        </p:txBody>
+      </p:sp>
+    </p:spTree>
+  </p:cSld>
+  <mc:AlternateContent>
+    <mc:Choice Requires="p14">
+      <p:transition spd="slow" p14:dur="2000"/>
+    </mc:Choice>
+    <mc:Fallback>
+      <p:transition spd="slow"/>
+    </mc:Fallback>
+  </mc:AlternateContent>
+</p:sld>
+</file>
+
+<file path=ppt/slides/slide22.xml><?xml version="1.0" encoding="utf-8"?>
+<p:sld xmlns:a="http://schemas.openxmlformats.org/drawingml/2006/main" xmlns:p="http://schemas.openxmlformats.org/presentationml/2006/main" xmlns:r="http://schemas.openxmlformats.org/officeDocument/2006/relationships">
+  <p:cSld>
+    <p:spTree>
+      <p:nvGrpSpPr>
+        <p:cNvPr id="1" name=""/>
+        <p:cNvGrpSpPr/>
+        <p:nvPr/>
+      </p:nvGrpSpPr>
+      <p:grpSpPr/>
+      <p:sp>
+        <p:nvSpPr>
+          <p:cNvPr id="2" name="TextBox 1"/>
+          <p:cNvSpPr txBox="1"/>
+          <p:nvPr/>
+        </p:nvSpPr>
+        <p:spPr>
+          <a:xfrm>
+            <a:off x="457200" y="228600"/>
+            <a:ext cx="11246760" cy="486360"/>
+          </a:xfrm>
+          <a:prstGeom prst="rect">
+            <a:avLst/>
+          </a:prstGeom>
+          <a:noFill/>
+        </p:spPr>
+        <p:txBody>
+          <a:bodyPr wrap="square">
+            <a:spAutoFit/>
+          </a:bodyPr>
+          <a:lstStyle/>
+          <a:p>
+            <a:r>
+              <a:rPr sz="2400" b="1">
+                <a:solidFill>
+                  <a:srgbClr val="1A1A2E"/>
+                </a:solidFill>
+                <a:latin typeface="Calibri"/>
+              </a:rPr>
+              <a:t>Bench resonance runs ~20% below FEA — rescaling the 0.75mm-arm prediction</a:t>
+            </a:r>
+          </a:p>
+        </p:txBody>
+      </p:sp>
+      <p:cxnSp>
+        <p:nvCxnSpPr>
+          <p:cNvPr id="3" name="Connector 2"/>
+          <p:cNvCxnSpPr/>
+          <p:nvPr/>
+        </p:nvCxnSpPr>
+        <p:spPr>
+          <a:xfrm>
+            <a:off x="457200" y="960120"/>
+            <a:ext cx="11247120" cy="0"/>
+          </a:xfrm>
+          <a:prstGeom prst="line">
+            <a:avLst/>
+          </a:prstGeom>
+          <a:ln w="19080">
+            <a:solidFill>
+              <a:srgbClr val="2E5C8A"/>
+            </a:solidFill>
+          </a:ln>
+        </p:spPr>
+        <p:style>
+          <a:lnRef idx="2">
+            <a:schemeClr val="accent1"/>
+          </a:lnRef>
+          <a:fillRef idx="0">
+            <a:schemeClr val="accent1"/>
+          </a:fillRef>
+          <a:effectRef idx="1">
+            <a:schemeClr val="accent1"/>
+          </a:effectRef>
+          <a:fontRef idx="minor">
+            <a:schemeClr val="tx1"/>
+          </a:fontRef>
+        </p:style>
+      </p:cxnSp>
+      <p:sp>
+        <p:nvSpPr>
+          <p:cNvPr id="4" name="TextBox 3"/>
+          <p:cNvSpPr txBox="1"/>
+          <p:nvPr/>
+        </p:nvSpPr>
+        <p:spPr>
+          <a:xfrm>
+            <a:off x="457200" y="1143000"/>
+            <a:ext cx="11246760" cy="2130000"/>
+          </a:xfrm>
+          <a:prstGeom prst="rect">
+            <a:avLst/>
+          </a:prstGeom>
+          <a:noFill/>
+        </p:spPr>
+        <p:txBody>
+          <a:bodyPr wrap="square">
+            <a:spAutoFit/>
+          </a:bodyPr>
+          <a:lstStyle/>
+          <a:p>
+            <a:pPr>
+              <a:spcAft>
+                <a:spcPts val="900"/>
+              </a:spcAft>
+            </a:pPr>
+            <a:r>
+              <a:rPr sz="1250">
+                <a:solidFill>
+                  <a:srgbClr val="333333"/>
+                </a:solidFill>
+                <a:latin typeface="Calibri"/>
+              </a:rPr>
+              <a:t>• </a:t>
+            </a:r>
+            <a:r>
+              <a:rPr sz="1250">
+                <a:solidFill>
+                  <a:srgbClr val="333333"/>
+                </a:solidFill>
+                <a:latin typeface="Calibri"/>
+              </a:rPr>
+              <a:t>The cross-validated bench resonance for the current 0.5mm flexure is 38.5Hz (bode peak + ring-down peak-spacing, previous slides) — the FEA modal analysis on the same 0.5mm part predicts mode 1 at 48.19Hz, mode 2 at 52.92Hz.</a:t>
+            </a:r>
+          </a:p>
+          <a:p>
+            <a:pPr>
+              <a:spcAft>
+                <a:spcPts val="900"/>
+              </a:spcAft>
+            </a:pPr>
+            <a:r>
+              <a:rPr sz="1250">
+                <a:solidFill>
+                  <a:srgbClr val="333333"/>
+                </a:solidFill>
+                <a:latin typeface="Calibri"/>
+              </a:rPr>
+              <a:t>• </a:t>
+            </a:r>
+            <a:r>
+              <a:rPr sz="1250">
+                <a:solidFill>
+                  <a:srgbClr val="333333"/>
+                </a:solidFill>
+                <a:latin typeface="Calibri"/>
+              </a:rPr>
+              <a:t>That's the model running ~20% high (measured/FEA = 0.80) — expected for a bolted flexure: FEA assumes a perfectly rigid clamp, the real joint has bolt-preload/contact compliance plus unmodeled fiber and connector mass, both of which lower the true frequency.</a:t>
+            </a:r>
+          </a:p>
+          <a:p>
+            <a:pPr>
+              <a:spcAft>
+                <a:spcPts val="900"/>
+              </a:spcAft>
+            </a:pPr>
+            <a:r>
+              <a:rPr sz="1250">
+                <a:solidFill>
+                  <a:srgbClr val="333333"/>
+                </a:solidFill>
+                <a:latin typeface="Calibri"/>
+              </a:rPr>
+              <a:t>• </a:t>
+            </a:r>
+            <a:r>
+              <a:rPr sz="1250">
+                <a:solidFill>
+                  <a:srgbClr val="333333"/>
+                </a:solidFill>
+                <a:latin typeface="Calibri"/>
+              </a:rPr>
+              <a:t>Applying that 0.80 correction to the just-ordered 0.75mm-arm FEA (mode 1 = 81.35Hz, mode 2 = 90.55Hz, below) gives a revised bench estimate of ~65Hz / ~72Hz, not the raw FEA numbers.</a:t>
+            </a:r>
+          </a:p>
+          <a:p>
+            <a:pPr>
+              <a:spcAft>
+                <a:spcPts val="900"/>
+              </a:spcAft>
+            </a:pPr>
+            <a:r>
+              <a:rPr sz="1250">
+                <a:solidFill>
+                  <a:srgbClr val="333333"/>
+                </a:solidFill>
+                <a:latin typeface="Calibri"/>
+              </a:rPr>
+              <a:t>• </a:t>
+            </a:r>
+            <a:r>
+              <a:rPr sz="1250">
+                <a:solidFill>
+                  <a:srgbClr val="333333"/>
+                </a:solidFill>
+                <a:latin typeface="Calibri"/>
+              </a:rPr>
+              <a:t>Against the 20Hz PID target that's ~3.25x margin corrected vs. 4.1x from raw FEA — still a real win over today's ~1.9x (38.5Hz/20Hz), just less headroom than FEA alone suggested.</a:t>
+            </a:r>
+          </a:p>
+          <a:p>
+            <a:pPr>
+              <a:spcAft>
+                <a:spcPts val="900"/>
+              </a:spcAft>
+            </a:pPr>
+            <a:r>
+              <a:rPr sz="1250">
+                <a:solidFill>
+                  <a:srgbClr val="333333"/>
+                </a:solidFill>
+                <a:latin typeface="Calibri"/>
+              </a:rPr>
+              <a:t>• </a:t>
+            </a:r>
+            <a:r>
+              <a:rPr sz="1250" b="1">
+                <a:solidFill>
+                  <a:srgbClr val="333333"/>
+                </a:solidFill>
+                <a:latin typeface="Calibri"/>
+              </a:rPr>
+              <a:t>Action: </a:t>
+            </a:r>
+            <a:r>
+              <a:rPr sz="1250">
+                <a:solidFill>
+                  <a:srgbClr val="333333"/>
+                </a:solidFill>
+                <a:latin typeface="Calibri"/>
+              </a:rPr>
+              <a:t>rerun the bode sweep and ring-down test on the 0.75mm part once installed to confirm directly, rather than relying on the scaled estimate.</a:t>
+            </a:r>
+          </a:p>
+        </p:txBody>
+      </p:sp>
+      <p:pic>
+        <p:nvPicPr>
+          <p:cNvPr id="5" name="Picture 4" descr="main_flexure_v3_FEM_mode1_48.19Hz.png"/>
+          <p:cNvPicPr>
+            <a:picLocks noChangeAspect="1"/>
+          </p:cNvPicPr>
+          <p:nvPr/>
+        </p:nvPicPr>
+        <p:blipFill>
+          <a:blip r:embed="rId2"/>
+          <a:stretch>
+            <a:fillRect/>
+          </a:stretch>
+        </p:blipFill>
+        <p:spPr>
+          <a:xfrm>
+            <a:off x="2466609" y="3423000"/>
+            <a:ext cx="3282334" cy="3010680"/>
+          </a:xfrm>
+          <a:prstGeom prst="rect">
+            <a:avLst/>
+          </a:prstGeom>
+        </p:spPr>
+      </p:pic>
+      <p:pic>
+        <p:nvPicPr>
+          <p:cNvPr id="6" name="Picture 5" descr="PCB_FTA_assembly_FEM_mode1_81.35Hz.png"/>
+          <p:cNvPicPr>
+            <a:picLocks noChangeAspect="1"/>
+          </p:cNvPicPr>
+          <p:nvPr/>
+        </p:nvPicPr>
+        <p:blipFill>
+          <a:blip r:embed="rId3"/>
+          <a:stretch>
+            <a:fillRect/>
+          </a:stretch>
+        </p:blipFill>
+        <p:spPr>
+          <a:xfrm>
+            <a:off x="6048943" y="3423000"/>
+            <a:ext cx="3676448" cy="3010680"/>
+          </a:xfrm>
+          <a:prstGeom prst="rect">
+            <a:avLst/>
+          </a:prstGeom>
+        </p:spPr>
+      </p:pic>
+    </p:spTree>
+  </p:cSld>
+  <p:clrMapOvr>
+    <a:masterClrMapping/>
+  </p:clrMapOvr>
+</p:sld>
+</file>
+
+<file path=ppt/slides/slide23.xml><?xml version="1.0" encoding="utf-8"?>
 <p:sld xmlns:a="http://schemas.openxmlformats.org/drawingml/2006/main" xmlns:p="http://schemas.openxmlformats.org/presentationml/2006/main" xmlns:r="http://schemas.openxmlformats.org/officeDocument/2006/relationships">
   <p:cSld>
     <p:spTree>
@@ -5960,265 +6219,6 @@
 </p:sld>
 </file>
 
-<file path=ppt/slides/slide22.xml><?xml version="1.0" encoding="utf-8"?>
-<p:sld xmlns:a="http://schemas.openxmlformats.org/drawingml/2006/main" xmlns:p="http://schemas.openxmlformats.org/presentationml/2006/main" xmlns:r="http://schemas.openxmlformats.org/officeDocument/2006/relationships">
-  <p:cSld>
-    <p:spTree>
-      <p:nvGrpSpPr>
-        <p:cNvPr id="1" name=""/>
-        <p:cNvGrpSpPr/>
-        <p:nvPr/>
-      </p:nvGrpSpPr>
-      <p:grpSpPr/>
-      <p:sp>
-        <p:nvSpPr>
-          <p:cNvPr id="2" name="TextBox 1"/>
-          <p:cNvSpPr txBox="1"/>
-          <p:nvPr/>
-        </p:nvSpPr>
-        <p:spPr>
-          <a:xfrm>
-            <a:off x="457200" y="228600"/>
-            <a:ext cx="11246760" cy="486360"/>
-          </a:xfrm>
-          <a:prstGeom prst="rect">
-            <a:avLst/>
-          </a:prstGeom>
-          <a:noFill/>
-        </p:spPr>
-        <p:txBody>
-          <a:bodyPr wrap="square">
-            <a:spAutoFit/>
-          </a:bodyPr>
-          <a:lstStyle/>
-          <a:p>
-            <a:r>
-              <a:rPr sz="2300" b="1">
-                <a:solidFill>
-                  <a:srgbClr val="1A1A2E"/>
-                </a:solidFill>
-                <a:latin typeface="Calibri"/>
-              </a:rPr>
-              <a:t>Found a real notch bug: it was mis-clocked at ~16.8Hz, not 38.5Hz — fixed, and the real notch is WORSE</a:t>
-            </a:r>
-          </a:p>
-        </p:txBody>
-      </p:sp>
-      <p:cxnSp>
-        <p:nvCxnSpPr>
-          <p:cNvPr id="3" name="Connector 2"/>
-          <p:cNvCxnSpPr/>
-          <p:nvPr/>
-        </p:nvCxnSpPr>
-        <p:spPr>
-          <a:xfrm>
-            <a:off x="457200" y="960120"/>
-            <a:ext cx="11247120" cy="0"/>
-          </a:xfrm>
-          <a:prstGeom prst="line">
-            <a:avLst/>
-          </a:prstGeom>
-          <a:ln w="19080">
-            <a:solidFill>
-              <a:srgbClr val="2E5C8A"/>
-            </a:solidFill>
-          </a:ln>
-        </p:spPr>
-        <p:style>
-          <a:lnRef idx="2">
-            <a:schemeClr val="accent1"/>
-          </a:lnRef>
-          <a:fillRef idx="0">
-            <a:schemeClr val="accent1"/>
-          </a:fillRef>
-          <a:effectRef idx="1">
-            <a:schemeClr val="accent1"/>
-          </a:effectRef>
-          <a:fontRef idx="minor">
-            <a:schemeClr val="tx1"/>
-          </a:fontRef>
-        </p:style>
-      </p:cxnSp>
-      <p:sp>
-        <p:nvSpPr>
-          <p:cNvPr id="4" name="TextBox 3"/>
-          <p:cNvSpPr txBox="1"/>
-          <p:nvPr/>
-        </p:nvSpPr>
-        <p:spPr>
-          <a:xfrm>
-            <a:off x="457200" y="1143000"/>
-            <a:ext cx="5577480" cy="3565800"/>
-          </a:xfrm>
-          <a:prstGeom prst="rect">
-            <a:avLst/>
-          </a:prstGeom>
-          <a:noFill/>
-        </p:spPr>
-        <p:txBody>
-          <a:bodyPr wrap="square">
-            <a:spAutoFit/>
-          </a:bodyPr>
-          <a:lstStyle/>
-          <a:p>
-            <a:pPr>
-              <a:spcAft>
-                <a:spcPts val="900"/>
-              </a:spcAft>
-            </a:pPr>
-            <a:r>
-              <a:rPr sz="1300">
-                <a:solidFill>
-                  <a:srgbClr val="333333"/>
-                </a:solidFill>
-                <a:latin typeface="Calibri"/>
-              </a:rPr>
-              <a:t>• </a:t>
-            </a:r>
-            <a:r>
-              <a:rPr sz="1300">
-                <a:solidFill>
-                  <a:srgbClr val="333333"/>
-                </a:solidFill>
-                <a:latin typeface="Calibri"/>
-              </a:rPr>
-              <a:t>cmd_set_notch hardcoded the filter's assumed sample rate to 457.5Hz — at our throttled 200Hz operating point, a notch requested at 38.5Hz actually landed at ~16.8Hz, carving a hole in the 10-20Hz band instead of suppressing the resonance.</a:t>
-            </a:r>
-          </a:p>
-          <a:p>
-            <a:pPr>
-              <a:spcAft>
-                <a:spcPts val="900"/>
-              </a:spcAft>
-            </a:pPr>
-            <a:r>
-              <a:rPr sz="1300">
-                <a:solidFill>
-                  <a:srgbClr val="333333"/>
-                </a:solidFill>
-                <a:latin typeface="Calibri"/>
-              </a:rPr>
-              <a:t>• </a:t>
-            </a:r>
-            <a:r>
-              <a:rPr sz="1300">
-                <a:solidFill>
-                  <a:srgbClr val="333333"/>
-                </a:solidFill>
-                <a:latin typeface="Calibri"/>
-              </a:rPr>
-              <a:t>Fixed to use the real current control rate (same pattern the lead compensator's set_lead already used correctly). Built clean, flashed, hardware-verified.</a:t>
-            </a:r>
-          </a:p>
-          <a:p>
-            <a:pPr>
-              <a:spcAft>
-                <a:spcPts val="900"/>
-              </a:spcAft>
-            </a:pPr>
-            <a:r>
-              <a:rPr sz="1300">
-                <a:solidFill>
-                  <a:srgbClr val="333333"/>
-                </a:solidFill>
-                <a:latin typeface="Calibri"/>
-              </a:rPr>
-              <a:t>• </a:t>
-            </a:r>
-            <a:r>
-              <a:rPr sz="1300">
-                <a:solidFill>
-                  <a:srgbClr val="333333"/>
-                </a:solidFill>
-                <a:latin typeface="Calibri"/>
-              </a:rPr>
-              <a:t>Reran the Ki sweep with the REAL 38.5Hz notch: clean through Ki~350, rings by 400 — a LOWER ceiling than no notch at all (~500-550) and even lower than the buggy 16.8Hz version (~400). Not yet root-caused why.</a:t>
-            </a:r>
-          </a:p>
-          <a:p>
-            <a:pPr>
-              <a:spcAft>
-                <a:spcPts val="900"/>
-              </a:spcAft>
-            </a:pPr>
-            <a:r>
-              <a:rPr sz="1300">
-                <a:solidFill>
-                  <a:srgbClr val="333333"/>
-                </a:solidFill>
-                <a:latin typeface="Calibri"/>
-              </a:rPr>
-              <a:t>• </a:t>
-            </a:r>
-            <a:r>
-              <a:rPr sz="1300">
-                <a:solidFill>
-                  <a:srgbClr val="333333"/>
-                </a:solidFill>
-                <a:latin typeface="Calibri"/>
-              </a:rPr>
-              <a:t>Does NOT explain the lead-compensator divergence: every lead+notch test ran at Ki=200, which is clean under both the buggy AND the real notch — that investigation is still open.</a:t>
-            </a:r>
-          </a:p>
-          <a:p>
-            <a:pPr>
-              <a:spcAft>
-                <a:spcPts val="900"/>
-              </a:spcAft>
-            </a:pPr>
-            <a:r>
-              <a:rPr sz="1300">
-                <a:solidFill>
-                  <a:srgbClr val="333333"/>
-                </a:solidFill>
-                <a:latin typeface="Calibri"/>
-              </a:rPr>
-              <a:t>• </a:t>
-            </a:r>
-            <a:r>
-              <a:rPr sz="1300">
-                <a:solidFill>
-                  <a:srgbClr val="333333"/>
-                </a:solidFill>
-                <a:latin typeface="Calibri"/>
-              </a:rPr>
-              <a:t>Every notch number on record before this fix (including the previous slide's 5-20Hz sine comparison) should be treated as unverified until rerun.</a:t>
-            </a:r>
-          </a:p>
-        </p:txBody>
-      </p:sp>
-      <p:pic>
-        <p:nvPicPr>
-          <p:cNvPr id="5" name="Picture 4" descr="fta_notch_ki_ceiling_comparison.png"/>
-          <p:cNvPicPr>
-            <a:picLocks noChangeAspect="1"/>
-          </p:cNvPicPr>
-          <p:nvPr/>
-        </p:nvPicPr>
-        <p:blipFill>
-          <a:blip r:embed="rId2"/>
-          <a:stretch>
-            <a:fillRect/>
-          </a:stretch>
-        </p:blipFill>
-        <p:spPr>
-          <a:xfrm>
-            <a:off x="6378030" y="1143000"/>
-            <a:ext cx="5348700" cy="3565800"/>
-          </a:xfrm>
-          <a:prstGeom prst="rect">
-            <a:avLst/>
-          </a:prstGeom>
-        </p:spPr>
-      </p:pic>
-    </p:spTree>
-  </p:cSld>
-  <p:clrMapOvr>
-    <a:masterClrMapping/>
-  </p:clrMapOvr>
-</p:sld>
-</file>
-
 <file path=ppt/slides/slide3.xml><?xml version="1.0" encoding="utf-8"?>
 <p:sld xmlns:a="http://schemas.openxmlformats.org/drawingml/2006/main" xmlns:p="http://schemas.openxmlformats.org/presentationml/2006/main" xmlns:r="http://schemas.openxmlformats.org/officeDocument/2006/relationships" xmlns:p14="http://schemas.microsoft.com/office/powerpoint/2010/main" xmlns:p15="http://schemas.microsoft.com/office/powerpoint/2012/main" xmlns:mc="http://schemas.openxmlformats.org/markup-compatibility/2006">
   <p:cSld>

--- a/docs/session_results_2026-08-18_pid_tuning.pptx
+++ b/docs/session_results_2026-08-18_pid_tuning.pptx
@@ -5321,7 +5321,7 @@
                 </a:solidFill>
                 <a:latin typeface="Calibri"/>
               </a:rPr>
-              <a:t>Bench resonance runs ~20% below FEA — rescaling the 0.75mm-arm prediction</a:t>
+              <a:t>Bench resonance re-measured: 38.5Hz → ~47-50Hz — now close to FEA, not 20% below it</a:t>
             </a:r>
           </a:p>
         </p:txBody>
@@ -5385,11 +5385,36 @@
           <a:p>
             <a:pPr>
               <a:spcAft>
-                <a:spcPts val="900"/>
+                <a:spcPts val="600"/>
               </a:spcAft>
             </a:pPr>
             <a:r>
-              <a:rPr sz="1250">
+              <a:rPr sz="1150" b="1">
+                <a:solidFill>
+                  <a:srgbClr val="333333"/>
+                </a:solidFill>
+                <a:latin typeface="Calibri"/>
+              </a:rPr>
+              <a:t>Superseded number, stated plainly: </a:t>
+            </a:r>
+            <a:r>
+              <a:rPr sz="1150">
+                <a:solidFill>
+                  <a:srgbClr val="333333"/>
+                </a:solidFill>
+                <a:latin typeface="Calibri"/>
+              </a:rPr>
+              <a:t>38.5Hz (previous bode/ring-down) is superseded — after fixing ring-down timing bugs and testing both axes, the same peak-spacing method now reads 47.0-47.3Hz (x-axis, 2 trials) and 50.1Hz (y-axis, 1 trial). A real physical shift per CLAUDE.md, not a methodology fix; cause not yet identified.</a:t>
+            </a:r>
+          </a:p>
+          <a:p>
+            <a:pPr>
+              <a:spcAft>
+                <a:spcPts val="600"/>
+              </a:spcAft>
+            </a:pPr>
+            <a:r>
+              <a:rPr sz="1150">
                 <a:solidFill>
                   <a:srgbClr val="333333"/>
                 </a:solidFill>
@@ -5398,23 +5423,23 @@
               <a:t>• </a:t>
             </a:r>
             <a:r>
-              <a:rPr sz="1250">
-                <a:solidFill>
-                  <a:srgbClr val="333333"/>
-                </a:solidFill>
-                <a:latin typeface="Calibri"/>
-              </a:rPr>
-              <a:t>The cross-validated bench resonance for the current 0.5mm flexure is 38.5Hz (bode peak + ring-down peak-spacing, previous slides) — the FEA modal analysis on the same 0.5mm part predicts mode 1 at 48.19Hz, mode 2 at 52.92Hz.</a:t>
+              <a:rPr sz="1150">
+                <a:solidFill>
+                  <a:srgbClr val="333333"/>
+                </a:solidFill>
+                <a:latin typeface="Calibri"/>
+              </a:rPr>
+              <a:t>0.5mm FEA has two close bending modes (48.19Hz, 52.92Hz) — pairing x-axis↔mode 1, y-axis↔mode 2 gives measured/FEA = 0.978 and 0.947: within ~2-5% of FEA, not the ~20% gap previously reported.</a:t>
             </a:r>
           </a:p>
           <a:p>
             <a:pPr>
               <a:spcAft>
-                <a:spcPts val="900"/>
+                <a:spcPts val="600"/>
               </a:spcAft>
             </a:pPr>
             <a:r>
-              <a:rPr sz="1250">
+              <a:rPr sz="1150">
                 <a:solidFill>
                   <a:srgbClr val="333333"/>
                 </a:solidFill>
@@ -5423,23 +5448,23 @@
               <a:t>• </a:t>
             </a:r>
             <a:r>
-              <a:rPr sz="1250">
-                <a:solidFill>
-                  <a:srgbClr val="333333"/>
-                </a:solidFill>
-                <a:latin typeface="Calibri"/>
-              </a:rPr>
-              <a:t>That's the model running ~20% high (measured/FEA = 0.80) — expected for a bolted flexure: FEA assumes a perfectly rigid clamp, the real joint has bolt-preload/contact compliance plus unmodeled fiber and connector mass, both of which lower the true frequency.</a:t>
+              <a:rPr sz="1150">
+                <a:solidFill>
+                  <a:srgbClr val="333333"/>
+                </a:solidFill>
+                <a:latin typeface="Calibri"/>
+              </a:rPr>
+              <a:t>Applying that ~0.95-0.98 ratio (not the old 0.80) to the 0.75mm-arm FEA (81.35Hz, 90.55Hz, below) gives a revised estimate of ~79-86Hz — close to raw FEA, not the ~65/72Hz previously stated.</a:t>
             </a:r>
           </a:p>
           <a:p>
             <a:pPr>
               <a:spcAft>
-                <a:spcPts val="900"/>
+                <a:spcPts val="600"/>
               </a:spcAft>
             </a:pPr>
             <a:r>
-              <a:rPr sz="1250">
+              <a:rPr sz="1150">
                 <a:solidFill>
                   <a:srgbClr val="333333"/>
                 </a:solidFill>
@@ -5448,23 +5473,23 @@
               <a:t>• </a:t>
             </a:r>
             <a:r>
-              <a:rPr sz="1250">
-                <a:solidFill>
-                  <a:srgbClr val="333333"/>
-                </a:solidFill>
-                <a:latin typeface="Calibri"/>
-              </a:rPr>
-              <a:t>Applying that 0.80 correction to the just-ordered 0.75mm-arm FEA (mode 1 = 81.35Hz, mode 2 = 90.55Hz, below) gives a revised bench estimate of ~65Hz / ~72Hz, not the raw FEA numbers.</a:t>
+              <a:rPr sz="1150">
+                <a:solidFill>
+                  <a:srgbClr val="333333"/>
+                </a:solidFill>
+                <a:latin typeface="Calibri"/>
+              </a:rPr>
+              <a:t>Against the 20Hz PID target that's ~4x margin, not the more pessimistic 3.25x previously concluded here — close to what raw FEA always suggested.</a:t>
             </a:r>
           </a:p>
           <a:p>
             <a:pPr>
               <a:spcAft>
-                <a:spcPts val="900"/>
+                <a:spcPts val="600"/>
               </a:spcAft>
             </a:pPr>
             <a:r>
-              <a:rPr sz="1250">
+              <a:rPr sz="1150">
                 <a:solidFill>
                   <a:srgbClr val="333333"/>
                 </a:solidFill>
@@ -5473,47 +5498,22 @@
               <a:t>• </a:t>
             </a:r>
             <a:r>
-              <a:rPr sz="1250">
-                <a:solidFill>
-                  <a:srgbClr val="333333"/>
-                </a:solidFill>
-                <a:latin typeface="Calibri"/>
-              </a:rPr>
-              <a:t>Against the 20Hz PID target that's ~3.25x margin corrected vs. 4.1x from raw FEA — still a real win over today's ~1.9x (38.5Hz/20Hz), just less headroom than FEA alone suggested.</a:t>
-            </a:r>
-          </a:p>
-          <a:p>
-            <a:pPr>
-              <a:spcAft>
-                <a:spcPts val="900"/>
-              </a:spcAft>
-            </a:pPr>
-            <a:r>
-              <a:rPr sz="1250">
-                <a:solidFill>
-                  <a:srgbClr val="333333"/>
-                </a:solidFill>
-                <a:latin typeface="Calibri"/>
-              </a:rPr>
-              <a:t>• </a:t>
-            </a:r>
-            <a:r>
-              <a:rPr sz="1250" b="1">
-                <a:solidFill>
-                  <a:srgbClr val="333333"/>
-                </a:solidFill>
-                <a:latin typeface="Calibri"/>
-              </a:rPr>
-              <a:t>Action: </a:t>
-            </a:r>
-            <a:r>
-              <a:rPr sz="1250">
-                <a:solidFill>
-                  <a:srgbClr val="333333"/>
-                </a:solidFill>
-                <a:latin typeface="Calibri"/>
-              </a:rPr>
-              <a:t>rerun the bode sweep and ring-down test on the 0.75mm part once installed to confirm directly, rather than relying on the scaled estimate.</a:t>
+              <a:rPr sz="1150" b="1">
+                <a:solidFill>
+                  <a:srgbClr val="333333"/>
+                </a:solidFill>
+                <a:latin typeface="Calibri"/>
+              </a:rPr>
+              <a:t>Open questions: </a:t>
+            </a:r>
+            <a:r>
+              <a:rPr sz="1150">
+                <a:solidFill>
+                  <a:srgbClr val="333333"/>
+                </a:solidFill>
+                <a:latin typeface="Calibri"/>
+              </a:rPr>
+              <a:t>physical cause of the shift unidentified; y-axis has only 1 trial vs. x's 2. Action unchanged: rerun bode + ring-down on the actual 0.75mm part once installed.</a:t>
             </a:r>
           </a:p>
         </p:txBody>
@@ -6206,7 +6206,7 @@
                 </a:solidFill>
                 <a:latin typeface="Calibri"/>
               </a:rPr>
-              <a:t>First six modes from the SOLUTION 1 real-eigenvalue tables (main_flexure_v3 / PCB_FTA_assembly .f06 results). Bench-measured resonance for the 0.5mm part is 38.5Hz — see previous slide for the FEA-vs-bench correction.</a:t>
+              <a:t>First six modes from the SOLUTION 1 real-eigenvalue tables (main_flexure_v3 / PCB_FTA_assembly .f06 results). Bench-measured resonance for the 0.5mm part: 47.0-47.3Hz (x-axis) / 50.1Hz (y-axis), re-measured after fixing ring-down timing bugs (originally 38.5Hz) — see previous slide.</a:t>
             </a:r>
           </a:p>
         </p:txBody>

--- a/docs/session_results_2026-08-18_pid_tuning.pptx
+++ b/docs/session_results_2026-08-18_pid_tuning.pptx
@@ -25,6 +25,7 @@
     <p:sldId id="277" r:id="rId24"/>
     <p:sldId id="274" r:id="rId21"/>
     <p:sldId id="273" r:id="rId20"/>
+    <p:sldId id="278" r:id="rId25"/>
     <p:sldId id="275" r:id="rId22"/>
     <p:sldId id="276" r:id="rId23"/>
   </p:sldIdLst>
@@ -6219,6 +6220,368 @@
 </p:sld>
 </file>
 
+<file path=ppt/slides/slide24.xml><?xml version="1.0" encoding="utf-8"?>
+<p:sld xmlns:a="http://schemas.openxmlformats.org/drawingml/2006/main" xmlns:p="http://schemas.openxmlformats.org/presentationml/2006/main" xmlns:r="http://schemas.openxmlformats.org/officeDocument/2006/relationships">
+  <p:cSld>
+    <p:spTree>
+      <p:nvGrpSpPr>
+        <p:cNvPr id="1" name=""/>
+        <p:cNvGrpSpPr/>
+        <p:nvPr/>
+      </p:nvGrpSpPr>
+      <p:grpSpPr/>
+      <p:sp>
+        <p:nvSpPr>
+          <p:cNvPr id="2" name="TextBox 1"/>
+          <p:cNvSpPr txBox="1"/>
+          <p:nvPr/>
+        </p:nvSpPr>
+        <p:spPr>
+          <a:xfrm>
+            <a:off x="457200" y="228600"/>
+            <a:ext cx="11246760" cy="486360"/>
+          </a:xfrm>
+          <a:prstGeom prst="rect">
+            <a:avLst/>
+          </a:prstGeom>
+          <a:noFill/>
+        </p:spPr>
+        <p:txBody>
+          <a:bodyPr wrap="square">
+            <a:spAutoFit/>
+          </a:bodyPr>
+          <a:lstStyle/>
+          <a:p>
+            <a:r>
+              <a:rPr sz="2400" b="1">
+                <a:solidFill>
+                  <a:srgbClr val="1A1A2E"/>
+                </a:solidFill>
+                <a:latin typeface="Calibri"/>
+              </a:rPr>
+              <a:t>New ring-down measurements, both axes — the resonance behind the updated FEA comparison</a:t>
+            </a:r>
+          </a:p>
+        </p:txBody>
+      </p:sp>
+      <p:cxnSp>
+        <p:nvCxnSpPr>
+          <p:cNvPr id="3" name="Connector 2"/>
+          <p:cNvCxnSpPr/>
+          <p:nvPr/>
+        </p:nvCxnSpPr>
+        <p:spPr>
+          <a:xfrm>
+            <a:off x="457200" y="960120"/>
+            <a:ext cx="11247120" cy="0"/>
+          </a:xfrm>
+          <a:prstGeom prst="line">
+            <a:avLst/>
+          </a:prstGeom>
+          <a:ln w="19080">
+            <a:solidFill>
+              <a:srgbClr val="2E5C8A"/>
+            </a:solidFill>
+          </a:ln>
+        </p:spPr>
+        <p:style>
+          <a:lnRef idx="2">
+            <a:schemeClr val="accent1"/>
+          </a:lnRef>
+          <a:fillRef idx="0">
+            <a:schemeClr val="accent1"/>
+          </a:fillRef>
+          <a:effectRef idx="1">
+            <a:schemeClr val="accent1"/>
+          </a:effectRef>
+          <a:fontRef idx="minor">
+            <a:schemeClr val="tx1"/>
+          </a:fontRef>
+        </p:style>
+      </p:cxnSp>
+      <p:sp>
+        <p:nvSpPr>
+          <p:cNvPr id="4" name="TextBox 3"/>
+          <p:cNvSpPr txBox="1"/>
+          <p:nvPr/>
+        </p:nvSpPr>
+        <p:spPr>
+          <a:xfrm>
+            <a:off x="457200" y="1080000"/>
+            <a:ext cx="11246760" cy="500000"/>
+          </a:xfrm>
+          <a:prstGeom prst="rect">
+            <a:avLst/>
+          </a:prstGeom>
+          <a:noFill/>
+        </p:spPr>
+        <p:txBody>
+          <a:bodyPr wrap="square">
+            <a:spAutoFit/>
+          </a:bodyPr>
+          <a:lstStyle/>
+          <a:p>
+            <a:r>
+              <a:rPr sz="1250">
+                <a:solidFill>
+                  <a:srgbClr val="333333"/>
+                </a:solidFill>
+                <a:latin typeface="Calibri"/>
+              </a:rPr>
+              <a:t>Model-free peak-spacing estimate (dashed curve_fit overlay is unreliable — see annotation on each plot); tick-timestamped, same method as the original 38.5Hz measurement.</a:t>
+            </a:r>
+          </a:p>
+        </p:txBody>
+      </p:sp>
+      <p:pic>
+        <p:nvPicPr>
+          <p:cNvPr id="5" name="Picture 4" descr="fta_ringdown_xaxis_20260828T003210Z.png"/>
+          <p:cNvPicPr>
+            <a:picLocks noChangeAspect="1"/>
+          </p:cNvPicPr>
+          <p:nvPr/>
+        </p:nvPicPr>
+        <p:blipFill>
+          <a:blip r:embed="rId2"/>
+          <a:stretch>
+            <a:fillRect/>
+          </a:stretch>
+        </p:blipFill>
+        <p:spPr>
+          <a:xfrm>
+            <a:off x="457200" y="1650000"/>
+            <a:ext cx="3595587" cy="1618000"/>
+          </a:xfrm>
+          <a:prstGeom prst="rect">
+            <a:avLst/>
+          </a:prstGeom>
+        </p:spPr>
+      </p:pic>
+      <p:pic>
+        <p:nvPicPr>
+          <p:cNvPr id="6" name="Picture 5" descr="fta_ringdown_xaxis_20260828T003754Z.png"/>
+          <p:cNvPicPr>
+            <a:picLocks noChangeAspect="1"/>
+          </p:cNvPicPr>
+          <p:nvPr/>
+        </p:nvPicPr>
+        <p:blipFill>
+          <a:blip r:embed="rId3"/>
+          <a:stretch>
+            <a:fillRect/>
+          </a:stretch>
+        </p:blipFill>
+        <p:spPr>
+          <a:xfrm>
+            <a:off x="4282787" y="1650000"/>
+            <a:ext cx="3595587" cy="1618000"/>
+          </a:xfrm>
+          <a:prstGeom prst="rect">
+            <a:avLst/>
+          </a:prstGeom>
+        </p:spPr>
+      </p:pic>
+      <p:pic>
+        <p:nvPicPr>
+          <p:cNvPr id="7" name="Picture 6" descr="fta_ringdown_yaxis_20260828T003403Z_fixed.png"/>
+          <p:cNvPicPr>
+            <a:picLocks noChangeAspect="1"/>
+          </p:cNvPicPr>
+          <p:nvPr/>
+        </p:nvPicPr>
+        <p:blipFill>
+          <a:blip r:embed="rId4"/>
+          <a:stretch>
+            <a:fillRect/>
+          </a:stretch>
+        </p:blipFill>
+        <p:spPr>
+          <a:xfrm>
+            <a:off x="8108374" y="1650000"/>
+            <a:ext cx="3595587" cy="1618000"/>
+          </a:xfrm>
+          <a:prstGeom prst="rect">
+            <a:avLst/>
+          </a:prstGeom>
+        </p:spPr>
+      </p:pic>
+      <p:sp>
+        <p:nvSpPr>
+          <p:cNvPr id="8" name="Caption 1"/>
+          <p:cNvSpPr txBox="1"/>
+          <p:nvPr/>
+        </p:nvSpPr>
+        <p:spPr>
+          <a:xfrm>
+            <a:off x="457200" y="3330000"/>
+            <a:ext cx="3595587" cy="700000"/>
+          </a:xfrm>
+          <a:prstGeom prst="rect">
+            <a:avLst/>
+          </a:prstGeom>
+          <a:noFill/>
+        </p:spPr>
+        <p:txBody>
+          <a:bodyPr wrap="square">
+            <a:spAutoFit/>
+          </a:bodyPr>
+          <a:lstStyle/>
+          <a:p>
+            <a:r>
+              <a:rPr sz="1150" b="1">
+                <a:solidFill>
+                  <a:srgbClr val="333333"/>
+                </a:solidFill>
+                <a:latin typeface="Calibri"/>
+              </a:rPr>
+              <a:t>X-axis, trial 1: 47.3Hz</a:t>
+            </a:r>
+          </a:p>
+          <a:p>
+            <a:r>
+              <a:rPr sz="1050">
+                <a:solidFill>
+                  <a:srgbClr val="666666"/>
+                </a:solidFill>
+                <a:latin typeface="Calibri"/>
+              </a:rPr>
+              <a:t>dac_y→cx, primary axis</a:t>
+            </a:r>
+          </a:p>
+        </p:txBody>
+      </p:sp>
+      <p:sp>
+        <p:nvSpPr>
+          <p:cNvPr id="9" name="Caption 2"/>
+          <p:cNvSpPr txBox="1"/>
+          <p:nvPr/>
+        </p:nvSpPr>
+        <p:spPr>
+          <a:xfrm>
+            <a:off x="4282787" y="3330000"/>
+            <a:ext cx="3595587" cy="700000"/>
+          </a:xfrm>
+          <a:prstGeom prst="rect">
+            <a:avLst/>
+          </a:prstGeom>
+          <a:noFill/>
+        </p:spPr>
+        <p:txBody>
+          <a:bodyPr wrap="square">
+            <a:spAutoFit/>
+          </a:bodyPr>
+          <a:lstStyle/>
+          <a:p>
+            <a:r>
+              <a:rPr sz="1150" b="1">
+                <a:solidFill>
+                  <a:srgbClr val="333333"/>
+                </a:solidFill>
+                <a:latin typeface="Calibri"/>
+              </a:rPr>
+              <a:t>X-axis, trial 2 (immediate repeat): 47.0Hz</a:t>
+            </a:r>
+          </a:p>
+          <a:p>
+            <a:r>
+              <a:rPr sz="1050">
+                <a:solidFill>
+                  <a:srgbClr val="666666"/>
+                </a:solidFill>
+                <a:latin typeface="Calibri"/>
+              </a:rPr>
+              <a:t>dac_y→cx — tight agreement with trial 1</a:t>
+            </a:r>
+          </a:p>
+        </p:txBody>
+      </p:sp>
+      <p:sp>
+        <p:nvSpPr>
+          <p:cNvPr id="10" name="Caption 3"/>
+          <p:cNvSpPr txBox="1"/>
+          <p:nvPr/>
+        </p:nvSpPr>
+        <p:spPr>
+          <a:xfrm>
+            <a:off x="8108374" y="3330000"/>
+            <a:ext cx="3595587" cy="700000"/>
+          </a:xfrm>
+          <a:prstGeom prst="rect">
+            <a:avLst/>
+          </a:prstGeom>
+          <a:noFill/>
+        </p:spPr>
+        <p:txBody>
+          <a:bodyPr wrap="square">
+            <a:spAutoFit/>
+          </a:bodyPr>
+          <a:lstStyle/>
+          <a:p>
+            <a:r>
+              <a:rPr sz="1150" b="1">
+                <a:solidFill>
+                  <a:srgbClr val="333333"/>
+                </a:solidFill>
+                <a:latin typeface="Calibri"/>
+              </a:rPr>
+              <a:t>Y-axis, first-ever trial: 50.1Hz</a:t>
+            </a:r>
+          </a:p>
+          <a:p>
+            <a:r>
+              <a:rPr sz="1050">
+                <a:solidFill>
+                  <a:srgbClr val="666666"/>
+                </a:solidFill>
+                <a:latin typeface="Calibri"/>
+              </a:rPr>
+              <a:t>dac_x→cy — only one trial so far</a:t>
+            </a:r>
+          </a:p>
+        </p:txBody>
+      </p:sp>
+      <p:sp>
+        <p:nvSpPr>
+          <p:cNvPr id="11" name="Note"/>
+          <p:cNvSpPr txBox="1"/>
+          <p:nvPr/>
+        </p:nvSpPr>
+        <p:spPr>
+          <a:xfrm>
+            <a:off x="457200" y="4200000"/>
+            <a:ext cx="11246760" cy="700000"/>
+          </a:xfrm>
+          <a:prstGeom prst="rect">
+            <a:avLst/>
+          </a:prstGeom>
+          <a:noFill/>
+        </p:spPr>
+        <p:txBody>
+          <a:bodyPr wrap="square">
+            <a:spAutoFit/>
+          </a:bodyPr>
+          <a:lstStyle/>
+          <a:p>
+            <a:r>
+              <a:rPr sz="1150" i="1">
+                <a:solidFill>
+                  <a:srgbClr val="555555"/>
+                </a:solidFill>
+                <a:latin typeface="Calibri"/>
+              </a:rPr>
+              <a:t>Both axes land close to each other and notably not close to the previously-documented 38.5Hz. Same trustworthy tick-timestamped peak-spacing method as the original measurement, so this reads as a real, reproducible shift in the physical resonance since then — see next slide for the updated FEA comparison.</a:t>
+            </a:r>
+          </a:p>
+        </p:txBody>
+      </p:sp>
+    </p:spTree>
+  </p:cSld>
+  <p:clrMapOvr>
+    <a:masterClrMapping/>
+  </p:clrMapOvr>
+</p:sld>
+</file>
+
 <file path=ppt/slides/slide3.xml><?xml version="1.0" encoding="utf-8"?>
 <p:sld xmlns:a="http://schemas.openxmlformats.org/drawingml/2006/main" xmlns:p="http://schemas.openxmlformats.org/presentationml/2006/main" xmlns:r="http://schemas.openxmlformats.org/officeDocument/2006/relationships" xmlns:p14="http://schemas.microsoft.com/office/powerpoint/2010/main" xmlns:p15="http://schemas.microsoft.com/office/powerpoint/2012/main" xmlns:mc="http://schemas.openxmlformats.org/markup-compatibility/2006">
   <p:cSld>

--- a/docs/session_results_2026-08-18_pid_tuning.pptx
+++ b/docs/session_results_2026-08-18_pid_tuning.pptx
@@ -27,6 +27,8 @@
     <p:sldId id="273" r:id="rId20"/>
     <p:sldId id="275" r:id="rId22"/>
     <p:sldId id="276" r:id="rId23"/>
+    <p:sldId id="278" r:id="rId25"/>
+    <p:sldId id="279" r:id="rId26"/>
   </p:sldIdLst>
   <p:sldSz cx="12192000" cy="6858000"/>
   <p:notesSz cx="7772400" cy="10058400"/>
@@ -4320,6 +4322,290 @@
 </p:sld>
 </file>
 
+<file path=ppt/slides/slide19.xml><?xml version="1.0" encoding="utf-8"?>
+<p:sld xmlns:a="http://schemas.openxmlformats.org/drawingml/2006/main" xmlns:p="http://schemas.openxmlformats.org/presentationml/2006/main" xmlns:r="http://schemas.openxmlformats.org/officeDocument/2006/relationships">
+  <p:cSld>
+    <p:spTree>
+      <p:nvGrpSpPr>
+        <p:cNvPr id="1" name=""/>
+        <p:cNvGrpSpPr/>
+        <p:nvPr/>
+      </p:nvGrpSpPr>
+      <p:grpSpPr/>
+      <p:sp>
+        <p:nvSpPr>
+          <p:cNvPr id="2" name="TextBox 1"/>
+          <p:cNvSpPr txBox="1"/>
+          <p:nvPr/>
+        </p:nvSpPr>
+        <p:spPr>
+          <a:xfrm>
+            <a:off x="457200" y="228600"/>
+            <a:ext cx="11246760" cy="486360"/>
+          </a:xfrm>
+          <a:prstGeom prst="rect">
+            <a:avLst/>
+          </a:prstGeom>
+          <a:noFill/>
+        </p:spPr>
+        <p:txBody>
+          <a:bodyPr wrap="square">
+            <a:spAutoFit/>
+          </a:bodyPr>
+          <a:lstStyle/>
+          <a:p>
+            <a:r>
+              <a:rPr sz="2400" b="1">
+                <a:solidFill>
+                  <a:srgbClr val="1A1A2E"/>
+                </a:solidFill>
+                <a:latin typeface="Calibri"/>
+              </a:rPr>
+              <a:t>Open-loop plant Bode plot — the resonance, not delay or tuning, is the ceiling</a:t>
+            </a:r>
+          </a:p>
+        </p:txBody>
+      </p:sp>
+      <p:cxnSp>
+        <p:nvCxnSpPr>
+          <p:cNvPr id="3" name="Connector 2"/>
+          <p:cNvCxnSpPr/>
+          <p:nvPr/>
+        </p:nvCxnSpPr>
+        <p:spPr>
+          <a:xfrm>
+            <a:off x="457200" y="960120"/>
+            <a:ext cx="11247120" cy="0"/>
+          </a:xfrm>
+          <a:prstGeom prst="line">
+            <a:avLst/>
+          </a:prstGeom>
+          <a:ln w="19080">
+            <a:solidFill>
+              <a:srgbClr val="2E5C8A"/>
+            </a:solidFill>
+          </a:ln>
+        </p:spPr>
+        <p:style>
+          <a:lnRef idx="2">
+            <a:schemeClr val="accent1"/>
+          </a:lnRef>
+          <a:fillRef idx="0">
+            <a:schemeClr val="accent1"/>
+          </a:fillRef>
+          <a:effectRef idx="1">
+            <a:schemeClr val="accent1"/>
+          </a:effectRef>
+          <a:fontRef idx="minor">
+            <a:schemeClr val="tx1"/>
+          </a:fontRef>
+        </p:style>
+      </p:cxnSp>
+      <p:sp>
+        <p:nvSpPr>
+          <p:cNvPr id="4" name="TextBox 3"/>
+          <p:cNvSpPr txBox="1"/>
+          <p:nvPr/>
+        </p:nvSpPr>
+        <p:spPr>
+          <a:xfrm>
+            <a:off x="457200" y="1143000"/>
+            <a:ext cx="5577480" cy="3565800"/>
+          </a:xfrm>
+          <a:prstGeom prst="rect">
+            <a:avLst/>
+          </a:prstGeom>
+          <a:noFill/>
+        </p:spPr>
+        <p:txBody>
+          <a:bodyPr wrap="square">
+            <a:spAutoFit/>
+          </a:bodyPr>
+          <a:lstStyle/>
+          <a:p>
+            <a:pPr>
+              <a:spcAft>
+                <a:spcPts val="900"/>
+              </a:spcAft>
+            </a:pPr>
+            <a:r>
+              <a:rPr sz="1250">
+                <a:solidFill>
+                  <a:srgbClr val="333333"/>
+                </a:solidFill>
+                <a:latin typeface="Calibri"/>
+              </a:rPr>
+              <a:t>• </a:t>
+            </a:r>
+            <a:r>
+              <a:rPr sz="1250">
+                <a:solidFill>
+                  <a:srgbClr val="333333"/>
+                </a:solidFill>
+                <a:latin typeface="Calibri"/>
+              </a:rPr>
+              <a:t>Built a firmware open-loop sine generator (bypasses the PID entirely, drives dac_y directly) and swept dac_y→cx across 1-50Hz — the first real open-loop frequency response measured this project.</a:t>
+            </a:r>
+          </a:p>
+          <a:p>
+            <a:pPr>
+              <a:spcAft>
+                <a:spcPts val="900"/>
+              </a:spcAft>
+            </a:pPr>
+            <a:r>
+              <a:rPr sz="1250">
+                <a:solidFill>
+                  <a:srgbClr val="333333"/>
+                </a:solidFill>
+                <a:latin typeface="Calibri"/>
+              </a:rPr>
+              <a:t>• </a:t>
+            </a:r>
+            <a:r>
+              <a:rPr sz="1250">
+                <a:solidFill>
+                  <a:srgbClr val="333333"/>
+                </a:solidFill>
+                <a:latin typeface="Calibri"/>
+              </a:rPr>
+              <a:t>Phase has real margin through 10-20Hz (40° at 10Hz, 79° at 20Hz) — the plant itself isn't the problem IN that band.</a:t>
+            </a:r>
+          </a:p>
+          <a:p>
+            <a:pPr>
+              <a:spcAft>
+                <a:spcPts val="900"/>
+              </a:spcAft>
+            </a:pPr>
+            <a:r>
+              <a:rPr sz="1250">
+                <a:solidFill>
+                  <a:srgbClr val="333333"/>
+                </a:solidFill>
+                <a:latin typeface="Calibri"/>
+              </a:rPr>
+              <a:t>• </a:t>
+            </a:r>
+            <a:r>
+              <a:rPr sz="1250">
+                <a:solidFill>
+                  <a:srgbClr val="333333"/>
+                </a:solidFill>
+                <a:latin typeface="Calibri"/>
+              </a:rPr>
+              <a:t>Sharp resonance at 38.5Hz (gain ~7.6x DC) — matches the ring-down test exactly, from a completely independent method (forced sine vs. free decay). Strong cross-validation, not a fluke.</a:t>
+            </a:r>
+          </a:p>
+          <a:p>
+            <a:pPr>
+              <a:spcAft>
+                <a:spcPts val="900"/>
+              </a:spcAft>
+            </a:pPr>
+            <a:r>
+              <a:rPr sz="1250">
+                <a:solidFill>
+                  <a:srgbClr val="333333"/>
+                </a:solidFill>
+                <a:latin typeface="Calibri"/>
+              </a:rPr>
+              <a:t>• </a:t>
+            </a:r>
+            <a:r>
+              <a:rPr sz="1250">
+                <a:solidFill>
+                  <a:srgbClr val="333333"/>
+                </a:solidFill>
+                <a:latin typeface="Calibri"/>
+              </a:rPr>
+              <a:t>5Hz lag (12.0ms) matches the directly-measured pure loop delay (~11.5ms) — a third independent cross-check.</a:t>
+            </a:r>
+          </a:p>
+          <a:p>
+            <a:pPr>
+              <a:spcAft>
+                <a:spcPts val="900"/>
+              </a:spcAft>
+            </a:pPr>
+            <a:r>
+              <a:rPr sz="1250">
+                <a:solidFill>
+                  <a:srgbClr val="333333"/>
+                </a:solidFill>
+                <a:latin typeface="Calibri"/>
+              </a:rPr>
+              <a:t>• </a:t>
+            </a:r>
+            <a:r>
+              <a:rPr sz="1250">
+                <a:solidFill>
+                  <a:srgbClr val="333333"/>
+                </a:solidFill>
+                <a:latin typeface="Calibri"/>
+              </a:rPr>
+              <a:t>Any Ki high enough to push gain-crossover toward ~20-25Hz+ runs into the resonance's fast phase rotation (~140° in under two octaves) — explains the hard Ki ceiling all session, and why the notch's narrow fix gave a mixed result (previous slide).</a:t>
+            </a:r>
+          </a:p>
+          <a:p>
+            <a:pPr>
+              <a:spcAft>
+                <a:spcPts val="900"/>
+              </a:spcAft>
+            </a:pPr>
+            <a:r>
+              <a:rPr sz="1250">
+                <a:solidFill>
+                  <a:srgbClr val="333333"/>
+                </a:solidFill>
+                <a:latin typeface="Calibri"/>
+              </a:rPr>
+              <a:t>• </a:t>
+            </a:r>
+            <a:r>
+              <a:rPr sz="1250">
+                <a:solidFill>
+                  <a:srgbClr val="333333"/>
+                </a:solidFill>
+                <a:latin typeface="Calibri"/>
+              </a:rPr>
+              <a:t>Strongest evidence yet for a hardware fix (stiffen/damp the flexure) over continued controller tuning.</a:t>
+            </a:r>
+          </a:p>
+        </p:txBody>
+      </p:sp>
+      <p:pic>
+        <p:nvPicPr>
+          <p:cNvPr id="5" name="Picture 4" descr="fta_open_loop_bode_summary.png"/>
+          <p:cNvPicPr>
+            <a:picLocks noChangeAspect="1"/>
+          </p:cNvPicPr>
+          <p:nvPr/>
+        </p:nvPicPr>
+        <p:blipFill>
+          <a:blip r:embed="rId3"/>
+          <a:stretch>
+            <a:fillRect/>
+          </a:stretch>
+        </p:blipFill>
+        <p:spPr>
+          <a:xfrm>
+            <a:off x="7031760" y="1143000"/>
+            <a:ext cx="4041240" cy="3565800"/>
+          </a:xfrm>
+          <a:prstGeom prst="rect">
+            <a:avLst/>
+          </a:prstGeom>
+        </p:spPr>
+      </p:pic>
+    </p:spTree>
+  </p:cSld>
+  <p:clrMapOvr>
+    <a:masterClrMapping/>
+  </p:clrMapOvr>
+</p:sld>
+</file>
+
 <file path=ppt/slides/slide2.xml><?xml version="1.0" encoding="utf-8"?>
 <p:sld xmlns:a="http://schemas.openxmlformats.org/drawingml/2006/main" xmlns:p="http://schemas.openxmlformats.org/presentationml/2006/main" xmlns:r="http://schemas.openxmlformats.org/officeDocument/2006/relationships" xmlns:p14="http://schemas.microsoft.com/office/powerpoint/2010/main" xmlns:p15="http://schemas.microsoft.com/office/powerpoint/2012/main" xmlns:mc="http://schemas.openxmlformats.org/markup-compatibility/2006">
   <p:cSld>
@@ -4626,290 +4912,6 @@
 </file>
 
 <file path=ppt/slides/slide20.xml><?xml version="1.0" encoding="utf-8"?>
-<p:sld xmlns:a="http://schemas.openxmlformats.org/drawingml/2006/main" xmlns:p="http://schemas.openxmlformats.org/presentationml/2006/main" xmlns:r="http://schemas.openxmlformats.org/officeDocument/2006/relationships">
-  <p:cSld>
-    <p:spTree>
-      <p:nvGrpSpPr>
-        <p:cNvPr id="1" name=""/>
-        <p:cNvGrpSpPr/>
-        <p:nvPr/>
-      </p:nvGrpSpPr>
-      <p:grpSpPr/>
-      <p:sp>
-        <p:nvSpPr>
-          <p:cNvPr id="2" name="TextBox 1"/>
-          <p:cNvSpPr txBox="1"/>
-          <p:nvPr/>
-        </p:nvSpPr>
-        <p:spPr>
-          <a:xfrm>
-            <a:off x="457200" y="228600"/>
-            <a:ext cx="11246760" cy="486360"/>
-          </a:xfrm>
-          <a:prstGeom prst="rect">
-            <a:avLst/>
-          </a:prstGeom>
-          <a:noFill/>
-        </p:spPr>
-        <p:txBody>
-          <a:bodyPr wrap="square">
-            <a:spAutoFit/>
-          </a:bodyPr>
-          <a:lstStyle/>
-          <a:p>
-            <a:r>
-              <a:rPr sz="2400" b="1">
-                <a:solidFill>
-                  <a:srgbClr val="1A1A2E"/>
-                </a:solidFill>
-                <a:latin typeface="Calibri"/>
-              </a:rPr>
-              <a:t>Open-loop plant Bode plot — the resonance, not delay or tuning, is the ceiling</a:t>
-            </a:r>
-          </a:p>
-        </p:txBody>
-      </p:sp>
-      <p:cxnSp>
-        <p:nvCxnSpPr>
-          <p:cNvPr id="3" name="Connector 2"/>
-          <p:cNvCxnSpPr/>
-          <p:nvPr/>
-        </p:nvCxnSpPr>
-        <p:spPr>
-          <a:xfrm>
-            <a:off x="457200" y="960120"/>
-            <a:ext cx="11247120" cy="0"/>
-          </a:xfrm>
-          <a:prstGeom prst="line">
-            <a:avLst/>
-          </a:prstGeom>
-          <a:ln w="19080">
-            <a:solidFill>
-              <a:srgbClr val="2E5C8A"/>
-            </a:solidFill>
-          </a:ln>
-        </p:spPr>
-        <p:style>
-          <a:lnRef idx="2">
-            <a:schemeClr val="accent1"/>
-          </a:lnRef>
-          <a:fillRef idx="0">
-            <a:schemeClr val="accent1"/>
-          </a:fillRef>
-          <a:effectRef idx="1">
-            <a:schemeClr val="accent1"/>
-          </a:effectRef>
-          <a:fontRef idx="minor">
-            <a:schemeClr val="tx1"/>
-          </a:fontRef>
-        </p:style>
-      </p:cxnSp>
-      <p:sp>
-        <p:nvSpPr>
-          <p:cNvPr id="4" name="TextBox 3"/>
-          <p:cNvSpPr txBox="1"/>
-          <p:nvPr/>
-        </p:nvSpPr>
-        <p:spPr>
-          <a:xfrm>
-            <a:off x="457200" y="1143000"/>
-            <a:ext cx="5577480" cy="3565800"/>
-          </a:xfrm>
-          <a:prstGeom prst="rect">
-            <a:avLst/>
-          </a:prstGeom>
-          <a:noFill/>
-        </p:spPr>
-        <p:txBody>
-          <a:bodyPr wrap="square">
-            <a:spAutoFit/>
-          </a:bodyPr>
-          <a:lstStyle/>
-          <a:p>
-            <a:pPr>
-              <a:spcAft>
-                <a:spcPts val="900"/>
-              </a:spcAft>
-            </a:pPr>
-            <a:r>
-              <a:rPr sz="1250">
-                <a:solidFill>
-                  <a:srgbClr val="333333"/>
-                </a:solidFill>
-                <a:latin typeface="Calibri"/>
-              </a:rPr>
-              <a:t>• </a:t>
-            </a:r>
-            <a:r>
-              <a:rPr sz="1250">
-                <a:solidFill>
-                  <a:srgbClr val="333333"/>
-                </a:solidFill>
-                <a:latin typeface="Calibri"/>
-              </a:rPr>
-              <a:t>Built a firmware open-loop sine generator (bypasses the PID entirely, drives dac_y directly) and swept dac_y→cx across 1-50Hz — the first real open-loop frequency response measured this project.</a:t>
-            </a:r>
-          </a:p>
-          <a:p>
-            <a:pPr>
-              <a:spcAft>
-                <a:spcPts val="900"/>
-              </a:spcAft>
-            </a:pPr>
-            <a:r>
-              <a:rPr sz="1250">
-                <a:solidFill>
-                  <a:srgbClr val="333333"/>
-                </a:solidFill>
-                <a:latin typeface="Calibri"/>
-              </a:rPr>
-              <a:t>• </a:t>
-            </a:r>
-            <a:r>
-              <a:rPr sz="1250">
-                <a:solidFill>
-                  <a:srgbClr val="333333"/>
-                </a:solidFill>
-                <a:latin typeface="Calibri"/>
-              </a:rPr>
-              <a:t>Phase has real margin through 10-20Hz (40° at 10Hz, 79° at 20Hz) — the plant itself isn't the problem IN that band.</a:t>
-            </a:r>
-          </a:p>
-          <a:p>
-            <a:pPr>
-              <a:spcAft>
-                <a:spcPts val="900"/>
-              </a:spcAft>
-            </a:pPr>
-            <a:r>
-              <a:rPr sz="1250">
-                <a:solidFill>
-                  <a:srgbClr val="333333"/>
-                </a:solidFill>
-                <a:latin typeface="Calibri"/>
-              </a:rPr>
-              <a:t>• </a:t>
-            </a:r>
-            <a:r>
-              <a:rPr sz="1250">
-                <a:solidFill>
-                  <a:srgbClr val="333333"/>
-                </a:solidFill>
-                <a:latin typeface="Calibri"/>
-              </a:rPr>
-              <a:t>Sharp resonance at 38.5Hz (gain ~7.6x DC) — matches the ring-down test exactly, from a completely independent method (forced sine vs. free decay). Strong cross-validation, not a fluke.</a:t>
-            </a:r>
-          </a:p>
-          <a:p>
-            <a:pPr>
-              <a:spcAft>
-                <a:spcPts val="900"/>
-              </a:spcAft>
-            </a:pPr>
-            <a:r>
-              <a:rPr sz="1250">
-                <a:solidFill>
-                  <a:srgbClr val="333333"/>
-                </a:solidFill>
-                <a:latin typeface="Calibri"/>
-              </a:rPr>
-              <a:t>• </a:t>
-            </a:r>
-            <a:r>
-              <a:rPr sz="1250">
-                <a:solidFill>
-                  <a:srgbClr val="333333"/>
-                </a:solidFill>
-                <a:latin typeface="Calibri"/>
-              </a:rPr>
-              <a:t>5Hz lag (12.0ms) matches the directly-measured pure loop delay (~11.5ms) — a third independent cross-check.</a:t>
-            </a:r>
-          </a:p>
-          <a:p>
-            <a:pPr>
-              <a:spcAft>
-                <a:spcPts val="900"/>
-              </a:spcAft>
-            </a:pPr>
-            <a:r>
-              <a:rPr sz="1250">
-                <a:solidFill>
-                  <a:srgbClr val="333333"/>
-                </a:solidFill>
-                <a:latin typeface="Calibri"/>
-              </a:rPr>
-              <a:t>• </a:t>
-            </a:r>
-            <a:r>
-              <a:rPr sz="1250">
-                <a:solidFill>
-                  <a:srgbClr val="333333"/>
-                </a:solidFill>
-                <a:latin typeface="Calibri"/>
-              </a:rPr>
-              <a:t>Any Ki high enough to push gain-crossover toward ~20-25Hz+ runs into the resonance's fast phase rotation (~140° in under two octaves) — explains the hard Ki ceiling all session, and why the notch's narrow fix gave a mixed result (previous slide).</a:t>
-            </a:r>
-          </a:p>
-          <a:p>
-            <a:pPr>
-              <a:spcAft>
-                <a:spcPts val="900"/>
-              </a:spcAft>
-            </a:pPr>
-            <a:r>
-              <a:rPr sz="1250">
-                <a:solidFill>
-                  <a:srgbClr val="333333"/>
-                </a:solidFill>
-                <a:latin typeface="Calibri"/>
-              </a:rPr>
-              <a:t>• </a:t>
-            </a:r>
-            <a:r>
-              <a:rPr sz="1250">
-                <a:solidFill>
-                  <a:srgbClr val="333333"/>
-                </a:solidFill>
-                <a:latin typeface="Calibri"/>
-              </a:rPr>
-              <a:t>Strongest evidence yet for a hardware fix (stiffen/damp the flexure) over continued controller tuning.</a:t>
-            </a:r>
-          </a:p>
-        </p:txBody>
-      </p:sp>
-      <p:pic>
-        <p:nvPicPr>
-          <p:cNvPr id="5" name="Picture 4" descr="fta_open_loop_bode_summary.png"/>
-          <p:cNvPicPr>
-            <a:picLocks noChangeAspect="1"/>
-          </p:cNvPicPr>
-          <p:nvPr/>
-        </p:nvPicPr>
-        <p:blipFill>
-          <a:blip r:embed="rId3"/>
-          <a:stretch>
-            <a:fillRect/>
-          </a:stretch>
-        </p:blipFill>
-        <p:spPr>
-          <a:xfrm>
-            <a:off x="7031760" y="1143000"/>
-            <a:ext cx="4041240" cy="3565800"/>
-          </a:xfrm>
-          <a:prstGeom prst="rect">
-            <a:avLst/>
-          </a:prstGeom>
-        </p:spPr>
-      </p:pic>
-    </p:spTree>
-  </p:cSld>
-  <p:clrMapOvr>
-    <a:masterClrMapping/>
-  </p:clrMapOvr>
-</p:sld>
-</file>
-
-<file path=ppt/slides/slide21.xml><?xml version="1.0" encoding="utf-8"?>
 <p:sld xmlns:a="http://schemas.openxmlformats.org/drawingml/2006/main" xmlns:p="http://schemas.openxmlformats.org/presentationml/2006/main" xmlns:r="http://schemas.openxmlformats.org/officeDocument/2006/relationships" xmlns:p14="http://schemas.microsoft.com/office/powerpoint/2010/main" xmlns:p15="http://schemas.microsoft.com/office/powerpoint/2012/main" xmlns:mc="http://schemas.openxmlformats.org/markup-compatibility/2006">
   <p:cSld>
     <p:spTree>
@@ -5282,7 +5284,7 @@
 </p:sld>
 </file>
 
-<file path=ppt/slides/slide22.xml><?xml version="1.0" encoding="utf-8"?>
+<file path=ppt/slides/slide21.xml><?xml version="1.0" encoding="utf-8"?>
 <p:sld xmlns:a="http://schemas.openxmlformats.org/drawingml/2006/main" xmlns:p="http://schemas.openxmlformats.org/presentationml/2006/main" xmlns:r="http://schemas.openxmlformats.org/officeDocument/2006/relationships">
   <p:cSld>
     <p:spTree>
@@ -5574,7 +5576,7 @@
 </p:sld>
 </file>
 
-<file path=ppt/slides/slide23.xml><?xml version="1.0" encoding="utf-8"?>
+<file path=ppt/slides/slide22.xml><?xml version="1.0" encoding="utf-8"?>
 <p:sld xmlns:a="http://schemas.openxmlformats.org/drawingml/2006/main" xmlns:p="http://schemas.openxmlformats.org/presentationml/2006/main" xmlns:r="http://schemas.openxmlformats.org/officeDocument/2006/relationships">
   <p:cSld>
     <p:spTree>
@@ -6219,6 +6221,932 @@
 </p:sld>
 </file>
 
+<file path=ppt/slides/slide23.xml><?xml version="1.0" encoding="utf-8"?>
+<p:sld xmlns:a="http://schemas.openxmlformats.org/drawingml/2006/main" xmlns:p="http://schemas.openxmlformats.org/presentationml/2006/main" xmlns:r="http://schemas.openxmlformats.org/officeDocument/2006/relationships">
+  <p:cSld>
+    <p:spTree>
+      <p:nvGrpSpPr>
+        <p:cNvPr id="1" name=""/>
+        <p:cNvGrpSpPr/>
+        <p:nvPr/>
+      </p:nvGrpSpPr>
+      <p:grpSpPr/>
+      <p:sp>
+        <p:nvSpPr>
+          <p:cNvPr id="2" name="TextBox 1"/>
+          <p:cNvSpPr txBox="1"/>
+          <p:nvPr/>
+        </p:nvSpPr>
+        <p:spPr>
+          <a:xfrm>
+            <a:off x="457200" y="228600"/>
+            <a:ext cx="11246760" cy="640000"/>
+          </a:xfrm>
+          <a:prstGeom prst="rect">
+            <a:avLst/>
+          </a:prstGeom>
+          <a:noFill/>
+        </p:spPr>
+        <p:txBody>
+          <a:bodyPr wrap="square">
+            <a:spAutoFit/>
+          </a:bodyPr>
+          <a:lstStyle/>
+          <a:p>
+            <a:r>
+              <a:rPr sz="2400" b="1">
+                <a:solidFill>
+                  <a:srgbClr val="1A1A2E"/>
+                </a:solidFill>
+                <a:latin typeface="Calibri"/>
+              </a:rPr>
+              <a:t>I2C link + PID completion: essentially lossless end to end</a:t>
+            </a:r>
+          </a:p>
+        </p:txBody>
+      </p:sp>
+      <p:cxnSp>
+        <p:nvCxnSpPr>
+          <p:cNvPr id="3" name="Connector 2"/>
+          <p:cNvCxnSpPr/>
+          <p:nvPr/>
+        </p:nvCxnSpPr>
+        <p:spPr>
+          <a:xfrm>
+            <a:off x="457200" y="960120"/>
+            <a:ext cx="11247120" cy="0"/>
+          </a:xfrm>
+          <a:prstGeom prst="line">
+            <a:avLst/>
+          </a:prstGeom>
+          <a:ln w="19080">
+            <a:solidFill>
+              <a:srgbClr val="2E5C8A"/>
+            </a:solidFill>
+          </a:ln>
+        </p:spPr>
+        <p:style>
+          <a:lnRef idx="2">
+            <a:schemeClr val="accent1"/>
+          </a:lnRef>
+          <a:fillRef idx="0">
+            <a:schemeClr val="accent1"/>
+          </a:fillRef>
+          <a:effectRef idx="1">
+            <a:schemeClr val="accent1"/>
+          </a:effectRef>
+          <a:fontRef idx="minor">
+            <a:schemeClr val="tx1"/>
+          </a:fontRef>
+        </p:style>
+      </p:cxnSp>
+      <p:sp>
+        <p:nvSpPr>
+          <p:cNvPr id="4" name="TextBox 3"/>
+          <p:cNvSpPr txBox="1"/>
+          <p:nvPr/>
+        </p:nvSpPr>
+        <p:spPr>
+          <a:xfrm>
+            <a:off x="457200" y="1180000"/>
+            <a:ext cx="5450000" cy="4400000"/>
+          </a:xfrm>
+          <a:prstGeom prst="rect">
+            <a:avLst/>
+          </a:prstGeom>
+          <a:noFill/>
+        </p:spPr>
+        <p:txBody>
+          <a:bodyPr wrap="square">
+            <a:spAutoFit/>
+          </a:bodyPr>
+          <a:lstStyle/>
+          <a:p>
+            <a:pPr>
+              <a:spcAft>
+                <a:spcPts val="900"/>
+              </a:spcAft>
+            </a:pPr>
+            <a:r>
+              <a:rPr sz="1250">
+                <a:solidFill>
+                  <a:srgbClr val="333333"/>
+                </a:solidFill>
+                <a:latin typeface="Calibri"/>
+              </a:rPr>
+              <a:t>• </a:t>
+            </a:r>
+            <a:r>
+              <a:rPr sz="1250">
+                <a:solidFill>
+                  <a:srgbClr val="333333"/>
+                </a:solidFill>
+                <a:latin typeface="Calibri"/>
+              </a:rPr>
+              <a:t>Link completeness (Pi send → Nucleo I2C reception): the Pi's own capture-enumerated seq counter (increments once per camera frame, before detection/send outcome is known) unwrapped and compared against the Nucleo's ISR-level pkts+errs counters — real ground truth on both ends, immune to the separately-known ~4-8% VCP relay line loss (that only affects host-side observability, not the real link).</a:t>
+            </a:r>
+          </a:p>
+          <a:p>
+            <a:pPr>
+              <a:spcAft>
+                <a:spcPts val="900"/>
+              </a:spcAft>
+            </a:pPr>
+            <a:r>
+              <a:rPr sz="1250">
+                <a:solidFill>
+                  <a:srgbClr val="333333"/>
+                </a:solidFill>
+                <a:latin typeface="Calibri"/>
+              </a:rPr>
+              <a:t>• </a:t>
+            </a:r>
+            <a:r>
+              <a:rPr sz="1250">
+                <a:solidFill>
+                  <a:srgbClr val="333333"/>
+                </a:solidFill>
+                <a:latin typeface="Calibri"/>
+              </a:rPr>
+              <a:t>Confident packet → completed PID loop: measured via two new firmware counters (confident_pkts=, cseq=). 99.97% (6423/6425) across 3 trials — the single-slot g_latest_beam "mailbox" can in principle drop a packet if two I2C receptions land in the same critical section; measured rate is ~1 in 3200, not a meaningful limiter.</a:t>
+            </a:r>
+          </a:p>
+          <a:p>
+            <a:pPr>
+              <a:spcAft>
+                <a:spcPts val="900"/>
+              </a:spcAft>
+            </a:pPr>
+            <a:r>
+              <a:rPr sz="1250">
+                <a:solidFill>
+                  <a:srgbClr val="333333"/>
+                </a:solidFill>
+                <a:latin typeface="Calibri"/>
+              </a:rPr>
+              <a:t>• </a:t>
+            </a:r>
+            <a:r>
+              <a:rPr sz="1250">
+                <a:solidFill>
+                  <a:srgbClr val="333333"/>
+                </a:solidFill>
+                <a:latin typeface="Calibri"/>
+              </a:rPr>
+              <a:t>Not measured: whether the camera driver itself (Picamera2/libcamera) drops frames before Python's capture_array() call returns them — a different, deeper layer than anything checked here.</a:t>
+            </a:r>
+          </a:p>
+        </p:txBody>
+      </p:sp>
+      <p:graphicFrame>
+        <p:nvGraphicFramePr>
+          <p:cNvPr id="5" name="Table 4"/>
+          <p:cNvGraphicFramePr>
+            <a:graphicFrameLocks noGrp="1"/>
+          </p:cNvGraphicFramePr>
+          <p:nvPr/>
+        </p:nvGraphicFramePr>
+        <p:xfrm>
+          <a:off x="6350000" y="1550000"/>
+          <a:ext cx="5250000" cy="2200000"/>
+        </p:xfrm>
+        <a:graphic>
+          <a:graphicData uri="http://schemas.openxmlformats.org/drawingml/2006/table">
+            <a:tbl>
+              <a:tblPr firstRow="1" bandRow="1">
+                <a:tableStyleId>{5C22544A-7EE6-4342-B048-85BDC9FD1C3A}</a:tableStyleId>
+              </a:tblPr>
+              <a:tblGrid>
+                <a:gridCol w="1100000"/>
+                <a:gridCol w="1500000"/>
+                <a:gridCol w="1900000"/>
+                <a:gridCol w="750000"/>
+              </a:tblGrid>
+              <a:tr h="440000">
+                <a:tc>
+                  <a:txBody>
+                    <a:bodyPr/>
+                    <a:lstStyle/>
+                    <a:p>
+                      <a:pPr algn="ctr"/>
+                      <a:r>
+                        <a:rPr sz="1250" b="1">
+                          <a:solidFill>
+                            <a:srgbClr val="FFFFFF"/>
+                          </a:solidFill>
+                          <a:latin typeface="Calibri"/>
+                        </a:rPr>
+                        <a:t>Trial</a:t>
+                      </a:r>
+                    </a:p>
+                  </a:txBody>
+                  <a:tcPr anchor="ctr">
+                    <a:solidFill>
+                      <a:srgbClr val="2E5C8A"/>
+                    </a:solidFill>
+                  </a:tcPr>
+                </a:tc>
+                <a:tc>
+                  <a:txBody>
+                    <a:bodyPr/>
+                    <a:lstStyle/>
+                    <a:p>
+                      <a:pPr algn="ctr"/>
+                      <a:r>
+                        <a:rPr sz="1250" b="1">
+                          <a:solidFill>
+                            <a:srgbClr val="FFFFFF"/>
+                          </a:solidFill>
+                          <a:latin typeface="Calibri"/>
+                        </a:rPr>
+                        <a:t>Pi sends (seq)</a:t>
+                      </a:r>
+                    </a:p>
+                  </a:txBody>
+                  <a:tcPr anchor="ctr">
+                    <a:solidFill>
+                      <a:srgbClr val="2E5C8A"/>
+                    </a:solidFill>
+                  </a:tcPr>
+                </a:tc>
+                <a:tc>
+                  <a:txBody>
+                    <a:bodyPr/>
+                    <a:lstStyle/>
+                    <a:p>
+                      <a:pPr algn="ctr"/>
+                      <a:r>
+                        <a:rPr sz="1250" b="1">
+                          <a:solidFill>
+                            <a:srgbClr val="FFFFFF"/>
+                          </a:solidFill>
+                          <a:latin typeface="Calibri"/>
+                        </a:rPr>
+                        <a:t>Nucleo registered</a:t>
+                      </a:r>
+                    </a:p>
+                  </a:txBody>
+                  <a:tcPr anchor="ctr">
+                    <a:solidFill>
+                      <a:srgbClr val="2E5C8A"/>
+                    </a:solidFill>
+                  </a:tcPr>
+                </a:tc>
+                <a:tc>
+                  <a:txBody>
+                    <a:bodyPr/>
+                    <a:lstStyle/>
+                    <a:p>
+                      <a:pPr algn="ctr"/>
+                      <a:r>
+                        <a:rPr sz="1250" b="1">
+                          <a:solidFill>
+                            <a:srgbClr val="FFFFFF"/>
+                          </a:solidFill>
+                          <a:latin typeface="Calibri"/>
+                        </a:rPr>
+                        <a:t>Lost</a:t>
+                      </a:r>
+                    </a:p>
+                  </a:txBody>
+                  <a:tcPr anchor="ctr">
+                    <a:solidFill>
+                      <a:srgbClr val="2E5C8A"/>
+                    </a:solidFill>
+                  </a:tcPr>
+                </a:tc>
+              </a:tr>
+              <a:tr h="440000">
+                <a:tc>
+                  <a:txBody>
+                    <a:bodyPr/>
+                    <a:lstStyle/>
+                    <a:p>
+                      <a:pPr algn="ctr"/>
+                      <a:r>
+                        <a:rPr sz="1250">
+                          <a:solidFill>
+                            <a:srgbClr val="333333"/>
+                          </a:solidFill>
+                          <a:latin typeface="Calibri"/>
+                        </a:rPr>
+                        <a:t>1</a:t>
+                      </a:r>
+                    </a:p>
+                  </a:txBody>
+                  <a:tcPr anchor="ctr">
+                    <a:solidFill>
+                      <a:srgbClr val="FFFFFF"/>
+                    </a:solidFill>
+                  </a:tcPr>
+                </a:tc>
+                <a:tc>
+                  <a:txBody>
+                    <a:bodyPr/>
+                    <a:lstStyle/>
+                    <a:p>
+                      <a:pPr algn="ctr"/>
+                      <a:r>
+                        <a:rPr sz="1250">
+                          <a:solidFill>
+                            <a:srgbClr val="333333"/>
+                          </a:solidFill>
+                          <a:latin typeface="Calibri"/>
+                        </a:rPr>
+                        <a:t>3610</a:t>
+                      </a:r>
+                    </a:p>
+                  </a:txBody>
+                  <a:tcPr anchor="ctr">
+                    <a:solidFill>
+                      <a:srgbClr val="FFFFFF"/>
+                    </a:solidFill>
+                  </a:tcPr>
+                </a:tc>
+                <a:tc>
+                  <a:txBody>
+                    <a:bodyPr/>
+                    <a:lstStyle/>
+                    <a:p>
+                      <a:pPr algn="ctr"/>
+                      <a:r>
+                        <a:rPr sz="1250">
+                          <a:solidFill>
+                            <a:srgbClr val="333333"/>
+                          </a:solidFill>
+                          <a:latin typeface="Calibri"/>
+                        </a:rPr>
+                        <a:t>3610</a:t>
+                      </a:r>
+                    </a:p>
+                  </a:txBody>
+                  <a:tcPr anchor="ctr">
+                    <a:solidFill>
+                      <a:srgbClr val="FFFFFF"/>
+                    </a:solidFill>
+                  </a:tcPr>
+                </a:tc>
+                <a:tc>
+                  <a:txBody>
+                    <a:bodyPr/>
+                    <a:lstStyle/>
+                    <a:p>
+                      <a:pPr algn="ctr"/>
+                      <a:r>
+                        <a:rPr sz="1250">
+                          <a:solidFill>
+                            <a:srgbClr val="333333"/>
+                          </a:solidFill>
+                          <a:latin typeface="Calibri"/>
+                        </a:rPr>
+                        <a:t>0</a:t>
+                      </a:r>
+                    </a:p>
+                  </a:txBody>
+                  <a:tcPr anchor="ctr">
+                    <a:solidFill>
+                      <a:srgbClr val="FFFFFF"/>
+                    </a:solidFill>
+                  </a:tcPr>
+                </a:tc>
+              </a:tr>
+              <a:tr h="440000">
+                <a:tc>
+                  <a:txBody>
+                    <a:bodyPr/>
+                    <a:lstStyle/>
+                    <a:p>
+                      <a:pPr algn="ctr"/>
+                      <a:r>
+                        <a:rPr sz="1250">
+                          <a:solidFill>
+                            <a:srgbClr val="333333"/>
+                          </a:solidFill>
+                          <a:latin typeface="Calibri"/>
+                        </a:rPr>
+                        <a:t>2</a:t>
+                      </a:r>
+                    </a:p>
+                  </a:txBody>
+                  <a:tcPr anchor="ctr">
+                    <a:solidFill>
+                      <a:srgbClr val="F2F4F7"/>
+                    </a:solidFill>
+                  </a:tcPr>
+                </a:tc>
+                <a:tc>
+                  <a:txBody>
+                    <a:bodyPr/>
+                    <a:lstStyle/>
+                    <a:p>
+                      <a:pPr algn="ctr"/>
+                      <a:r>
+                        <a:rPr sz="1250">
+                          <a:solidFill>
+                            <a:srgbClr val="333333"/>
+                          </a:solidFill>
+                          <a:latin typeface="Calibri"/>
+                        </a:rPr>
+                        <a:t>3672</a:t>
+                      </a:r>
+                    </a:p>
+                  </a:txBody>
+                  <a:tcPr anchor="ctr">
+                    <a:solidFill>
+                      <a:srgbClr val="F2F4F7"/>
+                    </a:solidFill>
+                  </a:tcPr>
+                </a:tc>
+                <a:tc>
+                  <a:txBody>
+                    <a:bodyPr/>
+                    <a:lstStyle/>
+                    <a:p>
+                      <a:pPr algn="ctr"/>
+                      <a:r>
+                        <a:rPr sz="1250">
+                          <a:solidFill>
+                            <a:srgbClr val="333333"/>
+                          </a:solidFill>
+                          <a:latin typeface="Calibri"/>
+                        </a:rPr>
+                        <a:t>3672</a:t>
+                      </a:r>
+                    </a:p>
+                  </a:txBody>
+                  <a:tcPr anchor="ctr">
+                    <a:solidFill>
+                      <a:srgbClr val="F2F4F7"/>
+                    </a:solidFill>
+                  </a:tcPr>
+                </a:tc>
+                <a:tc>
+                  <a:txBody>
+                    <a:bodyPr/>
+                    <a:lstStyle/>
+                    <a:p>
+                      <a:pPr algn="ctr"/>
+                      <a:r>
+                        <a:rPr sz="1250">
+                          <a:solidFill>
+                            <a:srgbClr val="333333"/>
+                          </a:solidFill>
+                          <a:latin typeface="Calibri"/>
+                        </a:rPr>
+                        <a:t>0</a:t>
+                      </a:r>
+                    </a:p>
+                  </a:txBody>
+                  <a:tcPr anchor="ctr">
+                    <a:solidFill>
+                      <a:srgbClr val="F2F4F7"/>
+                    </a:solidFill>
+                  </a:tcPr>
+                </a:tc>
+              </a:tr>
+              <a:tr h="440000">
+                <a:tc>
+                  <a:txBody>
+                    <a:bodyPr/>
+                    <a:lstStyle/>
+                    <a:p>
+                      <a:pPr algn="ctr"/>
+                      <a:r>
+                        <a:rPr sz="1250">
+                          <a:solidFill>
+                            <a:srgbClr val="333333"/>
+                          </a:solidFill>
+                          <a:latin typeface="Calibri"/>
+                        </a:rPr>
+                        <a:t>3</a:t>
+                      </a:r>
+                    </a:p>
+                  </a:txBody>
+                  <a:tcPr anchor="ctr">
+                    <a:solidFill>
+                      <a:srgbClr val="FFFFFF"/>
+                    </a:solidFill>
+                  </a:tcPr>
+                </a:tc>
+                <a:tc>
+                  <a:txBody>
+                    <a:bodyPr/>
+                    <a:lstStyle/>
+                    <a:p>
+                      <a:pPr algn="ctr"/>
+                      <a:r>
+                        <a:rPr sz="1250">
+                          <a:solidFill>
+                            <a:srgbClr val="333333"/>
+                          </a:solidFill>
+                          <a:latin typeface="Calibri"/>
+                        </a:rPr>
+                        <a:t>3591</a:t>
+                      </a:r>
+                    </a:p>
+                  </a:txBody>
+                  <a:tcPr anchor="ctr">
+                    <a:solidFill>
+                      <a:srgbClr val="FFFFFF"/>
+                    </a:solidFill>
+                  </a:tcPr>
+                </a:tc>
+                <a:tc>
+                  <a:txBody>
+                    <a:bodyPr/>
+                    <a:lstStyle/>
+                    <a:p>
+                      <a:pPr algn="ctr"/>
+                      <a:r>
+                        <a:rPr sz="1250">
+                          <a:solidFill>
+                            <a:srgbClr val="333333"/>
+                          </a:solidFill>
+                          <a:latin typeface="Calibri"/>
+                        </a:rPr>
+                        <a:t>3591</a:t>
+                      </a:r>
+                    </a:p>
+                  </a:txBody>
+                  <a:tcPr anchor="ctr">
+                    <a:solidFill>
+                      <a:srgbClr val="FFFFFF"/>
+                    </a:solidFill>
+                  </a:tcPr>
+                </a:tc>
+                <a:tc>
+                  <a:txBody>
+                    <a:bodyPr/>
+                    <a:lstStyle/>
+                    <a:p>
+                      <a:pPr algn="ctr"/>
+                      <a:r>
+                        <a:rPr sz="1250">
+                          <a:solidFill>
+                            <a:srgbClr val="333333"/>
+                          </a:solidFill>
+                          <a:latin typeface="Calibri"/>
+                        </a:rPr>
+                        <a:t>0</a:t>
+                      </a:r>
+                    </a:p>
+                  </a:txBody>
+                  <a:tcPr anchor="ctr">
+                    <a:solidFill>
+                      <a:srgbClr val="FFFFFF"/>
+                    </a:solidFill>
+                  </a:tcPr>
+                </a:tc>
+              </a:tr>
+              <a:tr h="440000">
+                <a:tc>
+                  <a:txBody>
+                    <a:bodyPr/>
+                    <a:lstStyle/>
+                    <a:p>
+                      <a:pPr algn="ctr"/>
+                      <a:r>
+                        <a:rPr sz="1250">
+                          <a:solidFill>
+                            <a:srgbClr val="333333"/>
+                          </a:solidFill>
+                          <a:latin typeface="Calibri"/>
+                        </a:rPr>
+                        <a:t>Total</a:t>
+                      </a:r>
+                    </a:p>
+                  </a:txBody>
+                  <a:tcPr anchor="ctr">
+                    <a:solidFill>
+                      <a:srgbClr val="F2F4F7"/>
+                    </a:solidFill>
+                  </a:tcPr>
+                </a:tc>
+                <a:tc>
+                  <a:txBody>
+                    <a:bodyPr/>
+                    <a:lstStyle/>
+                    <a:p>
+                      <a:pPr algn="ctr"/>
+                      <a:r>
+                        <a:rPr sz="1250">
+                          <a:solidFill>
+                            <a:srgbClr val="333333"/>
+                          </a:solidFill>
+                          <a:latin typeface="Calibri"/>
+                        </a:rPr>
+                        <a:t>10873</a:t>
+                      </a:r>
+                    </a:p>
+                  </a:txBody>
+                  <a:tcPr anchor="ctr">
+                    <a:solidFill>
+                      <a:srgbClr val="F2F4F7"/>
+                    </a:solidFill>
+                  </a:tcPr>
+                </a:tc>
+                <a:tc>
+                  <a:txBody>
+                    <a:bodyPr/>
+                    <a:lstStyle/>
+                    <a:p>
+                      <a:pPr algn="ctr"/>
+                      <a:r>
+                        <a:rPr sz="1250">
+                          <a:solidFill>
+                            <a:srgbClr val="333333"/>
+                          </a:solidFill>
+                          <a:latin typeface="Calibri"/>
+                        </a:rPr>
+                        <a:t>10873</a:t>
+                      </a:r>
+                    </a:p>
+                  </a:txBody>
+                  <a:tcPr anchor="ctr">
+                    <a:solidFill>
+                      <a:srgbClr val="F2F4F7"/>
+                    </a:solidFill>
+                  </a:tcPr>
+                </a:tc>
+                <a:tc>
+                  <a:txBody>
+                    <a:bodyPr/>
+                    <a:lstStyle/>
+                    <a:p>
+                      <a:pPr algn="ctr"/>
+                      <a:r>
+                        <a:rPr sz="1250">
+                          <a:solidFill>
+                            <a:srgbClr val="333333"/>
+                          </a:solidFill>
+                          <a:latin typeface="Calibri"/>
+                        </a:rPr>
+                        <a:t>0</a:t>
+                      </a:r>
+                    </a:p>
+                  </a:txBody>
+                  <a:tcPr anchor="ctr">
+                    <a:solidFill>
+                      <a:srgbClr val="F2F4F7"/>
+                    </a:solidFill>
+                  </a:tcPr>
+                </a:tc>
+              </a:tr>
+            </a:tbl>
+          </a:graphicData>
+        </a:graphic>
+      </p:graphicFrame>
+      <p:sp>
+        <p:nvSpPr>
+          <p:cNvPr id="6" name="TextBox 5"/>
+          <p:cNvSpPr txBox="1"/>
+          <p:nvPr/>
+        </p:nvSpPr>
+        <p:spPr>
+          <a:xfrm>
+            <a:off x="6350000" y="3850000"/>
+            <a:ext cx="5250000" cy="600000"/>
+          </a:xfrm>
+          <a:prstGeom prst="rect">
+            <a:avLst/>
+          </a:prstGeom>
+          <a:noFill/>
+        </p:spPr>
+        <p:txBody>
+          <a:bodyPr wrap="square">
+            <a:spAutoFit/>
+          </a:bodyPr>
+          <a:lstStyle/>
+          <a:p>
+            <a:r>
+              <a:rPr sz="1050" i="1">
+                <a:solidFill>
+                  <a:srgbClr val="898781"/>
+                </a:solidFill>
+                <a:latin typeface="Calibri"/>
+              </a:rPr>
+              <a:t>0 lost across all 3 trials, ~10,873 real sends -- 8s windows, open_loop/amp off, link-only check</a:t>
+            </a:r>
+          </a:p>
+        </p:txBody>
+      </p:sp>
+    </p:spTree>
+  </p:cSld>
+  <p:clrMapOvr>
+    <a:masterClrMapping/>
+  </p:clrMapOvr>
+</p:sld>
+</file>
+
+<file path=ppt/slides/slide24.xml><?xml version="1.0" encoding="utf-8"?>
+<p:sld xmlns:a="http://schemas.openxmlformats.org/drawingml/2006/main" xmlns:p="http://schemas.openxmlformats.org/presentationml/2006/main" xmlns:r="http://schemas.openxmlformats.org/officeDocument/2006/relationships">
+  <p:cSld>
+    <p:spTree>
+      <p:nvGrpSpPr>
+        <p:cNvPr id="1" name=""/>
+        <p:cNvGrpSpPr/>
+        <p:nvPr/>
+      </p:nvGrpSpPr>
+      <p:grpSpPr/>
+      <p:sp>
+        <p:nvSpPr>
+          <p:cNvPr id="2" name="TextBox 1"/>
+          <p:cNvSpPr txBox="1"/>
+          <p:nvPr/>
+        </p:nvSpPr>
+        <p:spPr>
+          <a:xfrm>
+            <a:off x="457200" y="228600"/>
+            <a:ext cx="11246760" cy="640000"/>
+          </a:xfrm>
+          <a:prstGeom prst="rect">
+            <a:avLst/>
+          </a:prstGeom>
+          <a:noFill/>
+        </p:spPr>
+        <p:txBody>
+          <a:bodyPr wrap="square">
+            <a:spAutoFit/>
+          </a:bodyPr>
+          <a:lstStyle/>
+          <a:p>
+            <a:r>
+              <a:rPr sz="2400" b="1">
+                <a:solidFill>
+                  <a:srgbClr val="1A1A2E"/>
+                </a:solidFill>
+                <a:latin typeface="Calibri"/>
+              </a:rPr>
+              <a:t>Real control-step timing jitter (current config)</a:t>
+            </a:r>
+          </a:p>
+        </p:txBody>
+      </p:sp>
+      <p:cxnSp>
+        <p:nvCxnSpPr>
+          <p:cNvPr id="3" name="Connector 2"/>
+          <p:cNvCxnSpPr/>
+          <p:nvPr/>
+        </p:nvCxnSpPr>
+        <p:spPr>
+          <a:xfrm>
+            <a:off x="457200" y="960120"/>
+            <a:ext cx="11247120" cy="0"/>
+          </a:xfrm>
+          <a:prstGeom prst="line">
+            <a:avLst/>
+          </a:prstGeom>
+          <a:ln w="19080">
+            <a:solidFill>
+              <a:srgbClr val="2E5C8A"/>
+            </a:solidFill>
+          </a:ln>
+        </p:spPr>
+        <p:style>
+          <a:lnRef idx="2">
+            <a:schemeClr val="accent1"/>
+          </a:lnRef>
+          <a:fillRef idx="0">
+            <a:schemeClr val="accent1"/>
+          </a:fillRef>
+          <a:effectRef idx="1">
+            <a:schemeClr val="accent1"/>
+          </a:effectRef>
+          <a:fontRef idx="minor">
+            <a:schemeClr val="tx1"/>
+          </a:fontRef>
+        </p:style>
+      </p:cxnSp>
+      <p:sp>
+        <p:nvSpPr>
+          <p:cNvPr id="4" name="TextBox 3"/>
+          <p:cNvSpPr txBox="1"/>
+          <p:nvPr/>
+        </p:nvSpPr>
+        <p:spPr>
+          <a:xfrm>
+            <a:off x="457200" y="1120000"/>
+            <a:ext cx="11246760" cy="1750000"/>
+          </a:xfrm>
+          <a:prstGeom prst="rect">
+            <a:avLst/>
+          </a:prstGeom>
+          <a:noFill/>
+        </p:spPr>
+        <p:txBody>
+          <a:bodyPr wrap="square">
+            <a:spAutoFit/>
+          </a:bodyPr>
+          <a:lstStyle/>
+          <a:p>
+            <a:pPr>
+              <a:spcAft>
+                <a:spcPts val="900"/>
+              </a:spcAft>
+            </a:pPr>
+            <a:r>
+              <a:rPr sz="1250">
+                <a:solidFill>
+                  <a:srgbClr val="333333"/>
+                </a:solidFill>
+                <a:latin typeface="Calibri"/>
+              </a:rPr>
+              <a:t>• </a:t>
+            </a:r>
+            <a:r>
+              <a:rPr sz="1250">
+                <a:solidFill>
+                  <a:srgbClr val="333333"/>
+                </a:solidFill>
+                <a:latin typeface="Calibri"/>
+              </a:rPr>
+              <a:t>Measured via the g_ctrl_step_seq counter (cseq=) -- real per-firing intervals from consecutive firmware tick= deltas, NOT the earlier dac_y-value-change proxy (which silently undercounts near settled periods and produced unusable jitter numbers, see prior entry).</a:t>
+            </a:r>
+          </a:p>
+          <a:p>
+            <a:pPr>
+              <a:spcAft>
+                <a:spcPts val="900"/>
+              </a:spcAft>
+            </a:pPr>
+            <a:r>
+              <a:rPr sz="1250">
+                <a:solidFill>
+                  <a:srgbClr val="333333"/>
+                </a:solidFill>
+                <a:latin typeface="Calibri"/>
+              </a:rPr>
+              <a:t>• </a:t>
+            </a:r>
+            <a:r>
+              <a:rPr sz="1250">
+                <a:solidFill>
+                  <a:srgbClr val="333333"/>
+                </a:solidFill>
+                <a:latin typeface="Calibri"/>
+              </a:rPr>
+              <a:t>Kp=1.75/Ki=15, axis2 on, unthrottled, 3 trials pooled: dominant cluster n=6250, mean=2.17ms, std=0.86ms, CV=39.6% — a real, honest consistency number, not the 88-127% chaos the old method gave.</a:t>
+            </a:r>
+          </a:p>
+          <a:p>
+            <a:pPr>
+              <a:spcAft>
+                <a:spcPts val="900"/>
+              </a:spcAft>
+            </a:pPr>
+            <a:r>
+              <a:rPr sz="1250">
+                <a:solidFill>
+                  <a:srgbClr val="333333"/>
+                </a:solidFill>
+                <a:latin typeface="Calibri"/>
+              </a:rPr>
+              <a:t>• </a:t>
+            </a:r>
+            <a:r>
+              <a:rPr sz="1250">
+                <a:solidFill>
+                  <a:srgbClr val="333333"/>
+                </a:solidFill>
+                <a:latin typeface="Calibri"/>
+              </a:rPr>
+              <a:t>One 174ms outlier (1 of 6251, 0.016%) excluded from the CV above and shown separately — cseq only increments on a confident detection, so this most likely reflects a brief real detection dropout, not a comms/firmware stall.</a:t>
+            </a:r>
+          </a:p>
+        </p:txBody>
+      </p:sp>
+      <p:pic>
+        <p:nvPicPr>
+          <p:cNvPr id="5" name="Picture 4" descr="fta_baseline_jitter_histogram.png"/>
+          <p:cNvPicPr>
+            <a:picLocks noChangeAspect="1"/>
+          </p:cNvPicPr>
+          <p:nvPr/>
+        </p:nvPicPr>
+        <p:blipFill>
+          <a:blip r:embed="rId2"/>
+          <a:stretch>
+            <a:fillRect/>
+          </a:stretch>
+        </p:blipFill>
+        <p:spPr>
+          <a:xfrm>
+            <a:off x="3081000" y="3050000"/>
+            <a:ext cx="6030000" cy="3350000"/>
+          </a:xfrm>
+          <a:prstGeom prst="rect">
+            <a:avLst/>
+          </a:prstGeom>
+        </p:spPr>
+      </p:pic>
+    </p:spTree>
+  </p:cSld>
+  <p:clrMapOvr>
+    <a:masterClrMapping/>
+  </p:clrMapOvr>
+</p:sld>
+</file>
+
 <file path=ppt/slides/slide3.xml><?xml version="1.0" encoding="utf-8"?>
 <p:sld xmlns:a="http://schemas.openxmlformats.org/drawingml/2006/main" xmlns:p="http://schemas.openxmlformats.org/presentationml/2006/main" xmlns:r="http://schemas.openxmlformats.org/officeDocument/2006/relationships" xmlns:p14="http://schemas.microsoft.com/office/powerpoint/2010/main" xmlns:p15="http://schemas.microsoft.com/office/powerpoint/2012/main" xmlns:mc="http://schemas.openxmlformats.org/markup-compatibility/2006">
   <p:cSld>

--- a/docs/session_results_2026-08-18_pid_tuning.pptx
+++ b/docs/session_results_2026-08-18_pid_tuning.pptx
@@ -28,6 +28,8 @@
     <p:sldId id="278" r:id="rId25"/>
     <p:sldId id="275" r:id="rId22"/>
     <p:sldId id="276" r:id="rId23"/>
+    <p:sldId id="279" r:id="rId26"/>
+    <p:sldId id="280" r:id="rId27"/>
   </p:sldIdLst>
   <p:sldSz cx="12192000" cy="6858000"/>
   <p:notesSz cx="7772400" cy="10058400"/>
@@ -4321,6 +4323,290 @@
 </p:sld>
 </file>
 
+<file path=ppt/slides/slide19.xml><?xml version="1.0" encoding="utf-8"?>
+<p:sld xmlns:a="http://schemas.openxmlformats.org/drawingml/2006/main" xmlns:p="http://schemas.openxmlformats.org/presentationml/2006/main" xmlns:r="http://schemas.openxmlformats.org/officeDocument/2006/relationships">
+  <p:cSld>
+    <p:spTree>
+      <p:nvGrpSpPr>
+        <p:cNvPr id="1" name=""/>
+        <p:cNvGrpSpPr/>
+        <p:nvPr/>
+      </p:nvGrpSpPr>
+      <p:grpSpPr/>
+      <p:sp>
+        <p:nvSpPr>
+          <p:cNvPr id="2" name="TextBox 1"/>
+          <p:cNvSpPr txBox="1"/>
+          <p:nvPr/>
+        </p:nvSpPr>
+        <p:spPr>
+          <a:xfrm>
+            <a:off x="457200" y="228600"/>
+            <a:ext cx="11246760" cy="486360"/>
+          </a:xfrm>
+          <a:prstGeom prst="rect">
+            <a:avLst/>
+          </a:prstGeom>
+          <a:noFill/>
+        </p:spPr>
+        <p:txBody>
+          <a:bodyPr wrap="square">
+            <a:spAutoFit/>
+          </a:bodyPr>
+          <a:lstStyle/>
+          <a:p>
+            <a:r>
+              <a:rPr sz="2400" b="1">
+                <a:solidFill>
+                  <a:srgbClr val="1A1A2E"/>
+                </a:solidFill>
+                <a:latin typeface="Calibri"/>
+              </a:rPr>
+              <a:t>Open-loop plant Bode plot — the resonance, not delay or tuning, is the ceiling</a:t>
+            </a:r>
+          </a:p>
+        </p:txBody>
+      </p:sp>
+      <p:cxnSp>
+        <p:nvCxnSpPr>
+          <p:cNvPr id="3" name="Connector 2"/>
+          <p:cNvCxnSpPr/>
+          <p:nvPr/>
+        </p:nvCxnSpPr>
+        <p:spPr>
+          <a:xfrm>
+            <a:off x="457200" y="960120"/>
+            <a:ext cx="11247120" cy="0"/>
+          </a:xfrm>
+          <a:prstGeom prst="line">
+            <a:avLst/>
+          </a:prstGeom>
+          <a:ln w="19080">
+            <a:solidFill>
+              <a:srgbClr val="2E5C8A"/>
+            </a:solidFill>
+          </a:ln>
+        </p:spPr>
+        <p:style>
+          <a:lnRef idx="2">
+            <a:schemeClr val="accent1"/>
+          </a:lnRef>
+          <a:fillRef idx="0">
+            <a:schemeClr val="accent1"/>
+          </a:fillRef>
+          <a:effectRef idx="1">
+            <a:schemeClr val="accent1"/>
+          </a:effectRef>
+          <a:fontRef idx="minor">
+            <a:schemeClr val="tx1"/>
+          </a:fontRef>
+        </p:style>
+      </p:cxnSp>
+      <p:sp>
+        <p:nvSpPr>
+          <p:cNvPr id="4" name="TextBox 3"/>
+          <p:cNvSpPr txBox="1"/>
+          <p:nvPr/>
+        </p:nvSpPr>
+        <p:spPr>
+          <a:xfrm>
+            <a:off x="457200" y="1143000"/>
+            <a:ext cx="5577480" cy="3565800"/>
+          </a:xfrm>
+          <a:prstGeom prst="rect">
+            <a:avLst/>
+          </a:prstGeom>
+          <a:noFill/>
+        </p:spPr>
+        <p:txBody>
+          <a:bodyPr wrap="square">
+            <a:spAutoFit/>
+          </a:bodyPr>
+          <a:lstStyle/>
+          <a:p>
+            <a:pPr>
+              <a:spcAft>
+                <a:spcPts val="900"/>
+              </a:spcAft>
+            </a:pPr>
+            <a:r>
+              <a:rPr sz="1250">
+                <a:solidFill>
+                  <a:srgbClr val="333333"/>
+                </a:solidFill>
+                <a:latin typeface="Calibri"/>
+              </a:rPr>
+              <a:t>• </a:t>
+            </a:r>
+            <a:r>
+              <a:rPr sz="1250">
+                <a:solidFill>
+                  <a:srgbClr val="333333"/>
+                </a:solidFill>
+                <a:latin typeface="Calibri"/>
+              </a:rPr>
+              <a:t>Built a firmware open-loop sine generator (bypasses the PID entirely, drives dac_y directly) and swept dac_y→cx across 1-50Hz — the first real open-loop frequency response measured this project.</a:t>
+            </a:r>
+          </a:p>
+          <a:p>
+            <a:pPr>
+              <a:spcAft>
+                <a:spcPts val="900"/>
+              </a:spcAft>
+            </a:pPr>
+            <a:r>
+              <a:rPr sz="1250">
+                <a:solidFill>
+                  <a:srgbClr val="333333"/>
+                </a:solidFill>
+                <a:latin typeface="Calibri"/>
+              </a:rPr>
+              <a:t>• </a:t>
+            </a:r>
+            <a:r>
+              <a:rPr sz="1250">
+                <a:solidFill>
+                  <a:srgbClr val="333333"/>
+                </a:solidFill>
+                <a:latin typeface="Calibri"/>
+              </a:rPr>
+              <a:t>Phase has real margin through 10-20Hz (40° at 10Hz, 79° at 20Hz) — the plant itself isn't the problem IN that band.</a:t>
+            </a:r>
+          </a:p>
+          <a:p>
+            <a:pPr>
+              <a:spcAft>
+                <a:spcPts val="900"/>
+              </a:spcAft>
+            </a:pPr>
+            <a:r>
+              <a:rPr sz="1250">
+                <a:solidFill>
+                  <a:srgbClr val="333333"/>
+                </a:solidFill>
+                <a:latin typeface="Calibri"/>
+              </a:rPr>
+              <a:t>• </a:t>
+            </a:r>
+            <a:r>
+              <a:rPr sz="1250">
+                <a:solidFill>
+                  <a:srgbClr val="333333"/>
+                </a:solidFill>
+                <a:latin typeface="Calibri"/>
+              </a:rPr>
+              <a:t>Sharp resonance at 38.5Hz (gain ~7.6x DC) — matches the ring-down test exactly, from a completely independent method (forced sine vs. free decay). Strong cross-validation, not a fluke.</a:t>
+            </a:r>
+          </a:p>
+          <a:p>
+            <a:pPr>
+              <a:spcAft>
+                <a:spcPts val="900"/>
+              </a:spcAft>
+            </a:pPr>
+            <a:r>
+              <a:rPr sz="1250">
+                <a:solidFill>
+                  <a:srgbClr val="333333"/>
+                </a:solidFill>
+                <a:latin typeface="Calibri"/>
+              </a:rPr>
+              <a:t>• </a:t>
+            </a:r>
+            <a:r>
+              <a:rPr sz="1250">
+                <a:solidFill>
+                  <a:srgbClr val="333333"/>
+                </a:solidFill>
+                <a:latin typeface="Calibri"/>
+              </a:rPr>
+              <a:t>5Hz lag (12.0ms) matches the directly-measured pure loop delay (~11.5ms) — a third independent cross-check.</a:t>
+            </a:r>
+          </a:p>
+          <a:p>
+            <a:pPr>
+              <a:spcAft>
+                <a:spcPts val="900"/>
+              </a:spcAft>
+            </a:pPr>
+            <a:r>
+              <a:rPr sz="1250">
+                <a:solidFill>
+                  <a:srgbClr val="333333"/>
+                </a:solidFill>
+                <a:latin typeface="Calibri"/>
+              </a:rPr>
+              <a:t>• </a:t>
+            </a:r>
+            <a:r>
+              <a:rPr sz="1250">
+                <a:solidFill>
+                  <a:srgbClr val="333333"/>
+                </a:solidFill>
+                <a:latin typeface="Calibri"/>
+              </a:rPr>
+              <a:t>Any Ki high enough to push gain-crossover toward ~20-25Hz+ runs into the resonance's fast phase rotation (~140° in under two octaves) — explains the hard Ki ceiling all session, and why the notch's narrow fix gave a mixed result (previous slide).</a:t>
+            </a:r>
+          </a:p>
+          <a:p>
+            <a:pPr>
+              <a:spcAft>
+                <a:spcPts val="900"/>
+              </a:spcAft>
+            </a:pPr>
+            <a:r>
+              <a:rPr sz="1250">
+                <a:solidFill>
+                  <a:srgbClr val="333333"/>
+                </a:solidFill>
+                <a:latin typeface="Calibri"/>
+              </a:rPr>
+              <a:t>• </a:t>
+            </a:r>
+            <a:r>
+              <a:rPr sz="1250">
+                <a:solidFill>
+                  <a:srgbClr val="333333"/>
+                </a:solidFill>
+                <a:latin typeface="Calibri"/>
+              </a:rPr>
+              <a:t>Strongest evidence yet for a hardware fix (stiffen/damp the flexure) over continued controller tuning.</a:t>
+            </a:r>
+          </a:p>
+        </p:txBody>
+      </p:sp>
+      <p:pic>
+        <p:nvPicPr>
+          <p:cNvPr id="5" name="Picture 4" descr="fta_open_loop_bode_summary.png"/>
+          <p:cNvPicPr>
+            <a:picLocks noChangeAspect="1"/>
+          </p:cNvPicPr>
+          <p:nvPr/>
+        </p:nvPicPr>
+        <p:blipFill>
+          <a:blip r:embed="rId3"/>
+          <a:stretch>
+            <a:fillRect/>
+          </a:stretch>
+        </p:blipFill>
+        <p:spPr>
+          <a:xfrm>
+            <a:off x="7031760" y="1143000"/>
+            <a:ext cx="4041240" cy="3565800"/>
+          </a:xfrm>
+          <a:prstGeom prst="rect">
+            <a:avLst/>
+          </a:prstGeom>
+        </p:spPr>
+      </p:pic>
+    </p:spTree>
+  </p:cSld>
+  <p:clrMapOvr>
+    <a:masterClrMapping/>
+  </p:clrMapOvr>
+</p:sld>
+</file>
+
 <file path=ppt/slides/slide2.xml><?xml version="1.0" encoding="utf-8"?>
 <p:sld xmlns:a="http://schemas.openxmlformats.org/drawingml/2006/main" xmlns:p="http://schemas.openxmlformats.org/presentationml/2006/main" xmlns:r="http://schemas.openxmlformats.org/officeDocument/2006/relationships" xmlns:p14="http://schemas.microsoft.com/office/powerpoint/2010/main" xmlns:p15="http://schemas.microsoft.com/office/powerpoint/2012/main" xmlns:mc="http://schemas.openxmlformats.org/markup-compatibility/2006">
   <p:cSld>
@@ -4627,290 +4913,6 @@
 </file>
 
 <file path=ppt/slides/slide20.xml><?xml version="1.0" encoding="utf-8"?>
-<p:sld xmlns:a="http://schemas.openxmlformats.org/drawingml/2006/main" xmlns:p="http://schemas.openxmlformats.org/presentationml/2006/main" xmlns:r="http://schemas.openxmlformats.org/officeDocument/2006/relationships">
-  <p:cSld>
-    <p:spTree>
-      <p:nvGrpSpPr>
-        <p:cNvPr id="1" name=""/>
-        <p:cNvGrpSpPr/>
-        <p:nvPr/>
-      </p:nvGrpSpPr>
-      <p:grpSpPr/>
-      <p:sp>
-        <p:nvSpPr>
-          <p:cNvPr id="2" name="TextBox 1"/>
-          <p:cNvSpPr txBox="1"/>
-          <p:nvPr/>
-        </p:nvSpPr>
-        <p:spPr>
-          <a:xfrm>
-            <a:off x="457200" y="228600"/>
-            <a:ext cx="11246760" cy="486360"/>
-          </a:xfrm>
-          <a:prstGeom prst="rect">
-            <a:avLst/>
-          </a:prstGeom>
-          <a:noFill/>
-        </p:spPr>
-        <p:txBody>
-          <a:bodyPr wrap="square">
-            <a:spAutoFit/>
-          </a:bodyPr>
-          <a:lstStyle/>
-          <a:p>
-            <a:r>
-              <a:rPr sz="2400" b="1">
-                <a:solidFill>
-                  <a:srgbClr val="1A1A2E"/>
-                </a:solidFill>
-                <a:latin typeface="Calibri"/>
-              </a:rPr>
-              <a:t>Open-loop plant Bode plot — the resonance, not delay or tuning, is the ceiling</a:t>
-            </a:r>
-          </a:p>
-        </p:txBody>
-      </p:sp>
-      <p:cxnSp>
-        <p:nvCxnSpPr>
-          <p:cNvPr id="3" name="Connector 2"/>
-          <p:cNvCxnSpPr/>
-          <p:nvPr/>
-        </p:nvCxnSpPr>
-        <p:spPr>
-          <a:xfrm>
-            <a:off x="457200" y="960120"/>
-            <a:ext cx="11247120" cy="0"/>
-          </a:xfrm>
-          <a:prstGeom prst="line">
-            <a:avLst/>
-          </a:prstGeom>
-          <a:ln w="19080">
-            <a:solidFill>
-              <a:srgbClr val="2E5C8A"/>
-            </a:solidFill>
-          </a:ln>
-        </p:spPr>
-        <p:style>
-          <a:lnRef idx="2">
-            <a:schemeClr val="accent1"/>
-          </a:lnRef>
-          <a:fillRef idx="0">
-            <a:schemeClr val="accent1"/>
-          </a:fillRef>
-          <a:effectRef idx="1">
-            <a:schemeClr val="accent1"/>
-          </a:effectRef>
-          <a:fontRef idx="minor">
-            <a:schemeClr val="tx1"/>
-          </a:fontRef>
-        </p:style>
-      </p:cxnSp>
-      <p:sp>
-        <p:nvSpPr>
-          <p:cNvPr id="4" name="TextBox 3"/>
-          <p:cNvSpPr txBox="1"/>
-          <p:nvPr/>
-        </p:nvSpPr>
-        <p:spPr>
-          <a:xfrm>
-            <a:off x="457200" y="1143000"/>
-            <a:ext cx="5577480" cy="3565800"/>
-          </a:xfrm>
-          <a:prstGeom prst="rect">
-            <a:avLst/>
-          </a:prstGeom>
-          <a:noFill/>
-        </p:spPr>
-        <p:txBody>
-          <a:bodyPr wrap="square">
-            <a:spAutoFit/>
-          </a:bodyPr>
-          <a:lstStyle/>
-          <a:p>
-            <a:pPr>
-              <a:spcAft>
-                <a:spcPts val="900"/>
-              </a:spcAft>
-            </a:pPr>
-            <a:r>
-              <a:rPr sz="1250">
-                <a:solidFill>
-                  <a:srgbClr val="333333"/>
-                </a:solidFill>
-                <a:latin typeface="Calibri"/>
-              </a:rPr>
-              <a:t>• </a:t>
-            </a:r>
-            <a:r>
-              <a:rPr sz="1250">
-                <a:solidFill>
-                  <a:srgbClr val="333333"/>
-                </a:solidFill>
-                <a:latin typeface="Calibri"/>
-              </a:rPr>
-              <a:t>Built a firmware open-loop sine generator (bypasses the PID entirely, drives dac_y directly) and swept dac_y→cx across 1-50Hz — the first real open-loop frequency response measured this project.</a:t>
-            </a:r>
-          </a:p>
-          <a:p>
-            <a:pPr>
-              <a:spcAft>
-                <a:spcPts val="900"/>
-              </a:spcAft>
-            </a:pPr>
-            <a:r>
-              <a:rPr sz="1250">
-                <a:solidFill>
-                  <a:srgbClr val="333333"/>
-                </a:solidFill>
-                <a:latin typeface="Calibri"/>
-              </a:rPr>
-              <a:t>• </a:t>
-            </a:r>
-            <a:r>
-              <a:rPr sz="1250">
-                <a:solidFill>
-                  <a:srgbClr val="333333"/>
-                </a:solidFill>
-                <a:latin typeface="Calibri"/>
-              </a:rPr>
-              <a:t>Phase has real margin through 10-20Hz (40° at 10Hz, 79° at 20Hz) — the plant itself isn't the problem IN that band.</a:t>
-            </a:r>
-          </a:p>
-          <a:p>
-            <a:pPr>
-              <a:spcAft>
-                <a:spcPts val="900"/>
-              </a:spcAft>
-            </a:pPr>
-            <a:r>
-              <a:rPr sz="1250">
-                <a:solidFill>
-                  <a:srgbClr val="333333"/>
-                </a:solidFill>
-                <a:latin typeface="Calibri"/>
-              </a:rPr>
-              <a:t>• </a:t>
-            </a:r>
-            <a:r>
-              <a:rPr sz="1250">
-                <a:solidFill>
-                  <a:srgbClr val="333333"/>
-                </a:solidFill>
-                <a:latin typeface="Calibri"/>
-              </a:rPr>
-              <a:t>Sharp resonance at 38.5Hz (gain ~7.6x DC) — matches the ring-down test exactly, from a completely independent method (forced sine vs. free decay). Strong cross-validation, not a fluke.</a:t>
-            </a:r>
-          </a:p>
-          <a:p>
-            <a:pPr>
-              <a:spcAft>
-                <a:spcPts val="900"/>
-              </a:spcAft>
-            </a:pPr>
-            <a:r>
-              <a:rPr sz="1250">
-                <a:solidFill>
-                  <a:srgbClr val="333333"/>
-                </a:solidFill>
-                <a:latin typeface="Calibri"/>
-              </a:rPr>
-              <a:t>• </a:t>
-            </a:r>
-            <a:r>
-              <a:rPr sz="1250">
-                <a:solidFill>
-                  <a:srgbClr val="333333"/>
-                </a:solidFill>
-                <a:latin typeface="Calibri"/>
-              </a:rPr>
-              <a:t>5Hz lag (12.0ms) matches the directly-measured pure loop delay (~11.5ms) — a third independent cross-check.</a:t>
-            </a:r>
-          </a:p>
-          <a:p>
-            <a:pPr>
-              <a:spcAft>
-                <a:spcPts val="900"/>
-              </a:spcAft>
-            </a:pPr>
-            <a:r>
-              <a:rPr sz="1250">
-                <a:solidFill>
-                  <a:srgbClr val="333333"/>
-                </a:solidFill>
-                <a:latin typeface="Calibri"/>
-              </a:rPr>
-              <a:t>• </a:t>
-            </a:r>
-            <a:r>
-              <a:rPr sz="1250">
-                <a:solidFill>
-                  <a:srgbClr val="333333"/>
-                </a:solidFill>
-                <a:latin typeface="Calibri"/>
-              </a:rPr>
-              <a:t>Any Ki high enough to push gain-crossover toward ~20-25Hz+ runs into the resonance's fast phase rotation (~140° in under two octaves) — explains the hard Ki ceiling all session, and why the notch's narrow fix gave a mixed result (previous slide).</a:t>
-            </a:r>
-          </a:p>
-          <a:p>
-            <a:pPr>
-              <a:spcAft>
-                <a:spcPts val="900"/>
-              </a:spcAft>
-            </a:pPr>
-            <a:r>
-              <a:rPr sz="1250">
-                <a:solidFill>
-                  <a:srgbClr val="333333"/>
-                </a:solidFill>
-                <a:latin typeface="Calibri"/>
-              </a:rPr>
-              <a:t>• </a:t>
-            </a:r>
-            <a:r>
-              <a:rPr sz="1250">
-                <a:solidFill>
-                  <a:srgbClr val="333333"/>
-                </a:solidFill>
-                <a:latin typeface="Calibri"/>
-              </a:rPr>
-              <a:t>Strongest evidence yet for a hardware fix (stiffen/damp the flexure) over continued controller tuning.</a:t>
-            </a:r>
-          </a:p>
-        </p:txBody>
-      </p:sp>
-      <p:pic>
-        <p:nvPicPr>
-          <p:cNvPr id="5" name="Picture 4" descr="fta_open_loop_bode_summary.png"/>
-          <p:cNvPicPr>
-            <a:picLocks noChangeAspect="1"/>
-          </p:cNvPicPr>
-          <p:nvPr/>
-        </p:nvPicPr>
-        <p:blipFill>
-          <a:blip r:embed="rId3"/>
-          <a:stretch>
-            <a:fillRect/>
-          </a:stretch>
-        </p:blipFill>
-        <p:spPr>
-          <a:xfrm>
-            <a:off x="7031760" y="1143000"/>
-            <a:ext cx="4041240" cy="3565800"/>
-          </a:xfrm>
-          <a:prstGeom prst="rect">
-            <a:avLst/>
-          </a:prstGeom>
-        </p:spPr>
-      </p:pic>
-    </p:spTree>
-  </p:cSld>
-  <p:clrMapOvr>
-    <a:masterClrMapping/>
-  </p:clrMapOvr>
-</p:sld>
-</file>
-
-<file path=ppt/slides/slide21.xml><?xml version="1.0" encoding="utf-8"?>
 <p:sld xmlns:a="http://schemas.openxmlformats.org/drawingml/2006/main" xmlns:p="http://schemas.openxmlformats.org/presentationml/2006/main" xmlns:r="http://schemas.openxmlformats.org/officeDocument/2006/relationships" xmlns:p14="http://schemas.microsoft.com/office/powerpoint/2010/main" xmlns:p15="http://schemas.microsoft.com/office/powerpoint/2012/main" xmlns:mc="http://schemas.openxmlformats.org/markup-compatibility/2006">
   <p:cSld>
     <p:spTree>
@@ -5280,6 +5282,368 @@
       <p:transition spd="slow"/>
     </mc:Fallback>
   </mc:AlternateContent>
+</p:sld>
+</file>
+
+<file path=ppt/slides/slide21.xml><?xml version="1.0" encoding="utf-8"?>
+<p:sld xmlns:a="http://schemas.openxmlformats.org/drawingml/2006/main" xmlns:p="http://schemas.openxmlformats.org/presentationml/2006/main" xmlns:r="http://schemas.openxmlformats.org/officeDocument/2006/relationships">
+  <p:cSld>
+    <p:spTree>
+      <p:nvGrpSpPr>
+        <p:cNvPr id="1" name=""/>
+        <p:cNvGrpSpPr/>
+        <p:nvPr/>
+      </p:nvGrpSpPr>
+      <p:grpSpPr/>
+      <p:sp>
+        <p:nvSpPr>
+          <p:cNvPr id="2" name="TextBox 1"/>
+          <p:cNvSpPr txBox="1"/>
+          <p:nvPr/>
+        </p:nvSpPr>
+        <p:spPr>
+          <a:xfrm>
+            <a:off x="457200" y="228600"/>
+            <a:ext cx="11246760" cy="486360"/>
+          </a:xfrm>
+          <a:prstGeom prst="rect">
+            <a:avLst/>
+          </a:prstGeom>
+          <a:noFill/>
+        </p:spPr>
+        <p:txBody>
+          <a:bodyPr wrap="square">
+            <a:spAutoFit/>
+          </a:bodyPr>
+          <a:lstStyle/>
+          <a:p>
+            <a:r>
+              <a:rPr sz="2400" b="1">
+                <a:solidFill>
+                  <a:srgbClr val="1A1A2E"/>
+                </a:solidFill>
+                <a:latin typeface="Calibri"/>
+              </a:rPr>
+              <a:t>New ring-down measurements, both axes — the resonance behind the updated FEA comparison</a:t>
+            </a:r>
+          </a:p>
+        </p:txBody>
+      </p:sp>
+      <p:cxnSp>
+        <p:nvCxnSpPr>
+          <p:cNvPr id="3" name="Connector 2"/>
+          <p:cNvCxnSpPr/>
+          <p:nvPr/>
+        </p:nvCxnSpPr>
+        <p:spPr>
+          <a:xfrm>
+            <a:off x="457200" y="960120"/>
+            <a:ext cx="11247120" cy="0"/>
+          </a:xfrm>
+          <a:prstGeom prst="line">
+            <a:avLst/>
+          </a:prstGeom>
+          <a:ln w="19080">
+            <a:solidFill>
+              <a:srgbClr val="2E5C8A"/>
+            </a:solidFill>
+          </a:ln>
+        </p:spPr>
+        <p:style>
+          <a:lnRef idx="2">
+            <a:schemeClr val="accent1"/>
+          </a:lnRef>
+          <a:fillRef idx="0">
+            <a:schemeClr val="accent1"/>
+          </a:fillRef>
+          <a:effectRef idx="1">
+            <a:schemeClr val="accent1"/>
+          </a:effectRef>
+          <a:fontRef idx="minor">
+            <a:schemeClr val="tx1"/>
+          </a:fontRef>
+        </p:style>
+      </p:cxnSp>
+      <p:sp>
+        <p:nvSpPr>
+          <p:cNvPr id="4" name="TextBox 3"/>
+          <p:cNvSpPr txBox="1"/>
+          <p:nvPr/>
+        </p:nvSpPr>
+        <p:spPr>
+          <a:xfrm>
+            <a:off x="457200" y="1080000"/>
+            <a:ext cx="11246760" cy="500000"/>
+          </a:xfrm>
+          <a:prstGeom prst="rect">
+            <a:avLst/>
+          </a:prstGeom>
+          <a:noFill/>
+        </p:spPr>
+        <p:txBody>
+          <a:bodyPr wrap="square">
+            <a:spAutoFit/>
+          </a:bodyPr>
+          <a:lstStyle/>
+          <a:p>
+            <a:r>
+              <a:rPr sz="1250">
+                <a:solidFill>
+                  <a:srgbClr val="333333"/>
+                </a:solidFill>
+                <a:latin typeface="Calibri"/>
+              </a:rPr>
+              <a:t>Model-free peak-spacing estimate (dashed curve_fit overlay is unreliable — see annotation on each plot); tick-timestamped, same method as the original 38.5Hz measurement.</a:t>
+            </a:r>
+          </a:p>
+        </p:txBody>
+      </p:sp>
+      <p:pic>
+        <p:nvPicPr>
+          <p:cNvPr id="5" name="Picture 4" descr="fta_ringdown_xaxis_20260828T003210Z.png"/>
+          <p:cNvPicPr>
+            <a:picLocks noChangeAspect="1"/>
+          </p:cNvPicPr>
+          <p:nvPr/>
+        </p:nvPicPr>
+        <p:blipFill>
+          <a:blip r:embed="rId2"/>
+          <a:stretch>
+            <a:fillRect/>
+          </a:stretch>
+        </p:blipFill>
+        <p:spPr>
+          <a:xfrm>
+            <a:off x="457200" y="1650000"/>
+            <a:ext cx="3595587" cy="1618000"/>
+          </a:xfrm>
+          <a:prstGeom prst="rect">
+            <a:avLst/>
+          </a:prstGeom>
+        </p:spPr>
+      </p:pic>
+      <p:pic>
+        <p:nvPicPr>
+          <p:cNvPr id="6" name="Picture 5" descr="fta_ringdown_xaxis_20260828T003754Z.png"/>
+          <p:cNvPicPr>
+            <a:picLocks noChangeAspect="1"/>
+          </p:cNvPicPr>
+          <p:nvPr/>
+        </p:nvPicPr>
+        <p:blipFill>
+          <a:blip r:embed="rId3"/>
+          <a:stretch>
+            <a:fillRect/>
+          </a:stretch>
+        </p:blipFill>
+        <p:spPr>
+          <a:xfrm>
+            <a:off x="4282787" y="1650000"/>
+            <a:ext cx="3595587" cy="1618000"/>
+          </a:xfrm>
+          <a:prstGeom prst="rect">
+            <a:avLst/>
+          </a:prstGeom>
+        </p:spPr>
+      </p:pic>
+      <p:pic>
+        <p:nvPicPr>
+          <p:cNvPr id="7" name="Picture 6" descr="fta_ringdown_yaxis_20260828T003403Z_fixed.png"/>
+          <p:cNvPicPr>
+            <a:picLocks noChangeAspect="1"/>
+          </p:cNvPicPr>
+          <p:nvPr/>
+        </p:nvPicPr>
+        <p:blipFill>
+          <a:blip r:embed="rId4"/>
+          <a:stretch>
+            <a:fillRect/>
+          </a:stretch>
+        </p:blipFill>
+        <p:spPr>
+          <a:xfrm>
+            <a:off x="8108374" y="1650000"/>
+            <a:ext cx="3595587" cy="1618000"/>
+          </a:xfrm>
+          <a:prstGeom prst="rect">
+            <a:avLst/>
+          </a:prstGeom>
+        </p:spPr>
+      </p:pic>
+      <p:sp>
+        <p:nvSpPr>
+          <p:cNvPr id="8" name="Caption 1"/>
+          <p:cNvSpPr txBox="1"/>
+          <p:nvPr/>
+        </p:nvSpPr>
+        <p:spPr>
+          <a:xfrm>
+            <a:off x="457200" y="3330000"/>
+            <a:ext cx="3595587" cy="700000"/>
+          </a:xfrm>
+          <a:prstGeom prst="rect">
+            <a:avLst/>
+          </a:prstGeom>
+          <a:noFill/>
+        </p:spPr>
+        <p:txBody>
+          <a:bodyPr wrap="square">
+            <a:spAutoFit/>
+          </a:bodyPr>
+          <a:lstStyle/>
+          <a:p>
+            <a:r>
+              <a:rPr sz="1150" b="1">
+                <a:solidFill>
+                  <a:srgbClr val="333333"/>
+                </a:solidFill>
+                <a:latin typeface="Calibri"/>
+              </a:rPr>
+              <a:t>X-axis, trial 1: 47.3Hz</a:t>
+            </a:r>
+          </a:p>
+          <a:p>
+            <a:r>
+              <a:rPr sz="1050">
+                <a:solidFill>
+                  <a:srgbClr val="666666"/>
+                </a:solidFill>
+                <a:latin typeface="Calibri"/>
+              </a:rPr>
+              <a:t>dac_y→cx, primary axis</a:t>
+            </a:r>
+          </a:p>
+        </p:txBody>
+      </p:sp>
+      <p:sp>
+        <p:nvSpPr>
+          <p:cNvPr id="9" name="Caption 2"/>
+          <p:cNvSpPr txBox="1"/>
+          <p:nvPr/>
+        </p:nvSpPr>
+        <p:spPr>
+          <a:xfrm>
+            <a:off x="4282787" y="3330000"/>
+            <a:ext cx="3595587" cy="700000"/>
+          </a:xfrm>
+          <a:prstGeom prst="rect">
+            <a:avLst/>
+          </a:prstGeom>
+          <a:noFill/>
+        </p:spPr>
+        <p:txBody>
+          <a:bodyPr wrap="square">
+            <a:spAutoFit/>
+          </a:bodyPr>
+          <a:lstStyle/>
+          <a:p>
+            <a:r>
+              <a:rPr sz="1150" b="1">
+                <a:solidFill>
+                  <a:srgbClr val="333333"/>
+                </a:solidFill>
+                <a:latin typeface="Calibri"/>
+              </a:rPr>
+              <a:t>X-axis, trial 2 (immediate repeat): 47.0Hz</a:t>
+            </a:r>
+          </a:p>
+          <a:p>
+            <a:r>
+              <a:rPr sz="1050">
+                <a:solidFill>
+                  <a:srgbClr val="666666"/>
+                </a:solidFill>
+                <a:latin typeface="Calibri"/>
+              </a:rPr>
+              <a:t>dac_y→cx — tight agreement with trial 1</a:t>
+            </a:r>
+          </a:p>
+        </p:txBody>
+      </p:sp>
+      <p:sp>
+        <p:nvSpPr>
+          <p:cNvPr id="10" name="Caption 3"/>
+          <p:cNvSpPr txBox="1"/>
+          <p:nvPr/>
+        </p:nvSpPr>
+        <p:spPr>
+          <a:xfrm>
+            <a:off x="8108374" y="3330000"/>
+            <a:ext cx="3595587" cy="700000"/>
+          </a:xfrm>
+          <a:prstGeom prst="rect">
+            <a:avLst/>
+          </a:prstGeom>
+          <a:noFill/>
+        </p:spPr>
+        <p:txBody>
+          <a:bodyPr wrap="square">
+            <a:spAutoFit/>
+          </a:bodyPr>
+          <a:lstStyle/>
+          <a:p>
+            <a:r>
+              <a:rPr sz="1150" b="1">
+                <a:solidFill>
+                  <a:srgbClr val="333333"/>
+                </a:solidFill>
+                <a:latin typeface="Calibri"/>
+              </a:rPr>
+              <a:t>Y-axis, first-ever trial: 50.1Hz</a:t>
+            </a:r>
+          </a:p>
+          <a:p>
+            <a:r>
+              <a:rPr sz="1050">
+                <a:solidFill>
+                  <a:srgbClr val="666666"/>
+                </a:solidFill>
+                <a:latin typeface="Calibri"/>
+              </a:rPr>
+              <a:t>dac_x→cy — only one trial so far</a:t>
+            </a:r>
+          </a:p>
+        </p:txBody>
+      </p:sp>
+      <p:sp>
+        <p:nvSpPr>
+          <p:cNvPr id="11" name="Note"/>
+          <p:cNvSpPr txBox="1"/>
+          <p:nvPr/>
+        </p:nvSpPr>
+        <p:spPr>
+          <a:xfrm>
+            <a:off x="457200" y="4200000"/>
+            <a:ext cx="11246760" cy="700000"/>
+          </a:xfrm>
+          <a:prstGeom prst="rect">
+            <a:avLst/>
+          </a:prstGeom>
+          <a:noFill/>
+        </p:spPr>
+        <p:txBody>
+          <a:bodyPr wrap="square">
+            <a:spAutoFit/>
+          </a:bodyPr>
+          <a:lstStyle/>
+          <a:p>
+            <a:r>
+              <a:rPr sz="1150" i="1">
+                <a:solidFill>
+                  <a:srgbClr val="555555"/>
+                </a:solidFill>
+                <a:latin typeface="Calibri"/>
+              </a:rPr>
+              <a:t>Both axes land close to each other and notably not close to the previously-documented 38.5Hz. Same trustworthy tick-timestamped peak-spacing method as the original measurement, so this reads as a real, reproducible shift in the physical resonance since then — see next slide for the updated FEA comparison.</a:t>
+            </a:r>
+          </a:p>
+        </p:txBody>
+      </p:sp>
+    </p:spTree>
+  </p:cSld>
+  <p:clrMapOvr>
+    <a:masterClrMapping/>
+  </p:clrMapOvr>
 </p:sld>
 </file>
 
@@ -6239,7 +6603,7 @@
         <p:spPr>
           <a:xfrm>
             <a:off x="457200" y="228600"/>
-            <a:ext cx="11246760" cy="486360"/>
+            <a:ext cx="11246760" cy="640000"/>
           </a:xfrm>
           <a:prstGeom prst="rect">
             <a:avLst/>
@@ -6259,7 +6623,7 @@
                 </a:solidFill>
                 <a:latin typeface="Calibri"/>
               </a:rPr>
-              <a:t>New ring-down measurements, both axes — the resonance behind the updated FEA comparison</a:t>
+              <a:t>I2C link + PID completion: essentially lossless end to end</a:t>
             </a:r>
           </a:p>
         </p:txBody>
@@ -6307,8 +6671,8 @@
         </p:nvSpPr>
         <p:spPr>
           <a:xfrm>
-            <a:off x="457200" y="1080000"/>
-            <a:ext cx="11246760" cy="500000"/>
+            <a:off x="457200" y="1180000"/>
+            <a:ext cx="5450000" cy="4400000"/>
           </a:xfrm>
           <a:prstGeom prst="rect">
             <a:avLst/>
@@ -6321,6 +6685,11 @@
           </a:bodyPr>
           <a:lstStyle/>
           <a:p>
+            <a:pPr>
+              <a:spcAft>
+                <a:spcPts val="900"/>
+              </a:spcAft>
+            </a:pPr>
             <a:r>
               <a:rPr sz="1250">
                 <a:solidFill>
@@ -6328,14 +6697,790 @@
                 </a:solidFill>
                 <a:latin typeface="Calibri"/>
               </a:rPr>
-              <a:t>Model-free peak-spacing estimate (dashed curve_fit overlay is unreliable — see annotation on each plot); tick-timestamped, same method as the original 38.5Hz measurement.</a:t>
+              <a:t>• </a:t>
+            </a:r>
+            <a:r>
+              <a:rPr sz="1250">
+                <a:solidFill>
+                  <a:srgbClr val="333333"/>
+                </a:solidFill>
+                <a:latin typeface="Calibri"/>
+              </a:rPr>
+              <a:t>Link completeness (Pi send → Nucleo I2C reception): the Pi's own capture-enumerated seq counter (increments once per camera frame, before detection/send outcome is known) unwrapped and compared against the Nucleo's ISR-level pkts+errs counters — real ground truth on both ends, immune to the separately-known ~4-8% VCP relay line loss (that only affects host-side observability, not the real link).</a:t>
+            </a:r>
+          </a:p>
+          <a:p>
+            <a:pPr>
+              <a:spcAft>
+                <a:spcPts val="900"/>
+              </a:spcAft>
+            </a:pPr>
+            <a:r>
+              <a:rPr sz="1250">
+                <a:solidFill>
+                  <a:srgbClr val="333333"/>
+                </a:solidFill>
+                <a:latin typeface="Calibri"/>
+              </a:rPr>
+              <a:t>• </a:t>
+            </a:r>
+            <a:r>
+              <a:rPr sz="1250">
+                <a:solidFill>
+                  <a:srgbClr val="333333"/>
+                </a:solidFill>
+                <a:latin typeface="Calibri"/>
+              </a:rPr>
+              <a:t>Confident packet → completed PID loop: measured via two new firmware counters (confident_pkts=, cseq=). 99.97% (6423/6425) across 3 trials — the single-slot g_latest_beam "mailbox" can in principle drop a packet if two I2C receptions land in the same critical section; measured rate is ~1 in 3200, not a meaningful limiter.</a:t>
+            </a:r>
+          </a:p>
+          <a:p>
+            <a:pPr>
+              <a:spcAft>
+                <a:spcPts val="900"/>
+              </a:spcAft>
+            </a:pPr>
+            <a:r>
+              <a:rPr sz="1250">
+                <a:solidFill>
+                  <a:srgbClr val="333333"/>
+                </a:solidFill>
+                <a:latin typeface="Calibri"/>
+              </a:rPr>
+              <a:t>• </a:t>
+            </a:r>
+            <a:r>
+              <a:rPr sz="1250">
+                <a:solidFill>
+                  <a:srgbClr val="333333"/>
+                </a:solidFill>
+                <a:latin typeface="Calibri"/>
+              </a:rPr>
+              <a:t>Not measured: whether the camera driver itself (Picamera2/libcamera) drops frames before Python's capture_array() call returns them — a different, deeper layer than anything checked here.</a:t>
+            </a:r>
+          </a:p>
+        </p:txBody>
+      </p:sp>
+      <p:graphicFrame>
+        <p:nvGraphicFramePr>
+          <p:cNvPr id="5" name="Table 4"/>
+          <p:cNvGraphicFramePr>
+            <a:graphicFrameLocks noGrp="1"/>
+          </p:cNvGraphicFramePr>
+          <p:nvPr/>
+        </p:nvGraphicFramePr>
+        <p:xfrm>
+          <a:off x="6350000" y="1550000"/>
+          <a:ext cx="5250000" cy="2200000"/>
+        </p:xfrm>
+        <a:graphic>
+          <a:graphicData uri="http://schemas.openxmlformats.org/drawingml/2006/table">
+            <a:tbl>
+              <a:tblPr firstRow="1" bandRow="1">
+                <a:tableStyleId>{5C22544A-7EE6-4342-B048-85BDC9FD1C3A}</a:tableStyleId>
+              </a:tblPr>
+              <a:tblGrid>
+                <a:gridCol w="1100000"/>
+                <a:gridCol w="1500000"/>
+                <a:gridCol w="1900000"/>
+                <a:gridCol w="750000"/>
+              </a:tblGrid>
+              <a:tr h="440000">
+                <a:tc>
+                  <a:txBody>
+                    <a:bodyPr/>
+                    <a:lstStyle/>
+                    <a:p>
+                      <a:pPr algn="ctr"/>
+                      <a:r>
+                        <a:rPr sz="1250" b="1">
+                          <a:solidFill>
+                            <a:srgbClr val="FFFFFF"/>
+                          </a:solidFill>
+                          <a:latin typeface="Calibri"/>
+                        </a:rPr>
+                        <a:t>Trial</a:t>
+                      </a:r>
+                    </a:p>
+                  </a:txBody>
+                  <a:tcPr anchor="ctr">
+                    <a:solidFill>
+                      <a:srgbClr val="2E5C8A"/>
+                    </a:solidFill>
+                  </a:tcPr>
+                </a:tc>
+                <a:tc>
+                  <a:txBody>
+                    <a:bodyPr/>
+                    <a:lstStyle/>
+                    <a:p>
+                      <a:pPr algn="ctr"/>
+                      <a:r>
+                        <a:rPr sz="1250" b="1">
+                          <a:solidFill>
+                            <a:srgbClr val="FFFFFF"/>
+                          </a:solidFill>
+                          <a:latin typeface="Calibri"/>
+                        </a:rPr>
+                        <a:t>Pi sends (seq)</a:t>
+                      </a:r>
+                    </a:p>
+                  </a:txBody>
+                  <a:tcPr anchor="ctr">
+                    <a:solidFill>
+                      <a:srgbClr val="2E5C8A"/>
+                    </a:solidFill>
+                  </a:tcPr>
+                </a:tc>
+                <a:tc>
+                  <a:txBody>
+                    <a:bodyPr/>
+                    <a:lstStyle/>
+                    <a:p>
+                      <a:pPr algn="ctr"/>
+                      <a:r>
+                        <a:rPr sz="1250" b="1">
+                          <a:solidFill>
+                            <a:srgbClr val="FFFFFF"/>
+                          </a:solidFill>
+                          <a:latin typeface="Calibri"/>
+                        </a:rPr>
+                        <a:t>Nucleo registered</a:t>
+                      </a:r>
+                    </a:p>
+                  </a:txBody>
+                  <a:tcPr anchor="ctr">
+                    <a:solidFill>
+                      <a:srgbClr val="2E5C8A"/>
+                    </a:solidFill>
+                  </a:tcPr>
+                </a:tc>
+                <a:tc>
+                  <a:txBody>
+                    <a:bodyPr/>
+                    <a:lstStyle/>
+                    <a:p>
+                      <a:pPr algn="ctr"/>
+                      <a:r>
+                        <a:rPr sz="1250" b="1">
+                          <a:solidFill>
+                            <a:srgbClr val="FFFFFF"/>
+                          </a:solidFill>
+                          <a:latin typeface="Calibri"/>
+                        </a:rPr>
+                        <a:t>Lost</a:t>
+                      </a:r>
+                    </a:p>
+                  </a:txBody>
+                  <a:tcPr anchor="ctr">
+                    <a:solidFill>
+                      <a:srgbClr val="2E5C8A"/>
+                    </a:solidFill>
+                  </a:tcPr>
+                </a:tc>
+              </a:tr>
+              <a:tr h="440000">
+                <a:tc>
+                  <a:txBody>
+                    <a:bodyPr/>
+                    <a:lstStyle/>
+                    <a:p>
+                      <a:pPr algn="ctr"/>
+                      <a:r>
+                        <a:rPr sz="1250">
+                          <a:solidFill>
+                            <a:srgbClr val="333333"/>
+                          </a:solidFill>
+                          <a:latin typeface="Calibri"/>
+                        </a:rPr>
+                        <a:t>1</a:t>
+                      </a:r>
+                    </a:p>
+                  </a:txBody>
+                  <a:tcPr anchor="ctr">
+                    <a:solidFill>
+                      <a:srgbClr val="FFFFFF"/>
+                    </a:solidFill>
+                  </a:tcPr>
+                </a:tc>
+                <a:tc>
+                  <a:txBody>
+                    <a:bodyPr/>
+                    <a:lstStyle/>
+                    <a:p>
+                      <a:pPr algn="ctr"/>
+                      <a:r>
+                        <a:rPr sz="1250">
+                          <a:solidFill>
+                            <a:srgbClr val="333333"/>
+                          </a:solidFill>
+                          <a:latin typeface="Calibri"/>
+                        </a:rPr>
+                        <a:t>3610</a:t>
+                      </a:r>
+                    </a:p>
+                  </a:txBody>
+                  <a:tcPr anchor="ctr">
+                    <a:solidFill>
+                      <a:srgbClr val="FFFFFF"/>
+                    </a:solidFill>
+                  </a:tcPr>
+                </a:tc>
+                <a:tc>
+                  <a:txBody>
+                    <a:bodyPr/>
+                    <a:lstStyle/>
+                    <a:p>
+                      <a:pPr algn="ctr"/>
+                      <a:r>
+                        <a:rPr sz="1250">
+                          <a:solidFill>
+                            <a:srgbClr val="333333"/>
+                          </a:solidFill>
+                          <a:latin typeface="Calibri"/>
+                        </a:rPr>
+                        <a:t>3610</a:t>
+                      </a:r>
+                    </a:p>
+                  </a:txBody>
+                  <a:tcPr anchor="ctr">
+                    <a:solidFill>
+                      <a:srgbClr val="FFFFFF"/>
+                    </a:solidFill>
+                  </a:tcPr>
+                </a:tc>
+                <a:tc>
+                  <a:txBody>
+                    <a:bodyPr/>
+                    <a:lstStyle/>
+                    <a:p>
+                      <a:pPr algn="ctr"/>
+                      <a:r>
+                        <a:rPr sz="1250">
+                          <a:solidFill>
+                            <a:srgbClr val="333333"/>
+                          </a:solidFill>
+                          <a:latin typeface="Calibri"/>
+                        </a:rPr>
+                        <a:t>0</a:t>
+                      </a:r>
+                    </a:p>
+                  </a:txBody>
+                  <a:tcPr anchor="ctr">
+                    <a:solidFill>
+                      <a:srgbClr val="FFFFFF"/>
+                    </a:solidFill>
+                  </a:tcPr>
+                </a:tc>
+              </a:tr>
+              <a:tr h="440000">
+                <a:tc>
+                  <a:txBody>
+                    <a:bodyPr/>
+                    <a:lstStyle/>
+                    <a:p>
+                      <a:pPr algn="ctr"/>
+                      <a:r>
+                        <a:rPr sz="1250">
+                          <a:solidFill>
+                            <a:srgbClr val="333333"/>
+                          </a:solidFill>
+                          <a:latin typeface="Calibri"/>
+                        </a:rPr>
+                        <a:t>2</a:t>
+                      </a:r>
+                    </a:p>
+                  </a:txBody>
+                  <a:tcPr anchor="ctr">
+                    <a:solidFill>
+                      <a:srgbClr val="F2F4F7"/>
+                    </a:solidFill>
+                  </a:tcPr>
+                </a:tc>
+                <a:tc>
+                  <a:txBody>
+                    <a:bodyPr/>
+                    <a:lstStyle/>
+                    <a:p>
+                      <a:pPr algn="ctr"/>
+                      <a:r>
+                        <a:rPr sz="1250">
+                          <a:solidFill>
+                            <a:srgbClr val="333333"/>
+                          </a:solidFill>
+                          <a:latin typeface="Calibri"/>
+                        </a:rPr>
+                        <a:t>3672</a:t>
+                      </a:r>
+                    </a:p>
+                  </a:txBody>
+                  <a:tcPr anchor="ctr">
+                    <a:solidFill>
+                      <a:srgbClr val="F2F4F7"/>
+                    </a:solidFill>
+                  </a:tcPr>
+                </a:tc>
+                <a:tc>
+                  <a:txBody>
+                    <a:bodyPr/>
+                    <a:lstStyle/>
+                    <a:p>
+                      <a:pPr algn="ctr"/>
+                      <a:r>
+                        <a:rPr sz="1250">
+                          <a:solidFill>
+                            <a:srgbClr val="333333"/>
+                          </a:solidFill>
+                          <a:latin typeface="Calibri"/>
+                        </a:rPr>
+                        <a:t>3672</a:t>
+                      </a:r>
+                    </a:p>
+                  </a:txBody>
+                  <a:tcPr anchor="ctr">
+                    <a:solidFill>
+                      <a:srgbClr val="F2F4F7"/>
+                    </a:solidFill>
+                  </a:tcPr>
+                </a:tc>
+                <a:tc>
+                  <a:txBody>
+                    <a:bodyPr/>
+                    <a:lstStyle/>
+                    <a:p>
+                      <a:pPr algn="ctr"/>
+                      <a:r>
+                        <a:rPr sz="1250">
+                          <a:solidFill>
+                            <a:srgbClr val="333333"/>
+                          </a:solidFill>
+                          <a:latin typeface="Calibri"/>
+                        </a:rPr>
+                        <a:t>0</a:t>
+                      </a:r>
+                    </a:p>
+                  </a:txBody>
+                  <a:tcPr anchor="ctr">
+                    <a:solidFill>
+                      <a:srgbClr val="F2F4F7"/>
+                    </a:solidFill>
+                  </a:tcPr>
+                </a:tc>
+              </a:tr>
+              <a:tr h="440000">
+                <a:tc>
+                  <a:txBody>
+                    <a:bodyPr/>
+                    <a:lstStyle/>
+                    <a:p>
+                      <a:pPr algn="ctr"/>
+                      <a:r>
+                        <a:rPr sz="1250">
+                          <a:solidFill>
+                            <a:srgbClr val="333333"/>
+                          </a:solidFill>
+                          <a:latin typeface="Calibri"/>
+                        </a:rPr>
+                        <a:t>3</a:t>
+                      </a:r>
+                    </a:p>
+                  </a:txBody>
+                  <a:tcPr anchor="ctr">
+                    <a:solidFill>
+                      <a:srgbClr val="FFFFFF"/>
+                    </a:solidFill>
+                  </a:tcPr>
+                </a:tc>
+                <a:tc>
+                  <a:txBody>
+                    <a:bodyPr/>
+                    <a:lstStyle/>
+                    <a:p>
+                      <a:pPr algn="ctr"/>
+                      <a:r>
+                        <a:rPr sz="1250">
+                          <a:solidFill>
+                            <a:srgbClr val="333333"/>
+                          </a:solidFill>
+                          <a:latin typeface="Calibri"/>
+                        </a:rPr>
+                        <a:t>3591</a:t>
+                      </a:r>
+                    </a:p>
+                  </a:txBody>
+                  <a:tcPr anchor="ctr">
+                    <a:solidFill>
+                      <a:srgbClr val="FFFFFF"/>
+                    </a:solidFill>
+                  </a:tcPr>
+                </a:tc>
+                <a:tc>
+                  <a:txBody>
+                    <a:bodyPr/>
+                    <a:lstStyle/>
+                    <a:p>
+                      <a:pPr algn="ctr"/>
+                      <a:r>
+                        <a:rPr sz="1250">
+                          <a:solidFill>
+                            <a:srgbClr val="333333"/>
+                          </a:solidFill>
+                          <a:latin typeface="Calibri"/>
+                        </a:rPr>
+                        <a:t>3591</a:t>
+                      </a:r>
+                    </a:p>
+                  </a:txBody>
+                  <a:tcPr anchor="ctr">
+                    <a:solidFill>
+                      <a:srgbClr val="FFFFFF"/>
+                    </a:solidFill>
+                  </a:tcPr>
+                </a:tc>
+                <a:tc>
+                  <a:txBody>
+                    <a:bodyPr/>
+                    <a:lstStyle/>
+                    <a:p>
+                      <a:pPr algn="ctr"/>
+                      <a:r>
+                        <a:rPr sz="1250">
+                          <a:solidFill>
+                            <a:srgbClr val="333333"/>
+                          </a:solidFill>
+                          <a:latin typeface="Calibri"/>
+                        </a:rPr>
+                        <a:t>0</a:t>
+                      </a:r>
+                    </a:p>
+                  </a:txBody>
+                  <a:tcPr anchor="ctr">
+                    <a:solidFill>
+                      <a:srgbClr val="FFFFFF"/>
+                    </a:solidFill>
+                  </a:tcPr>
+                </a:tc>
+              </a:tr>
+              <a:tr h="440000">
+                <a:tc>
+                  <a:txBody>
+                    <a:bodyPr/>
+                    <a:lstStyle/>
+                    <a:p>
+                      <a:pPr algn="ctr"/>
+                      <a:r>
+                        <a:rPr sz="1250">
+                          <a:solidFill>
+                            <a:srgbClr val="333333"/>
+                          </a:solidFill>
+                          <a:latin typeface="Calibri"/>
+                        </a:rPr>
+                        <a:t>Total</a:t>
+                      </a:r>
+                    </a:p>
+                  </a:txBody>
+                  <a:tcPr anchor="ctr">
+                    <a:solidFill>
+                      <a:srgbClr val="F2F4F7"/>
+                    </a:solidFill>
+                  </a:tcPr>
+                </a:tc>
+                <a:tc>
+                  <a:txBody>
+                    <a:bodyPr/>
+                    <a:lstStyle/>
+                    <a:p>
+                      <a:pPr algn="ctr"/>
+                      <a:r>
+                        <a:rPr sz="1250">
+                          <a:solidFill>
+                            <a:srgbClr val="333333"/>
+                          </a:solidFill>
+                          <a:latin typeface="Calibri"/>
+                        </a:rPr>
+                        <a:t>10873</a:t>
+                      </a:r>
+                    </a:p>
+                  </a:txBody>
+                  <a:tcPr anchor="ctr">
+                    <a:solidFill>
+                      <a:srgbClr val="F2F4F7"/>
+                    </a:solidFill>
+                  </a:tcPr>
+                </a:tc>
+                <a:tc>
+                  <a:txBody>
+                    <a:bodyPr/>
+                    <a:lstStyle/>
+                    <a:p>
+                      <a:pPr algn="ctr"/>
+                      <a:r>
+                        <a:rPr sz="1250">
+                          <a:solidFill>
+                            <a:srgbClr val="333333"/>
+                          </a:solidFill>
+                          <a:latin typeface="Calibri"/>
+                        </a:rPr>
+                        <a:t>10873</a:t>
+                      </a:r>
+                    </a:p>
+                  </a:txBody>
+                  <a:tcPr anchor="ctr">
+                    <a:solidFill>
+                      <a:srgbClr val="F2F4F7"/>
+                    </a:solidFill>
+                  </a:tcPr>
+                </a:tc>
+                <a:tc>
+                  <a:txBody>
+                    <a:bodyPr/>
+                    <a:lstStyle/>
+                    <a:p>
+                      <a:pPr algn="ctr"/>
+                      <a:r>
+                        <a:rPr sz="1250">
+                          <a:solidFill>
+                            <a:srgbClr val="333333"/>
+                          </a:solidFill>
+                          <a:latin typeface="Calibri"/>
+                        </a:rPr>
+                        <a:t>0</a:t>
+                      </a:r>
+                    </a:p>
+                  </a:txBody>
+                  <a:tcPr anchor="ctr">
+                    <a:solidFill>
+                      <a:srgbClr val="F2F4F7"/>
+                    </a:solidFill>
+                  </a:tcPr>
+                </a:tc>
+              </a:tr>
+            </a:tbl>
+          </a:graphicData>
+        </a:graphic>
+      </p:graphicFrame>
+      <p:sp>
+        <p:nvSpPr>
+          <p:cNvPr id="6" name="TextBox 5"/>
+          <p:cNvSpPr txBox="1"/>
+          <p:nvPr/>
+        </p:nvSpPr>
+        <p:spPr>
+          <a:xfrm>
+            <a:off x="6350000" y="3850000"/>
+            <a:ext cx="5250000" cy="600000"/>
+          </a:xfrm>
+          <a:prstGeom prst="rect">
+            <a:avLst/>
+          </a:prstGeom>
+          <a:noFill/>
+        </p:spPr>
+        <p:txBody>
+          <a:bodyPr wrap="square">
+            <a:spAutoFit/>
+          </a:bodyPr>
+          <a:lstStyle/>
+          <a:p>
+            <a:r>
+              <a:rPr sz="1050" i="1">
+                <a:solidFill>
+                  <a:srgbClr val="898781"/>
+                </a:solidFill>
+                <a:latin typeface="Calibri"/>
+              </a:rPr>
+              <a:t>0 lost across all 3 trials, ~10,873 real sends -- 8s windows, open_loop/amp off, link-only check</a:t>
+            </a:r>
+          </a:p>
+        </p:txBody>
+      </p:sp>
+    </p:spTree>
+  </p:cSld>
+  <p:clrMapOvr>
+    <a:masterClrMapping/>
+  </p:clrMapOvr>
+</p:sld>
+</file>
+
+<file path=ppt/slides/slide25.xml><?xml version="1.0" encoding="utf-8"?>
+<p:sld xmlns:a="http://schemas.openxmlformats.org/drawingml/2006/main" xmlns:p="http://schemas.openxmlformats.org/presentationml/2006/main" xmlns:r="http://schemas.openxmlformats.org/officeDocument/2006/relationships">
+  <p:cSld>
+    <p:spTree>
+      <p:nvGrpSpPr>
+        <p:cNvPr id="1" name=""/>
+        <p:cNvGrpSpPr/>
+        <p:nvPr/>
+      </p:nvGrpSpPr>
+      <p:grpSpPr/>
+      <p:sp>
+        <p:nvSpPr>
+          <p:cNvPr id="2" name="TextBox 1"/>
+          <p:cNvSpPr txBox="1"/>
+          <p:nvPr/>
+        </p:nvSpPr>
+        <p:spPr>
+          <a:xfrm>
+            <a:off x="457200" y="228600"/>
+            <a:ext cx="11246760" cy="640000"/>
+          </a:xfrm>
+          <a:prstGeom prst="rect">
+            <a:avLst/>
+          </a:prstGeom>
+          <a:noFill/>
+        </p:spPr>
+        <p:txBody>
+          <a:bodyPr wrap="square">
+            <a:spAutoFit/>
+          </a:bodyPr>
+          <a:lstStyle/>
+          <a:p>
+            <a:r>
+              <a:rPr sz="2400" b="1">
+                <a:solidFill>
+                  <a:srgbClr val="1A1A2E"/>
+                </a:solidFill>
+                <a:latin typeface="Calibri"/>
+              </a:rPr>
+              <a:t>Real control-step timing jitter (current config)</a:t>
+            </a:r>
+          </a:p>
+        </p:txBody>
+      </p:sp>
+      <p:cxnSp>
+        <p:nvCxnSpPr>
+          <p:cNvPr id="3" name="Connector 2"/>
+          <p:cNvCxnSpPr/>
+          <p:nvPr/>
+        </p:nvCxnSpPr>
+        <p:spPr>
+          <a:xfrm>
+            <a:off x="457200" y="960120"/>
+            <a:ext cx="11247120" cy="0"/>
+          </a:xfrm>
+          <a:prstGeom prst="line">
+            <a:avLst/>
+          </a:prstGeom>
+          <a:ln w="19080">
+            <a:solidFill>
+              <a:srgbClr val="2E5C8A"/>
+            </a:solidFill>
+          </a:ln>
+        </p:spPr>
+        <p:style>
+          <a:lnRef idx="2">
+            <a:schemeClr val="accent1"/>
+          </a:lnRef>
+          <a:fillRef idx="0">
+            <a:schemeClr val="accent1"/>
+          </a:fillRef>
+          <a:effectRef idx="1">
+            <a:schemeClr val="accent1"/>
+          </a:effectRef>
+          <a:fontRef idx="minor">
+            <a:schemeClr val="tx1"/>
+          </a:fontRef>
+        </p:style>
+      </p:cxnSp>
+      <p:sp>
+        <p:nvSpPr>
+          <p:cNvPr id="4" name="TextBox 3"/>
+          <p:cNvSpPr txBox="1"/>
+          <p:nvPr/>
+        </p:nvSpPr>
+        <p:spPr>
+          <a:xfrm>
+            <a:off x="457200" y="1120000"/>
+            <a:ext cx="11246760" cy="1750000"/>
+          </a:xfrm>
+          <a:prstGeom prst="rect">
+            <a:avLst/>
+          </a:prstGeom>
+          <a:noFill/>
+        </p:spPr>
+        <p:txBody>
+          <a:bodyPr wrap="square">
+            <a:spAutoFit/>
+          </a:bodyPr>
+          <a:lstStyle/>
+          <a:p>
+            <a:pPr>
+              <a:spcAft>
+                <a:spcPts val="900"/>
+              </a:spcAft>
+            </a:pPr>
+            <a:r>
+              <a:rPr sz="1250">
+                <a:solidFill>
+                  <a:srgbClr val="333333"/>
+                </a:solidFill>
+                <a:latin typeface="Calibri"/>
+              </a:rPr>
+              <a:t>• </a:t>
+            </a:r>
+            <a:r>
+              <a:rPr sz="1250">
+                <a:solidFill>
+                  <a:srgbClr val="333333"/>
+                </a:solidFill>
+                <a:latin typeface="Calibri"/>
+              </a:rPr>
+              <a:t>Measured via the g_ctrl_step_seq counter (cseq=) -- real per-firing intervals from consecutive firmware tick= deltas, NOT the earlier dac_y-value-change proxy (which silently undercounts near settled periods and produced unusable jitter numbers, see prior entry).</a:t>
+            </a:r>
+          </a:p>
+          <a:p>
+            <a:pPr>
+              <a:spcAft>
+                <a:spcPts val="900"/>
+              </a:spcAft>
+            </a:pPr>
+            <a:r>
+              <a:rPr sz="1250">
+                <a:solidFill>
+                  <a:srgbClr val="333333"/>
+                </a:solidFill>
+                <a:latin typeface="Calibri"/>
+              </a:rPr>
+              <a:t>• </a:t>
+            </a:r>
+            <a:r>
+              <a:rPr sz="1250">
+                <a:solidFill>
+                  <a:srgbClr val="333333"/>
+                </a:solidFill>
+                <a:latin typeface="Calibri"/>
+              </a:rPr>
+              <a:t>Kp=1.75/Ki=15, axis2 on, unthrottled, 3 trials pooled: dominant cluster n=6250, mean=2.17ms, std=0.86ms, CV=39.6% — a real, honest consistency number, not the 88-127% chaos the old method gave.</a:t>
+            </a:r>
+          </a:p>
+          <a:p>
+            <a:pPr>
+              <a:spcAft>
+                <a:spcPts val="900"/>
+              </a:spcAft>
+            </a:pPr>
+            <a:r>
+              <a:rPr sz="1250">
+                <a:solidFill>
+                  <a:srgbClr val="333333"/>
+                </a:solidFill>
+                <a:latin typeface="Calibri"/>
+              </a:rPr>
+              <a:t>• </a:t>
+            </a:r>
+            <a:r>
+              <a:rPr sz="1250">
+                <a:solidFill>
+                  <a:srgbClr val="333333"/>
+                </a:solidFill>
+                <a:latin typeface="Calibri"/>
+              </a:rPr>
+              <a:t>One 174ms outlier (1 of 6251, 0.016%) excluded from the CV above and shown separately — cseq only increments on a confident detection, so this most likely reflects a brief real detection dropout, not a comms/firmware stall.</a:t>
             </a:r>
           </a:p>
         </p:txBody>
       </p:sp>
       <p:pic>
         <p:nvPicPr>
-          <p:cNvPr id="5" name="Picture 4" descr="fta_ringdown_xaxis_20260828T003210Z.png"/>
+          <p:cNvPr id="5" name="Picture 4" descr="fta_baseline_jitter_histogram.png"/>
           <p:cNvPicPr>
             <a:picLocks noChangeAspect="1"/>
           </p:cNvPicPr>
@@ -6349,231 +7494,14 @@
         </p:blipFill>
         <p:spPr>
           <a:xfrm>
-            <a:off x="457200" y="1650000"/>
-            <a:ext cx="3595587" cy="1618000"/>
+            <a:off x="3081000" y="3050000"/>
+            <a:ext cx="6030000" cy="3350000"/>
           </a:xfrm>
           <a:prstGeom prst="rect">
             <a:avLst/>
           </a:prstGeom>
         </p:spPr>
       </p:pic>
-      <p:pic>
-        <p:nvPicPr>
-          <p:cNvPr id="6" name="Picture 5" descr="fta_ringdown_xaxis_20260828T003754Z.png"/>
-          <p:cNvPicPr>
-            <a:picLocks noChangeAspect="1"/>
-          </p:cNvPicPr>
-          <p:nvPr/>
-        </p:nvPicPr>
-        <p:blipFill>
-          <a:blip r:embed="rId3"/>
-          <a:stretch>
-            <a:fillRect/>
-          </a:stretch>
-        </p:blipFill>
-        <p:spPr>
-          <a:xfrm>
-            <a:off x="4282787" y="1650000"/>
-            <a:ext cx="3595587" cy="1618000"/>
-          </a:xfrm>
-          <a:prstGeom prst="rect">
-            <a:avLst/>
-          </a:prstGeom>
-        </p:spPr>
-      </p:pic>
-      <p:pic>
-        <p:nvPicPr>
-          <p:cNvPr id="7" name="Picture 6" descr="fta_ringdown_yaxis_20260828T003403Z_fixed.png"/>
-          <p:cNvPicPr>
-            <a:picLocks noChangeAspect="1"/>
-          </p:cNvPicPr>
-          <p:nvPr/>
-        </p:nvPicPr>
-        <p:blipFill>
-          <a:blip r:embed="rId4"/>
-          <a:stretch>
-            <a:fillRect/>
-          </a:stretch>
-        </p:blipFill>
-        <p:spPr>
-          <a:xfrm>
-            <a:off x="8108374" y="1650000"/>
-            <a:ext cx="3595587" cy="1618000"/>
-          </a:xfrm>
-          <a:prstGeom prst="rect">
-            <a:avLst/>
-          </a:prstGeom>
-        </p:spPr>
-      </p:pic>
-      <p:sp>
-        <p:nvSpPr>
-          <p:cNvPr id="8" name="Caption 1"/>
-          <p:cNvSpPr txBox="1"/>
-          <p:nvPr/>
-        </p:nvSpPr>
-        <p:spPr>
-          <a:xfrm>
-            <a:off x="457200" y="3330000"/>
-            <a:ext cx="3595587" cy="700000"/>
-          </a:xfrm>
-          <a:prstGeom prst="rect">
-            <a:avLst/>
-          </a:prstGeom>
-          <a:noFill/>
-        </p:spPr>
-        <p:txBody>
-          <a:bodyPr wrap="square">
-            <a:spAutoFit/>
-          </a:bodyPr>
-          <a:lstStyle/>
-          <a:p>
-            <a:r>
-              <a:rPr sz="1150" b="1">
-                <a:solidFill>
-                  <a:srgbClr val="333333"/>
-                </a:solidFill>
-                <a:latin typeface="Calibri"/>
-              </a:rPr>
-              <a:t>X-axis, trial 1: 47.3Hz</a:t>
-            </a:r>
-          </a:p>
-          <a:p>
-            <a:r>
-              <a:rPr sz="1050">
-                <a:solidFill>
-                  <a:srgbClr val="666666"/>
-                </a:solidFill>
-                <a:latin typeface="Calibri"/>
-              </a:rPr>
-              <a:t>dac_y→cx, primary axis</a:t>
-            </a:r>
-          </a:p>
-        </p:txBody>
-      </p:sp>
-      <p:sp>
-        <p:nvSpPr>
-          <p:cNvPr id="9" name="Caption 2"/>
-          <p:cNvSpPr txBox="1"/>
-          <p:nvPr/>
-        </p:nvSpPr>
-        <p:spPr>
-          <a:xfrm>
-            <a:off x="4282787" y="3330000"/>
-            <a:ext cx="3595587" cy="700000"/>
-          </a:xfrm>
-          <a:prstGeom prst="rect">
-            <a:avLst/>
-          </a:prstGeom>
-          <a:noFill/>
-        </p:spPr>
-        <p:txBody>
-          <a:bodyPr wrap="square">
-            <a:spAutoFit/>
-          </a:bodyPr>
-          <a:lstStyle/>
-          <a:p>
-            <a:r>
-              <a:rPr sz="1150" b="1">
-                <a:solidFill>
-                  <a:srgbClr val="333333"/>
-                </a:solidFill>
-                <a:latin typeface="Calibri"/>
-              </a:rPr>
-              <a:t>X-axis, trial 2 (immediate repeat): 47.0Hz</a:t>
-            </a:r>
-          </a:p>
-          <a:p>
-            <a:r>
-              <a:rPr sz="1050">
-                <a:solidFill>
-                  <a:srgbClr val="666666"/>
-                </a:solidFill>
-                <a:latin typeface="Calibri"/>
-              </a:rPr>
-              <a:t>dac_y→cx — tight agreement with trial 1</a:t>
-            </a:r>
-          </a:p>
-        </p:txBody>
-      </p:sp>
-      <p:sp>
-        <p:nvSpPr>
-          <p:cNvPr id="10" name="Caption 3"/>
-          <p:cNvSpPr txBox="1"/>
-          <p:nvPr/>
-        </p:nvSpPr>
-        <p:spPr>
-          <a:xfrm>
-            <a:off x="8108374" y="3330000"/>
-            <a:ext cx="3595587" cy="700000"/>
-          </a:xfrm>
-          <a:prstGeom prst="rect">
-            <a:avLst/>
-          </a:prstGeom>
-          <a:noFill/>
-        </p:spPr>
-        <p:txBody>
-          <a:bodyPr wrap="square">
-            <a:spAutoFit/>
-          </a:bodyPr>
-          <a:lstStyle/>
-          <a:p>
-            <a:r>
-              <a:rPr sz="1150" b="1">
-                <a:solidFill>
-                  <a:srgbClr val="333333"/>
-                </a:solidFill>
-                <a:latin typeface="Calibri"/>
-              </a:rPr>
-              <a:t>Y-axis, first-ever trial: 50.1Hz</a:t>
-            </a:r>
-          </a:p>
-          <a:p>
-            <a:r>
-              <a:rPr sz="1050">
-                <a:solidFill>
-                  <a:srgbClr val="666666"/>
-                </a:solidFill>
-                <a:latin typeface="Calibri"/>
-              </a:rPr>
-              <a:t>dac_x→cy — only one trial so far</a:t>
-            </a:r>
-          </a:p>
-        </p:txBody>
-      </p:sp>
-      <p:sp>
-        <p:nvSpPr>
-          <p:cNvPr id="11" name="Note"/>
-          <p:cNvSpPr txBox="1"/>
-          <p:nvPr/>
-        </p:nvSpPr>
-        <p:spPr>
-          <a:xfrm>
-            <a:off x="457200" y="4200000"/>
-            <a:ext cx="11246760" cy="700000"/>
-          </a:xfrm>
-          <a:prstGeom prst="rect">
-            <a:avLst/>
-          </a:prstGeom>
-          <a:noFill/>
-        </p:spPr>
-        <p:txBody>
-          <a:bodyPr wrap="square">
-            <a:spAutoFit/>
-          </a:bodyPr>
-          <a:lstStyle/>
-          <a:p>
-            <a:r>
-              <a:rPr sz="1150" i="1">
-                <a:solidFill>
-                  <a:srgbClr val="555555"/>
-                </a:solidFill>
-                <a:latin typeface="Calibri"/>
-              </a:rPr>
-              <a:t>Both axes land close to each other and notably not close to the previously-documented 38.5Hz. Same trustworthy tick-timestamped peak-spacing method as the original measurement, so this reads as a real, reproducible shift in the physical resonance since then — see next slide for the updated FEA comparison.</a:t>
-            </a:r>
-          </a:p>
-        </p:txBody>
-      </p:sp>
     </p:spTree>
   </p:cSld>
   <p:clrMapOvr>

--- a/docs/session_results_2026-08-18_pid_tuning.pptx
+++ b/docs/session_results_2026-08-18_pid_tuning.pptx
@@ -30,6 +30,8 @@
     <p:sldId id="276" r:id="rId23"/>
     <p:sldId id="279" r:id="rId26"/>
     <p:sldId id="280" r:id="rId27"/>
+    <p:sldId id="281" r:id="rId28"/>
+    <p:sldId id="282" r:id="rId29"/>
   </p:sldIdLst>
   <p:sldSz cx="12192000" cy="6858000"/>
   <p:notesSz cx="7772400" cy="10058400"/>
@@ -7510,6 +7512,1127 @@
 </p:sld>
 </file>
 
+<file path=ppt/slides/slide26.xml><?xml version="1.0" encoding="utf-8"?>
+<p:sld xmlns:a="http://schemas.openxmlformats.org/drawingml/2006/main" xmlns:p="http://schemas.openxmlformats.org/presentationml/2006/main" xmlns:r="http://schemas.openxmlformats.org/officeDocument/2006/relationships">
+  <p:cSld>
+    <p:spTree>
+      <p:nvGrpSpPr>
+        <p:cNvPr id="1" name=""/>
+        <p:cNvGrpSpPr/>
+        <p:nvPr/>
+      </p:nvGrpSpPr>
+      <p:grpSpPr/>
+      <p:sp>
+        <p:nvSpPr>
+          <p:cNvPr id="2" name="TextBox 1"/>
+          <p:cNvSpPr txBox="1"/>
+          <p:nvPr/>
+        </p:nvSpPr>
+        <p:spPr>
+          <a:xfrm>
+            <a:off x="457200" y="228600"/>
+            <a:ext cx="11246760" cy="640000"/>
+          </a:xfrm>
+          <a:prstGeom prst="rect">
+            <a:avLst/>
+          </a:prstGeom>
+          <a:noFill/>
+        </p:spPr>
+        <p:txBody>
+          <a:bodyPr wrap="square">
+            <a:spAutoFit/>
+          </a:bodyPr>
+          <a:lstStyle/>
+          <a:p>
+            <a:r>
+              <a:rPr sz="2200" b="1">
+                <a:solidFill>
+                  <a:srgbClr val="1A1A2E"/>
+                </a:solidFill>
+                <a:latin typeface="Calibri"/>
+              </a:rPr>
+              <a:t>Lead compensator, designed from real Bode data -- still fails, but not from a bug</a:t>
+            </a:r>
+          </a:p>
+        </p:txBody>
+      </p:sp>
+      <p:cxnSp>
+        <p:nvCxnSpPr>
+          <p:cNvPr id="3" name="Connector 2"/>
+          <p:cNvCxnSpPr/>
+          <p:nvPr/>
+        </p:nvCxnSpPr>
+        <p:spPr>
+          <a:xfrm>
+            <a:off x="457200" y="960120"/>
+            <a:ext cx="11247120" cy="0"/>
+          </a:xfrm>
+          <a:prstGeom prst="line">
+            <a:avLst/>
+          </a:prstGeom>
+          <a:ln w="19080">
+            <a:solidFill>
+              <a:srgbClr val="2E5C8A"/>
+            </a:solidFill>
+          </a:ln>
+        </p:spPr>
+        <p:style>
+          <a:lnRef idx="2">
+            <a:schemeClr val="accent1"/>
+          </a:lnRef>
+          <a:fillRef idx="0">
+            <a:schemeClr val="accent1"/>
+          </a:fillRef>
+          <a:effectRef idx="1">
+            <a:schemeClr val="accent1"/>
+          </a:effectRef>
+          <a:fontRef idx="minor">
+            <a:schemeClr val="tx1"/>
+          </a:fontRef>
+        </p:style>
+      </p:cxnSp>
+      <p:sp>
+        <p:nvSpPr>
+          <p:cNvPr id="4" name="TextBox 3"/>
+          <p:cNvSpPr txBox="1"/>
+          <p:nvPr/>
+        </p:nvSpPr>
+        <p:spPr>
+          <a:xfrm>
+            <a:off x="457200" y="1120000"/>
+            <a:ext cx="11246760" cy="2650000"/>
+          </a:xfrm>
+          <a:prstGeom prst="rect">
+            <a:avLst/>
+          </a:prstGeom>
+          <a:noFill/>
+        </p:spPr>
+        <p:txBody>
+          <a:bodyPr wrap="square">
+            <a:spAutoFit/>
+          </a:bodyPr>
+          <a:lstStyle/>
+          <a:p>
+            <a:pPr>
+              <a:spcAft>
+                <a:spcPts val="800"/>
+              </a:spcAft>
+            </a:pPr>
+            <a:r>
+              <a:rPr sz="1300">
+                <a:solidFill>
+                  <a:srgbClr val="333333"/>
+                </a:solidFill>
+                <a:latin typeface="Calibri"/>
+              </a:rPr>
+              <a:t>• </a:t>
+            </a:r>
+            <a:r>
+              <a:rPr sz="1300">
+                <a:solidFill>
+                  <a:srgbClr val="333333"/>
+                </a:solidFill>
+                <a:latin typeface="Calibri"/>
+              </a:rPr>
+              <a:t>Designed fz≈15.4Hz / fp≈26Hz via standard phase-margin sizing from the fresh Bode sweep. Coefficient math independently re-derived and verified correct against lead_compute_coeffs()/lead_apply() -- bilinear-transform substitution matches exactly, DC gain ≈1.0, Nyquist-band gain matches the designed fp/fz ratio.</a:t>
+            </a:r>
+          </a:p>
+          <a:p>
+            <a:pPr>
+              <a:spcAft>
+                <a:spcPts val="800"/>
+              </a:spcAft>
+            </a:pPr>
+            <a:r>
+              <a:rPr sz="1300">
+                <a:solidFill>
+                  <a:srgbClr val="333333"/>
+                </a:solidFill>
+                <a:latin typeface="Calibri"/>
+              </a:rPr>
+              <a:t>• </a:t>
+            </a:r>
+            <a:r>
+              <a:rPr sz="1300">
+                <a:solidFill>
+                  <a:srgbClr val="333333"/>
+                </a:solidFill>
+                <a:latin typeface="Calibri"/>
+              </a:rPr>
+              <a:t>Tested on hardware (Kp=1.75/Ki=400): 598% overshoot, oscillation building even BEFORE the commanded step -- worse than the 106% no-lead baseline, not better. Genuine instability, not poor damping.</a:t>
+            </a:r>
+          </a:p>
+          <a:p>
+            <a:pPr>
+              <a:spcAft>
+                <a:spcPts val="800"/>
+              </a:spcAft>
+            </a:pPr>
+            <a:r>
+              <a:rPr sz="1300">
+                <a:solidFill>
+                  <a:srgbClr val="333333"/>
+                </a:solidFill>
+                <a:latin typeface="Calibri"/>
+              </a:rPr>
+              <a:t>• </a:t>
+            </a:r>
+            <a:r>
+              <a:rPr sz="1300">
+                <a:solidFill>
+                  <a:srgbClr val="333333"/>
+                </a:solidFill>
+                <a:latin typeface="Calibri"/>
+              </a:rPr>
+              <a:t>Loop-gain simulation against the real measured plant data explains why: both configs cross gain=1 a SECOND time right where the resonance's gain is already climbing steeply (well before its 40Hz peak). Any lead compensator adds gain along with phase -- that extra gain lands right in the danger zone and pushes the crossing to a worse point, not a better one.</a:t>
+            </a:r>
+          </a:p>
+        </p:txBody>
+      </p:sp>
+      <p:graphicFrame>
+        <p:nvGraphicFramePr>
+          <p:cNvPr id="5" name="Table 4"/>
+          <p:cNvGraphicFramePr>
+            <a:graphicFrameLocks noGrp="1"/>
+          </p:cNvGraphicFramePr>
+          <p:nvPr/>
+        </p:nvGraphicFramePr>
+        <p:xfrm>
+          <a:off x="1600000" y="3950000"/>
+          <a:ext cx="8900000" cy="1300000"/>
+        </p:xfrm>
+        <a:graphic>
+          <a:graphicData uri="http://schemas.openxmlformats.org/drawingml/2006/table">
+            <a:tbl>
+              <a:tblPr firstRow="1" bandRow="1">
+                <a:tableStyleId>{5C22544A-7EE6-4342-B048-85BDC9FD1C3A}</a:tableStyleId>
+              </a:tblPr>
+              <a:tblGrid>
+                <a:gridCol w="3200000"/>
+                <a:gridCol w="2200000"/>
+                <a:gridCol w="1800000"/>
+                <a:gridCol w="1700000"/>
+              </a:tblGrid>
+              <a:tr h="433333">
+                <a:tc>
+                  <a:txBody>
+                    <a:bodyPr/>
+                    <a:lstStyle/>
+                    <a:p>
+                      <a:pPr algn="ctr"/>
+                      <a:r>
+                        <a:rPr sz="1250" b="1">
+                          <a:solidFill>
+                            <a:srgbClr val="FFFFFF"/>
+                          </a:solidFill>
+                          <a:latin typeface="Calibri"/>
+                        </a:rPr>
+                        <a:t>Config</a:t>
+                      </a:r>
+                    </a:p>
+                  </a:txBody>
+                  <a:tcPr anchor="ctr">
+                    <a:solidFill>
+                      <a:srgbClr val="2E5C8A"/>
+                    </a:solidFill>
+                  </a:tcPr>
+                </a:tc>
+                <a:tc>
+                  <a:txBody>
+                    <a:bodyPr/>
+                    <a:lstStyle/>
+                    <a:p>
+                      <a:pPr algn="ctr"/>
+                      <a:r>
+                        <a:rPr sz="1250" b="1">
+                          <a:solidFill>
+                            <a:srgbClr val="FFFFFF"/>
+                          </a:solidFill>
+                          <a:latin typeface="Calibri"/>
+                        </a:rPr>
+                        <a:t>2nd gain=1 crossover</a:t>
+                      </a:r>
+                    </a:p>
+                  </a:txBody>
+                  <a:tcPr anchor="ctr">
+                    <a:solidFill>
+                      <a:srgbClr val="2E5C8A"/>
+                    </a:solidFill>
+                  </a:tcPr>
+                </a:tc>
+                <a:tc>
+                  <a:txBody>
+                    <a:bodyPr/>
+                    <a:lstStyle/>
+                    <a:p>
+                      <a:pPr algn="ctr"/>
+                      <a:r>
+                        <a:rPr sz="1250" b="1">
+                          <a:solidFill>
+                            <a:srgbClr val="FFFFFF"/>
+                          </a:solidFill>
+                          <a:latin typeface="Calibri"/>
+                        </a:rPr>
+                        <a:t>phase there</a:t>
+                      </a:r>
+                    </a:p>
+                  </a:txBody>
+                  <a:tcPr anchor="ctr">
+                    <a:solidFill>
+                      <a:srgbClr val="2E5C8A"/>
+                    </a:solidFill>
+                  </a:tcPr>
+                </a:tc>
+                <a:tc>
+                  <a:txBody>
+                    <a:bodyPr/>
+                    <a:lstStyle/>
+                    <a:p>
+                      <a:pPr algn="ctr"/>
+                      <a:r>
+                        <a:rPr sz="1250" b="1">
+                          <a:solidFill>
+                            <a:srgbClr val="FFFFFF"/>
+                          </a:solidFill>
+                          <a:latin typeface="Calibri"/>
+                        </a:rPr>
+                        <a:t>naive margin</a:t>
+                      </a:r>
+                    </a:p>
+                  </a:txBody>
+                  <a:tcPr anchor="ctr">
+                    <a:solidFill>
+                      <a:srgbClr val="2E5C8A"/>
+                    </a:solidFill>
+                  </a:tcPr>
+                </a:tc>
+              </a:tr>
+              <a:tr h="433333">
+                <a:tc>
+                  <a:txBody>
+                    <a:bodyPr/>
+                    <a:lstStyle/>
+                    <a:p>
+                      <a:pPr algn="ctr"/>
+                      <a:r>
+                        <a:rPr sz="1250">
+                          <a:solidFill>
+                            <a:srgbClr val="333333"/>
+                          </a:solidFill>
+                          <a:latin typeface="Calibri"/>
+                        </a:rPr>
+                        <a:t>no lead (baseline)</a:t>
+                      </a:r>
+                    </a:p>
+                  </a:txBody>
+                  <a:tcPr anchor="ctr">
+                    <a:solidFill>
+                      <a:srgbClr val="FFFFFF"/>
+                    </a:solidFill>
+                  </a:tcPr>
+                </a:tc>
+                <a:tc>
+                  <a:txBody>
+                    <a:bodyPr/>
+                    <a:lstStyle/>
+                    <a:p>
+                      <a:pPr algn="ctr"/>
+                      <a:r>
+                        <a:rPr sz="1250">
+                          <a:solidFill>
+                            <a:srgbClr val="333333"/>
+                          </a:solidFill>
+                          <a:latin typeface="Calibri"/>
+                        </a:rPr>
+                        <a:t>36.4 Hz</a:t>
+                      </a:r>
+                    </a:p>
+                  </a:txBody>
+                  <a:tcPr anchor="ctr">
+                    <a:solidFill>
+                      <a:srgbClr val="FFFFFF"/>
+                    </a:solidFill>
+                  </a:tcPr>
+                </a:tc>
+                <a:tc>
+                  <a:txBody>
+                    <a:bodyPr/>
+                    <a:lstStyle/>
+                    <a:p>
+                      <a:pPr algn="ctr"/>
+                      <a:r>
+                        <a:rPr sz="1250">
+                          <a:solidFill>
+                            <a:srgbClr val="333333"/>
+                          </a:solidFill>
+                          <a:latin typeface="Calibri"/>
+                        </a:rPr>
+                        <a:t>-217°</a:t>
+                      </a:r>
+                    </a:p>
+                  </a:txBody>
+                  <a:tcPr anchor="ctr">
+                    <a:solidFill>
+                      <a:srgbClr val="FFFFFF"/>
+                    </a:solidFill>
+                  </a:tcPr>
+                </a:tc>
+                <a:tc>
+                  <a:txBody>
+                    <a:bodyPr/>
+                    <a:lstStyle/>
+                    <a:p>
+                      <a:pPr algn="ctr"/>
+                      <a:r>
+                        <a:rPr sz="1250">
+                          <a:solidFill>
+                            <a:srgbClr val="333333"/>
+                          </a:solidFill>
+                          <a:latin typeface="Calibri"/>
+                        </a:rPr>
+                        <a:t>-37°</a:t>
+                      </a:r>
+                    </a:p>
+                  </a:txBody>
+                  <a:tcPr anchor="ctr">
+                    <a:solidFill>
+                      <a:srgbClr val="FFFFFF"/>
+                    </a:solidFill>
+                  </a:tcPr>
+                </a:tc>
+              </a:tr>
+              <a:tr h="433334">
+                <a:tc>
+                  <a:txBody>
+                    <a:bodyPr/>
+                    <a:lstStyle/>
+                    <a:p>
+                      <a:pPr algn="ctr"/>
+                      <a:r>
+                        <a:rPr sz="1250">
+                          <a:solidFill>
+                            <a:srgbClr val="333333"/>
+                          </a:solidFill>
+                          <a:latin typeface="Calibri"/>
+                        </a:rPr>
+                        <a:t>with lead (fz=15.4/fp=26)</a:t>
+                      </a:r>
+                    </a:p>
+                  </a:txBody>
+                  <a:tcPr anchor="ctr">
+                    <a:solidFill>
+                      <a:srgbClr val="F2F4F7"/>
+                    </a:solidFill>
+                  </a:tcPr>
+                </a:tc>
+                <a:tc>
+                  <a:txBody>
+                    <a:bodyPr/>
+                    <a:lstStyle/>
+                    <a:p>
+                      <a:pPr algn="ctr"/>
+                      <a:r>
+                        <a:rPr sz="1250">
+                          <a:solidFill>
+                            <a:srgbClr val="333333"/>
+                          </a:solidFill>
+                          <a:latin typeface="Calibri"/>
+                        </a:rPr>
+                        <a:t>34.3 Hz</a:t>
+                      </a:r>
+                    </a:p>
+                  </a:txBody>
+                  <a:tcPr anchor="ctr">
+                    <a:solidFill>
+                      <a:srgbClr val="F2F4F7"/>
+                    </a:solidFill>
+                  </a:tcPr>
+                </a:tc>
+                <a:tc>
+                  <a:txBody>
+                    <a:bodyPr/>
+                    <a:lstStyle/>
+                    <a:p>
+                      <a:pPr algn="ctr"/>
+                      <a:r>
+                        <a:rPr sz="1250">
+                          <a:solidFill>
+                            <a:srgbClr val="333333"/>
+                          </a:solidFill>
+                          <a:latin typeface="Calibri"/>
+                        </a:rPr>
+                        <a:t>-177°</a:t>
+                      </a:r>
+                    </a:p>
+                  </a:txBody>
+                  <a:tcPr anchor="ctr">
+                    <a:solidFill>
+                      <a:srgbClr val="F2F4F7"/>
+                    </a:solidFill>
+                  </a:tcPr>
+                </a:tc>
+                <a:tc>
+                  <a:txBody>
+                    <a:bodyPr/>
+                    <a:lstStyle/>
+                    <a:p>
+                      <a:pPr algn="ctr"/>
+                      <a:r>
+                        <a:rPr sz="1250">
+                          <a:solidFill>
+                            <a:srgbClr val="333333"/>
+                          </a:solidFill>
+                          <a:latin typeface="Calibri"/>
+                        </a:rPr>
+                        <a:t>+2.6°</a:t>
+                      </a:r>
+                    </a:p>
+                  </a:txBody>
+                  <a:tcPr anchor="ctr">
+                    <a:solidFill>
+                      <a:srgbClr val="F2F4F7"/>
+                    </a:solidFill>
+                  </a:tcPr>
+                </a:tc>
+              </a:tr>
+            </a:tbl>
+          </a:graphicData>
+        </a:graphic>
+      </p:graphicFrame>
+      <p:sp>
+        <p:nvSpPr>
+          <p:cNvPr id="6" name="TextBox 5"/>
+          <p:cNvSpPr txBox="1"/>
+          <p:nvPr/>
+        </p:nvSpPr>
+        <p:spPr>
+          <a:xfrm>
+            <a:off x="1600000" y="5350000"/>
+            <a:ext cx="8900000" cy="700000"/>
+          </a:xfrm>
+          <a:prstGeom prst="rect">
+            <a:avLst/>
+          </a:prstGeom>
+          <a:noFill/>
+        </p:spPr>
+        <p:txBody>
+          <a:bodyPr wrap="square">
+            <a:spAutoFit/>
+          </a:bodyPr>
+          <a:lstStyle/>
+          <a:p>
+            <a:r>
+              <a:rPr sz="1050" i="1">
+                <a:solidFill>
+                  <a:srgbClr val="898781"/>
+                </a:solidFill>
+                <a:latin typeface="Calibri"/>
+              </a:rPr>
+              <a:t>Caveat: this loop crosses gain=1 three times, so a naive "180+phase" margin isn't strictly valid -- applied to a config already confirmed clean on hardware it predicted instability too. The COMPARATIVE read (lead's crossing is lower and worse) is the trustworthy part, not the exact degree values.</a:t>
+            </a:r>
+          </a:p>
+        </p:txBody>
+      </p:sp>
+    </p:spTree>
+  </p:cSld>
+  <p:clrMapOvr>
+    <a:masterClrMapping/>
+  </p:clrMapOvr>
+</p:sld>
+</file>
+
+<file path=ppt/slides/slide27.xml><?xml version="1.0" encoding="utf-8"?>
+<p:sld xmlns:a="http://schemas.openxmlformats.org/drawingml/2006/main" xmlns:p="http://schemas.openxmlformats.org/presentationml/2006/main" xmlns:r="http://schemas.openxmlformats.org/officeDocument/2006/relationships">
+  <p:cSld>
+    <p:spTree>
+      <p:nvGrpSpPr>
+        <p:cNvPr id="1" name=""/>
+        <p:cNvGrpSpPr/>
+        <p:nvPr/>
+      </p:nvGrpSpPr>
+      <p:grpSpPr/>
+      <p:sp>
+        <p:nvSpPr>
+          <p:cNvPr id="2" name="TextBox 1"/>
+          <p:cNvSpPr txBox="1"/>
+          <p:nvPr/>
+        </p:nvSpPr>
+        <p:spPr>
+          <a:xfrm>
+            <a:off x="457200" y="228600"/>
+            <a:ext cx="11246760" cy="640000"/>
+          </a:xfrm>
+          <a:prstGeom prst="rect">
+            <a:avLst/>
+          </a:prstGeom>
+          <a:noFill/>
+        </p:spPr>
+        <p:txBody>
+          <a:bodyPr wrap="square">
+            <a:spAutoFit/>
+          </a:bodyPr>
+          <a:lstStyle/>
+          <a:p>
+            <a:r>
+              <a:rPr sz="2200" b="1">
+                <a:solidFill>
+                  <a:srgbClr val="1A1A2E"/>
+                </a:solidFill>
+                <a:latin typeface="Calibri"/>
+              </a:rPr>
+              <a:t>Tried a much tighter notch instead -- real hardware says it's worse, not better</a:t>
+            </a:r>
+          </a:p>
+        </p:txBody>
+      </p:sp>
+      <p:cxnSp>
+        <p:nvCxnSpPr>
+          <p:cNvPr id="3" name="Connector 2"/>
+          <p:cNvCxnSpPr/>
+          <p:nvPr/>
+        </p:nvCxnSpPr>
+        <p:spPr>
+          <a:xfrm>
+            <a:off x="457200" y="960120"/>
+            <a:ext cx="11247120" cy="0"/>
+          </a:xfrm>
+          <a:prstGeom prst="line">
+            <a:avLst/>
+          </a:prstGeom>
+          <a:ln w="19080">
+            <a:solidFill>
+              <a:srgbClr val="2E5C8A"/>
+            </a:solidFill>
+          </a:ln>
+        </p:spPr>
+        <p:style>
+          <a:lnRef idx="2">
+            <a:schemeClr val="accent1"/>
+          </a:lnRef>
+          <a:fillRef idx="0">
+            <a:schemeClr val="accent1"/>
+          </a:fillRef>
+          <a:effectRef idx="1">
+            <a:schemeClr val="accent1"/>
+          </a:effectRef>
+          <a:fontRef idx="minor">
+            <a:schemeClr val="tx1"/>
+          </a:fontRef>
+        </p:style>
+      </p:cxnSp>
+      <p:sp>
+        <p:nvSpPr>
+          <p:cNvPr id="4" name="TextBox 3"/>
+          <p:cNvSpPr txBox="1"/>
+          <p:nvPr/>
+        </p:nvSpPr>
+        <p:spPr>
+          <a:xfrm>
+            <a:off x="457200" y="1120000"/>
+            <a:ext cx="11246760" cy="2650000"/>
+          </a:xfrm>
+          <a:prstGeom prst="rect">
+            <a:avLst/>
+          </a:prstGeom>
+          <a:noFill/>
+        </p:spPr>
+        <p:txBody>
+          <a:bodyPr wrap="square">
+            <a:spAutoFit/>
+          </a:bodyPr>
+          <a:lstStyle/>
+          <a:p>
+            <a:pPr>
+              <a:spcAft>
+                <a:spcPts val="800"/>
+              </a:spcAft>
+            </a:pPr>
+            <a:r>
+              <a:rPr sz="1300">
+                <a:solidFill>
+                  <a:srgbClr val="333333"/>
+                </a:solidFill>
+                <a:latin typeface="Calibri"/>
+              </a:rPr>
+              <a:t>• </a:t>
+            </a:r>
+            <a:r>
+              <a:rPr sz="1300">
+                <a:solidFill>
+                  <a:srgbClr val="333333"/>
+                </a:solidFill>
+                <a:latin typeface="Calibri"/>
+              </a:rPr>
+              <a:t>Simulation suggested tightening the notch (Q=3→30) should cost almost nothing in the 10-20Hz band (&lt;0.4% gain change vs. no notch) -- worth testing directly on hardware, no rebuild needed (set_notch is live-tunable).</a:t>
+            </a:r>
+          </a:p>
+          <a:p>
+            <a:pPr>
+              <a:spcAft>
+                <a:spcPts val="800"/>
+              </a:spcAft>
+            </a:pPr>
+            <a:r>
+              <a:rPr sz="1300">
+                <a:solidFill>
+                  <a:srgbClr val="333333"/>
+                </a:solidFill>
+                <a:latin typeface="Calibri"/>
+              </a:rPr>
+              <a:t>• </a:t>
+            </a:r>
+            <a:r>
+              <a:rPr sz="1300">
+                <a:solidFill>
+                  <a:srgbClr val="333333"/>
+                </a:solidFill>
+                <a:latin typeface="Calibri"/>
+              </a:rPr>
+              <a:t>Real sweep: Q ∈ {8, 12, 20} × Ki ∈ {200, 400, 600, 800} at Kp=1.75, notch @ 40Hz, throttled 200Hz. ALL 12 combinations were worse than the already-poor Q=3 result, and worse monotonically as Q increased -- Q=20 diverges even at Ki=200, previously safe under both no-notch and Q=3.</a:t>
+            </a:r>
+          </a:p>
+          <a:p>
+            <a:pPr>
+              <a:spcAft>
+                <a:spcPts val="800"/>
+              </a:spcAft>
+            </a:pPr>
+            <a:r>
+              <a:rPr sz="1300">
+                <a:solidFill>
+                  <a:srgbClr val="333333"/>
+                </a:solidFill>
+                <a:latin typeface="Calibri"/>
+              </a:rPr>
+              <a:t>• </a:t>
+            </a:r>
+            <a:r>
+              <a:rPr sz="1300">
+                <a:solidFill>
+                  <a:srgbClr val="333333"/>
+                </a:solidFill>
+                <a:latin typeface="Calibri"/>
+              </a:rPr>
+              <a:t>Likely explanation: the simulation only checked magnitude attenuation, never phase. A notch's phase distortion swings across a much wider band than its visible magnitude dip -- at ~200Hz sample rate vs. a 40Hz center (only ~5x oversampled), that phase cost is real and gets worse, not better, as Q tightens.</a:t>
+            </a:r>
+          </a:p>
+          <a:p>
+            <a:pPr>
+              <a:spcAft>
+                <a:spcPts val="800"/>
+              </a:spcAft>
+            </a:pPr>
+            <a:r>
+              <a:rPr sz="1300">
+                <a:solidFill>
+                  <a:srgbClr val="333333"/>
+                </a:solidFill>
+                <a:latin typeface="Calibri"/>
+              </a:rPr>
+              <a:t>• </a:t>
+            </a:r>
+            <a:r>
+              <a:rPr sz="1300">
+                <a:solidFill>
+                  <a:srgbClr val="333333"/>
+                </a:solidFill>
+                <a:latin typeface="Calibri"/>
+              </a:rPr>
+              <a:t>Net: D-term, the original Q=3 notch, this higher-Q sweep, and now a correctly-designed lead compensator have ALL failed against this resonance -- four independent approaches. Recommend treating the flexure hardware redesign as the primary path, not further controller tuning.</a:t>
+            </a:r>
+          </a:p>
+        </p:txBody>
+      </p:sp>
+      <p:graphicFrame>
+        <p:nvGraphicFramePr>
+          <p:cNvPr id="5" name="Table 4"/>
+          <p:cNvGraphicFramePr>
+            <a:graphicFrameLocks noGrp="1"/>
+          </p:cNvGraphicFramePr>
+          <p:nvPr/>
+        </p:nvGraphicFramePr>
+        <p:xfrm>
+          <a:off x="2400000" y="3950000"/>
+          <a:ext cx="6900000" cy="2100000"/>
+        </p:xfrm>
+        <a:graphic>
+          <a:graphicData uri="http://schemas.openxmlformats.org/drawingml/2006/table">
+            <a:tbl>
+              <a:tblPr firstRow="1" bandRow="1">
+                <a:tableStyleId>{5C22544A-7EE6-4342-B048-85BDC9FD1C3A}</a:tableStyleId>
+              </a:tblPr>
+              <a:tblGrid>
+                <a:gridCol w="2000000"/>
+                <a:gridCol w="2600000"/>
+                <a:gridCol w="2300000"/>
+              </a:tblGrid>
+              <a:tr h="420000">
+                <a:tc>
+                  <a:txBody>
+                    <a:bodyPr/>
+                    <a:lstStyle/>
+                    <a:p>
+                      <a:pPr algn="ctr"/>
+                      <a:r>
+                        <a:rPr sz="1250" b="1">
+                          <a:solidFill>
+                            <a:srgbClr val="FFFFFF"/>
+                          </a:solidFill>
+                          <a:latin typeface="Calibri"/>
+                        </a:rPr>
+                        <a:t>Notch Q</a:t>
+                      </a:r>
+                    </a:p>
+                  </a:txBody>
+                  <a:tcPr anchor="ctr">
+                    <a:solidFill>
+                      <a:srgbClr val="2E5C8A"/>
+                    </a:solidFill>
+                  </a:tcPr>
+                </a:tc>
+                <a:tc>
+                  <a:txBody>
+                    <a:bodyPr/>
+                    <a:lstStyle/>
+                    <a:p>
+                      <a:pPr algn="ctr"/>
+                      <a:r>
+                        <a:rPr sz="1250" b="1">
+                          <a:solidFill>
+                            <a:srgbClr val="FFFFFF"/>
+                          </a:solidFill>
+                          <a:latin typeface="Calibri"/>
+                        </a:rPr>
+                        <a:t>Ki=200 verdict</a:t>
+                      </a:r>
+                    </a:p>
+                  </a:txBody>
+                  <a:tcPr anchor="ctr">
+                    <a:solidFill>
+                      <a:srgbClr val="2E5C8A"/>
+                    </a:solidFill>
+                  </a:tcPr>
+                </a:tc>
+                <a:tc>
+                  <a:txBody>
+                    <a:bodyPr/>
+                    <a:lstStyle/>
+                    <a:p>
+                      <a:pPr algn="ctr"/>
+                      <a:r>
+                        <a:rPr sz="1250" b="1">
+                          <a:solidFill>
+                            <a:srgbClr val="FFFFFF"/>
+                          </a:solidFill>
+                          <a:latin typeface="Calibri"/>
+                        </a:rPr>
+                        <a:t>note</a:t>
+                      </a:r>
+                    </a:p>
+                  </a:txBody>
+                  <a:tcPr anchor="ctr">
+                    <a:solidFill>
+                      <a:srgbClr val="2E5C8A"/>
+                    </a:solidFill>
+                  </a:tcPr>
+                </a:tc>
+              </a:tr>
+              <a:tr h="420000">
+                <a:tc>
+                  <a:txBody>
+                    <a:bodyPr/>
+                    <a:lstStyle/>
+                    <a:p>
+                      <a:pPr algn="ctr"/>
+                      <a:r>
+                        <a:rPr sz="1250">
+                          <a:solidFill>
+                            <a:srgbClr val="333333"/>
+                          </a:solidFill>
+                          <a:latin typeface="Calibri"/>
+                        </a:rPr>
+                        <a:t>3 (earlier baseline)</a:t>
+                      </a:r>
+                    </a:p>
+                  </a:txBody>
+                  <a:tcPr anchor="ctr">
+                    <a:solidFill>
+                      <a:srgbClr val="FFFFFF"/>
+                    </a:solidFill>
+                  </a:tcPr>
+                </a:tc>
+                <a:tc>
+                  <a:txBody>
+                    <a:bodyPr/>
+                    <a:lstStyle/>
+                    <a:p>
+                      <a:pPr algn="ctr"/>
+                      <a:r>
+                        <a:rPr sz="1250">
+                          <a:solidFill>
+                            <a:srgbClr val="333333"/>
+                          </a:solidFill>
+                          <a:latin typeface="Calibri"/>
+                        </a:rPr>
+                        <a:t>CLEAN (9.9% overshoot)</a:t>
+                      </a:r>
+                    </a:p>
+                  </a:txBody>
+                  <a:tcPr anchor="ctr">
+                    <a:solidFill>
+                      <a:srgbClr val="FFFFFF"/>
+                    </a:solidFill>
+                  </a:tcPr>
+                </a:tc>
+                <a:tc>
+                  <a:txBody>
+                    <a:bodyPr/>
+                    <a:lstStyle/>
+                    <a:p>
+                      <a:pPr algn="ctr"/>
+                      <a:r>
+                        <a:rPr sz="1250">
+                          <a:solidFill>
+                            <a:srgbClr val="333333"/>
+                          </a:solidFill>
+                          <a:latin typeface="Calibri"/>
+                        </a:rPr>
+                        <a:t>already known-good</a:t>
+                      </a:r>
+                    </a:p>
+                  </a:txBody>
+                  <a:tcPr anchor="ctr">
+                    <a:solidFill>
+                      <a:srgbClr val="FFFFFF"/>
+                    </a:solidFill>
+                  </a:tcPr>
+                </a:tc>
+              </a:tr>
+              <a:tr h="420000">
+                <a:tc>
+                  <a:txBody>
+                    <a:bodyPr/>
+                    <a:lstStyle/>
+                    <a:p>
+                      <a:pPr algn="ctr"/>
+                      <a:r>
+                        <a:rPr sz="1250">
+                          <a:solidFill>
+                            <a:srgbClr val="333333"/>
+                          </a:solidFill>
+                          <a:latin typeface="Calibri"/>
+                        </a:rPr>
+                        <a:t>8</a:t>
+                      </a:r>
+                    </a:p>
+                  </a:txBody>
+                  <a:tcPr anchor="ctr">
+                    <a:solidFill>
+                      <a:srgbClr val="F2F4F7"/>
+                    </a:solidFill>
+                  </a:tcPr>
+                </a:tc>
+                <a:tc>
+                  <a:txBody>
+                    <a:bodyPr/>
+                    <a:lstStyle/>
+                    <a:p>
+                      <a:pPr algn="ctr"/>
+                      <a:r>
+                        <a:rPr sz="1250">
+                          <a:solidFill>
+                            <a:srgbClr val="333333"/>
+                          </a:solidFill>
+                          <a:latin typeface="Calibri"/>
+                        </a:rPr>
+                        <a:t>RINGING (91.4%)</a:t>
+                      </a:r>
+                    </a:p>
+                  </a:txBody>
+                  <a:tcPr anchor="ctr">
+                    <a:solidFill>
+                      <a:srgbClr val="F2F4F7"/>
+                    </a:solidFill>
+                  </a:tcPr>
+                </a:tc>
+                <a:tc>
+                  <a:txBody>
+                    <a:bodyPr/>
+                    <a:lstStyle/>
+                    <a:p>
+                      <a:pPr algn="ctr"/>
+                      <a:r>
+                        <a:rPr sz="1250">
+                          <a:solidFill>
+                            <a:srgbClr val="333333"/>
+                          </a:solidFill>
+                          <a:latin typeface="Calibri"/>
+                        </a:rPr>
+                        <a:t>worse than Q=3</a:t>
+                      </a:r>
+                    </a:p>
+                  </a:txBody>
+                  <a:tcPr anchor="ctr">
+                    <a:solidFill>
+                      <a:srgbClr val="F2F4F7"/>
+                    </a:solidFill>
+                  </a:tcPr>
+                </a:tc>
+              </a:tr>
+              <a:tr h="420000">
+                <a:tc>
+                  <a:txBody>
+                    <a:bodyPr/>
+                    <a:lstStyle/>
+                    <a:p>
+                      <a:pPr algn="ctr"/>
+                      <a:r>
+                        <a:rPr sz="1250">
+                          <a:solidFill>
+                            <a:srgbClr val="333333"/>
+                          </a:solidFill>
+                          <a:latin typeface="Calibri"/>
+                        </a:rPr>
+                        <a:t>12</a:t>
+                      </a:r>
+                    </a:p>
+                  </a:txBody>
+                  <a:tcPr anchor="ctr">
+                    <a:solidFill>
+                      <a:srgbClr val="FFFFFF"/>
+                    </a:solidFill>
+                  </a:tcPr>
+                </a:tc>
+                <a:tc>
+                  <a:txBody>
+                    <a:bodyPr/>
+                    <a:lstStyle/>
+                    <a:p>
+                      <a:pPr algn="ctr"/>
+                      <a:r>
+                        <a:rPr sz="1250">
+                          <a:solidFill>
+                            <a:srgbClr val="333333"/>
+                          </a:solidFill>
+                          <a:latin typeface="Calibri"/>
+                        </a:rPr>
+                        <a:t>GROWING / UNSTABLE</a:t>
+                      </a:r>
+                    </a:p>
+                  </a:txBody>
+                  <a:tcPr anchor="ctr">
+                    <a:solidFill>
+                      <a:srgbClr val="FFFFFF"/>
+                    </a:solidFill>
+                  </a:tcPr>
+                </a:tc>
+                <a:tc>
+                  <a:txBody>
+                    <a:bodyPr/>
+                    <a:lstStyle/>
+                    <a:p>
+                      <a:pPr algn="ctr"/>
+                      <a:r>
+                        <a:rPr sz="1250">
+                          <a:solidFill>
+                            <a:srgbClr val="333333"/>
+                          </a:solidFill>
+                          <a:latin typeface="Calibri"/>
+                        </a:rPr>
+                        <a:t>worse still</a:t>
+                      </a:r>
+                    </a:p>
+                  </a:txBody>
+                  <a:tcPr anchor="ctr">
+                    <a:solidFill>
+                      <a:srgbClr val="FFFFFF"/>
+                    </a:solidFill>
+                  </a:tcPr>
+                </a:tc>
+              </a:tr>
+              <a:tr h="420000">
+                <a:tc>
+                  <a:txBody>
+                    <a:bodyPr/>
+                    <a:lstStyle/>
+                    <a:p>
+                      <a:pPr algn="ctr"/>
+                      <a:r>
+                        <a:rPr sz="1250">
+                          <a:solidFill>
+                            <a:srgbClr val="333333"/>
+                          </a:solidFill>
+                          <a:latin typeface="Calibri"/>
+                        </a:rPr>
+                        <a:t>20</a:t>
+                      </a:r>
+                    </a:p>
+                  </a:txBody>
+                  <a:tcPr anchor="ctr">
+                    <a:solidFill>
+                      <a:srgbClr val="F2F4F7"/>
+                    </a:solidFill>
+                  </a:tcPr>
+                </a:tc>
+                <a:tc>
+                  <a:txBody>
+                    <a:bodyPr/>
+                    <a:lstStyle/>
+                    <a:p>
+                      <a:pPr algn="ctr"/>
+                      <a:r>
+                        <a:rPr sz="1250">
+                          <a:solidFill>
+                            <a:srgbClr val="333333"/>
+                          </a:solidFill>
+                          <a:latin typeface="Calibri"/>
+                        </a:rPr>
+                        <a:t>DIVERGED</a:t>
+                      </a:r>
+                    </a:p>
+                  </a:txBody>
+                  <a:tcPr anchor="ctr">
+                    <a:solidFill>
+                      <a:srgbClr val="F2F4F7"/>
+                    </a:solidFill>
+                  </a:tcPr>
+                </a:tc>
+                <a:tc>
+                  <a:txBody>
+                    <a:bodyPr/>
+                    <a:lstStyle/>
+                    <a:p>
+                      <a:pPr algn="ctr"/>
+                      <a:r>
+                        <a:rPr sz="1250">
+                          <a:solidFill>
+                            <a:srgbClr val="333333"/>
+                          </a:solidFill>
+                          <a:latin typeface="Calibri"/>
+                        </a:rPr>
+                        <a:t>unstable even at the safest Ki tested</a:t>
+                      </a:r>
+                    </a:p>
+                  </a:txBody>
+                  <a:tcPr anchor="ctr">
+                    <a:solidFill>
+                      <a:srgbClr val="F2F4F7"/>
+                    </a:solidFill>
+                  </a:tcPr>
+                </a:tc>
+              </a:tr>
+            </a:tbl>
+          </a:graphicData>
+        </a:graphic>
+      </p:graphicFrame>
+    </p:spTree>
+  </p:cSld>
+  <p:clrMapOvr>
+    <a:masterClrMapping/>
+  </p:clrMapOvr>
+</p:sld>
+</file>
+
 <file path=ppt/slides/slide3.xml><?xml version="1.0" encoding="utf-8"?>
 <p:sld xmlns:a="http://schemas.openxmlformats.org/drawingml/2006/main" xmlns:p="http://schemas.openxmlformats.org/presentationml/2006/main" xmlns:r="http://schemas.openxmlformats.org/officeDocument/2006/relationships" xmlns:p14="http://schemas.microsoft.com/office/powerpoint/2010/main" xmlns:p15="http://schemas.microsoft.com/office/powerpoint/2012/main" xmlns:mc="http://schemas.openxmlformats.org/markup-compatibility/2006">
   <p:cSld>

--- a/docs/session_results_2026-08-18_pid_tuning.pptx
+++ b/docs/session_results_2026-08-18_pid_tuning.pptx
@@ -32,6 +32,7 @@
     <p:sldId id="280" r:id="rId27"/>
     <p:sldId id="281" r:id="rId28"/>
     <p:sldId id="282" r:id="rId29"/>
+    <p:sldId id="283" r:id="rId30"/>
   </p:sldIdLst>
   <p:sldSz cx="12192000" cy="6858000"/>
   <p:notesSz cx="7772400" cy="10058400"/>
@@ -8633,6 +8634,240 @@
 </p:sld>
 </file>
 
+<file path=ppt/slides/slide28.xml><?xml version="1.0" encoding="utf-8"?>
+<p:sld xmlns:a="http://schemas.openxmlformats.org/drawingml/2006/main" xmlns:p="http://schemas.openxmlformats.org/presentationml/2006/main" xmlns:r="http://schemas.openxmlformats.org/officeDocument/2006/relationships">
+  <p:cSld>
+    <p:spTree>
+      <p:nvGrpSpPr>
+        <p:cNvPr id="1" name=""/>
+        <p:cNvGrpSpPr/>
+        <p:nvPr/>
+      </p:nvGrpSpPr>
+      <p:grpSpPr/>
+      <p:sp>
+        <p:nvSpPr>
+          <p:cNvPr id="2" name="TextBox 1"/>
+          <p:cNvSpPr txBox="1"/>
+          <p:nvPr/>
+        </p:nvSpPr>
+        <p:spPr>
+          <a:xfrm>
+            <a:off x="457200" y="228600"/>
+            <a:ext cx="11246760" cy="640000"/>
+          </a:xfrm>
+          <a:prstGeom prst="rect">
+            <a:avLst/>
+          </a:prstGeom>
+          <a:noFill/>
+        </p:spPr>
+        <p:txBody>
+          <a:bodyPr wrap="square">
+            <a:spAutoFit/>
+          </a:bodyPr>
+          <a:lstStyle/>
+          <a:p>
+            <a:r>
+              <a:rPr sz="2200" b="1">
+                <a:solidFill>
+                  <a:srgbClr val="1A1A2E"/>
+                </a:solidFill>
+                <a:latin typeface="Calibri"/>
+              </a:rPr>
+              <a:t>Second axis (dac_x -&gt; cy): its own resonance, corroborated two ways</a:t>
+            </a:r>
+          </a:p>
+        </p:txBody>
+      </p:sp>
+      <p:cxnSp>
+        <p:nvCxnSpPr>
+          <p:cNvPr id="3" name="Connector 2"/>
+          <p:cNvCxnSpPr/>
+          <p:nvPr/>
+        </p:nvCxnSpPr>
+        <p:spPr>
+          <a:xfrm>
+            <a:off x="457200" y="960120"/>
+            <a:ext cx="11247120" cy="0"/>
+          </a:xfrm>
+          <a:prstGeom prst="line">
+            <a:avLst/>
+          </a:prstGeom>
+          <a:ln w="19080">
+            <a:solidFill>
+              <a:srgbClr val="2E5C8A"/>
+            </a:solidFill>
+          </a:ln>
+        </p:spPr>
+        <p:style>
+          <a:lnRef idx="2">
+            <a:schemeClr val="accent1"/>
+          </a:lnRef>
+          <a:fillRef idx="0">
+            <a:schemeClr val="accent1"/>
+          </a:fillRef>
+          <a:effectRef idx="1">
+            <a:schemeClr val="accent1"/>
+          </a:effectRef>
+          <a:fontRef idx="minor">
+            <a:schemeClr val="tx1"/>
+          </a:fontRef>
+        </p:style>
+      </p:cxnSp>
+      <p:sp>
+        <p:nvSpPr>
+          <p:cNvPr id="4" name="TextBox 3"/>
+          <p:cNvSpPr txBox="1"/>
+          <p:nvPr/>
+        </p:nvSpPr>
+        <p:spPr>
+          <a:xfrm>
+            <a:off x="457200" y="1120000"/>
+            <a:ext cx="11246760" cy="1900000"/>
+          </a:xfrm>
+          <a:prstGeom prst="rect">
+            <a:avLst/>
+          </a:prstGeom>
+          <a:noFill/>
+        </p:spPr>
+        <p:txBody>
+          <a:bodyPr wrap="square">
+            <a:spAutoFit/>
+          </a:bodyPr>
+          <a:lstStyle/>
+          <a:p>
+            <a:pPr>
+              <a:spcAft>
+                <a:spcPts val="800"/>
+              </a:spcAft>
+            </a:pPr>
+            <a:r>
+              <a:rPr sz="1300">
+                <a:solidFill>
+                  <a:srgbClr val="333333"/>
+                </a:solidFill>
+                <a:latin typeface="Calibri"/>
+              </a:rPr>
+              <a:t>• </a:t>
+            </a:r>
+            <a:r>
+              <a:rPr sz="1300">
+                <a:solidFill>
+                  <a:srgbClr val="333333"/>
+                </a:solidFill>
+                <a:latin typeface="Calibri"/>
+              </a:rPr>
+              <a:t>First-ever open-loop Bode sweep on this pathway (18 points, 1-55Hz) -- previously only a single ring-down trial and a step-response smoke test existed for this axis.</a:t>
+            </a:r>
+          </a:p>
+          <a:p>
+            <a:pPr>
+              <a:spcAft>
+                <a:spcPts val="800"/>
+              </a:spcAft>
+            </a:pPr>
+            <a:r>
+              <a:rPr sz="1300">
+                <a:solidFill>
+                  <a:srgbClr val="333333"/>
+                </a:solidFill>
+                <a:latin typeface="Calibri"/>
+              </a:rPr>
+              <a:t>• </a:t>
+            </a:r>
+            <a:r>
+              <a:rPr sz="1300">
+                <a:solidFill>
+                  <a:srgbClr val="333333"/>
+                </a:solidFill>
+                <a:latin typeface="Calibri"/>
+              </a:rPr>
+              <a:t>Real resonance found at ~47-50Hz (grid-limited), gain peaking at 0.63-0.64 px/count vs. a ~0.07-0.08 px/count low-frequency baseline (~8x amplification).</a:t>
+            </a:r>
+          </a:p>
+          <a:p>
+            <a:pPr>
+              <a:spcAft>
+                <a:spcPts val="800"/>
+              </a:spcAft>
+            </a:pPr>
+            <a:r>
+              <a:rPr sz="1300">
+                <a:solidFill>
+                  <a:srgbClr val="333333"/>
+                </a:solidFill>
+                <a:latin typeface="Calibri"/>
+              </a:rPr>
+              <a:t>• </a:t>
+            </a:r>
+            <a:r>
+              <a:rPr sz="1300">
+                <a:solidFill>
+                  <a:srgbClr val="333333"/>
+                </a:solidFill>
+                <a:latin typeface="Calibri"/>
+              </a:rPr>
+              <a:t>Closely matches the existing ring-down measurement for this SAME axis (50.1Hz) -- two independent methods (forced sine vs. free decay), same answer.</a:t>
+            </a:r>
+          </a:p>
+          <a:p>
+            <a:pPr>
+              <a:spcAft>
+                <a:spcPts val="800"/>
+              </a:spcAft>
+            </a:pPr>
+            <a:r>
+              <a:rPr sz="1300">
+                <a:solidFill>
+                  <a:srgbClr val="333333"/>
+                </a:solidFill>
+                <a:latin typeface="Calibri"/>
+              </a:rPr>
+              <a:t>• </a:t>
+            </a:r>
+            <a:r>
+              <a:rPr sz="1300">
+                <a:solidFill>
+                  <a:srgbClr val="333333"/>
+                </a:solidFill>
+                <a:latin typeface="Calibri"/>
+              </a:rPr>
+              <a:t>Gentler than the primary axis's resonance (~8x here vs. ~11x for dac_y-&gt;cx), but in the same 40-50Hz neighborhood -- worth checking whether the two axes share a common physical mode before finalizing the flexure redesign.</a:t>
+            </a:r>
+          </a:p>
+        </p:txBody>
+      </p:sp>
+      <p:pic>
+        <p:nvPicPr>
+          <p:cNvPr id="5" name="Picture 4" descr="fta_open_loop_bode_xaxis_summary.png"/>
+          <p:cNvPicPr>
+            <a:picLocks noChangeAspect="1"/>
+          </p:cNvPicPr>
+          <p:nvPr/>
+        </p:nvPicPr>
+        <p:blipFill>
+          <a:blip r:embed="rId2"/>
+          <a:stretch>
+            <a:fillRect/>
+          </a:stretch>
+        </p:blipFill>
+        <p:spPr>
+          <a:xfrm>
+            <a:off x="4367667" y="3150000"/>
+            <a:ext cx="3456666" cy="3050000"/>
+          </a:xfrm>
+          <a:prstGeom prst="rect">
+            <a:avLst/>
+          </a:prstGeom>
+        </p:spPr>
+      </p:pic>
+    </p:spTree>
+  </p:cSld>
+  <p:clrMapOvr>
+    <a:masterClrMapping/>
+  </p:clrMapOvr>
+</p:sld>
+</file>
+
 <file path=ppt/slides/slide3.xml><?xml version="1.0" encoding="utf-8"?>
 <p:sld xmlns:a="http://schemas.openxmlformats.org/drawingml/2006/main" xmlns:p="http://schemas.openxmlformats.org/presentationml/2006/main" xmlns:r="http://schemas.openxmlformats.org/officeDocument/2006/relationships" xmlns:p14="http://schemas.microsoft.com/office/powerpoint/2010/main" xmlns:p15="http://schemas.microsoft.com/office/powerpoint/2012/main" xmlns:mc="http://schemas.openxmlformats.org/markup-compatibility/2006">
   <p:cSld>

--- a/docs/session_results_2026-08-18_pid_tuning.pptx
+++ b/docs/session_results_2026-08-18_pid_tuning.pptx
@@ -30,6 +30,7 @@
     <p:sldId id="276" r:id="rId23"/>
     <p:sldId id="279" r:id="rId26"/>
     <p:sldId id="280" r:id="rId27"/>
+    <p:sldId id="284" r:id="rId31"/>
     <p:sldId id="281" r:id="rId28"/>
     <p:sldId id="282" r:id="rId29"/>
     <p:sldId id="283" r:id="rId30"/>
@@ -8868,6 +8869,240 @@
 </p:sld>
 </file>
 
+<file path=ppt/slides/slide29.xml><?xml version="1.0" encoding="utf-8"?>
+<p:sld xmlns:a="http://schemas.openxmlformats.org/drawingml/2006/main" xmlns:p="http://schemas.openxmlformats.org/presentationml/2006/main" xmlns:r="http://schemas.openxmlformats.org/officeDocument/2006/relationships">
+  <p:cSld>
+    <p:spTree>
+      <p:nvGrpSpPr>
+        <p:cNvPr id="1" name=""/>
+        <p:cNvGrpSpPr/>
+        <p:nvPr/>
+      </p:nvGrpSpPr>
+      <p:grpSpPr/>
+      <p:sp>
+        <p:nvSpPr>
+          <p:cNvPr id="2" name="TextBox 1"/>
+          <p:cNvSpPr txBox="1"/>
+          <p:nvPr/>
+        </p:nvSpPr>
+        <p:spPr>
+          <a:xfrm>
+            <a:off x="457200" y="228600"/>
+            <a:ext cx="11246760" cy="640000"/>
+          </a:xfrm>
+          <a:prstGeom prst="rect">
+            <a:avLst/>
+          </a:prstGeom>
+          <a:noFill/>
+        </p:spPr>
+        <p:txBody>
+          <a:bodyPr wrap="square">
+            <a:spAutoFit/>
+          </a:bodyPr>
+          <a:lstStyle/>
+          <a:p>
+            <a:r>
+              <a:rPr sz="2200" b="1">
+                <a:solidFill>
+                  <a:srgbClr val="1A1A2E"/>
+                </a:solidFill>
+                <a:latin typeface="Calibri"/>
+              </a:rPr>
+              <a:t>Fresh Bode re-sweep, primary axis (dac_y -&gt; cx) — same resonance shape, used to design the lead compensator</a:t>
+            </a:r>
+          </a:p>
+        </p:txBody>
+      </p:sp>
+      <p:cxnSp>
+        <p:nvCxnSpPr>
+          <p:cNvPr id="3" name="Connector 2"/>
+          <p:cNvCxnSpPr/>
+          <p:nvPr/>
+        </p:nvCxnSpPr>
+        <p:spPr>
+          <a:xfrm>
+            <a:off x="457200" y="960120"/>
+            <a:ext cx="11247120" cy="0"/>
+          </a:xfrm>
+          <a:prstGeom prst="line">
+            <a:avLst/>
+          </a:prstGeom>
+          <a:ln w="19080">
+            <a:solidFill>
+              <a:srgbClr val="2E5C8A"/>
+            </a:solidFill>
+          </a:ln>
+        </p:spPr>
+        <p:style>
+          <a:lnRef idx="2">
+            <a:schemeClr val="accent1"/>
+          </a:lnRef>
+          <a:fillRef idx="0">
+            <a:schemeClr val="accent1"/>
+          </a:fillRef>
+          <a:effectRef idx="1">
+            <a:schemeClr val="accent1"/>
+          </a:effectRef>
+          <a:fontRef idx="minor">
+            <a:schemeClr val="tx1"/>
+          </a:fontRef>
+        </p:style>
+      </p:cxnSp>
+      <p:sp>
+        <p:nvSpPr>
+          <p:cNvPr id="4" name="TextBox 3"/>
+          <p:cNvSpPr txBox="1"/>
+          <p:nvPr/>
+        </p:nvSpPr>
+        <p:spPr>
+          <a:xfrm>
+            <a:off x="457200" y="1120000"/>
+            <a:ext cx="11246760" cy="1900000"/>
+          </a:xfrm>
+          <a:prstGeom prst="rect">
+            <a:avLst/>
+          </a:prstGeom>
+          <a:noFill/>
+        </p:spPr>
+        <p:txBody>
+          <a:bodyPr wrap="square">
+            <a:spAutoFit/>
+          </a:bodyPr>
+          <a:lstStyle/>
+          <a:p>
+            <a:pPr>
+              <a:spcAft>
+                <a:spcPts val="800"/>
+              </a:spcAft>
+            </a:pPr>
+            <a:r>
+              <a:rPr sz="1300">
+                <a:solidFill>
+                  <a:srgbClr val="333333"/>
+                </a:solidFill>
+                <a:latin typeface="Calibri"/>
+              </a:rPr>
+              <a:t>• </a:t>
+            </a:r>
+            <a:r>
+              <a:rPr sz="1300">
+                <a:solidFill>
+                  <a:srgbClr val="333333"/>
+                </a:solidFill>
+                <a:latin typeface="Calibri"/>
+              </a:rPr>
+              <a:t>Fresh 18-point re-sweep (1-55Hz, amplitude reduced 300→150 counts for margin) of the same pathway already characterized on 2026-08-19 — re-run to get a clean, trustworthy basis for a new lead-compensator design.</a:t>
+            </a:r>
+          </a:p>
+          <a:p>
+            <a:pPr>
+              <a:spcAft>
+                <a:spcPts val="800"/>
+              </a:spcAft>
+            </a:pPr>
+            <a:r>
+              <a:rPr sz="1300">
+                <a:solidFill>
+                  <a:srgbClr val="333333"/>
+                </a:solidFill>
+                <a:latin typeface="Calibri"/>
+              </a:rPr>
+              <a:t>• </a:t>
+            </a:r>
+            <a:r>
+              <a:rPr sz="1300">
+                <a:solidFill>
+                  <a:srgbClr val="333333"/>
+                </a:solidFill>
+                <a:latin typeface="Calibri"/>
+              </a:rPr>
+              <a:t>Confirms the same qualitative shape as the original sweep: flat gain 1-13Hz, real phase margin through 10-20Hz (40° lag at 10Hz, matching almost exactly), then a sharp resonant peak.</a:t>
+            </a:r>
+          </a:p>
+          <a:p>
+            <a:pPr>
+              <a:spcAft>
+                <a:spcPts val="800"/>
+              </a:spcAft>
+            </a:pPr>
+            <a:r>
+              <a:rPr sz="1300">
+                <a:solidFill>
+                  <a:srgbClr val="333333"/>
+                </a:solidFill>
+                <a:latin typeface="Calibri"/>
+              </a:rPr>
+              <a:t>• </a:t>
+            </a:r>
+            <a:r>
+              <a:rPr sz="1300">
+                <a:solidFill>
+                  <a:srgbClr val="333333"/>
+                </a:solidFill>
+                <a:latin typeface="Calibri"/>
+              </a:rPr>
+              <a:t>Grid-sampled peak lands at 40Hz (~11x the low-frequency baseline gain) — grid-limited (35/40/44Hz sampled around it), so read as consistent with, not a correction to, either the 38.5Hz or ~47-50Hz ring-down numbers already on record.</a:t>
+            </a:r>
+          </a:p>
+          <a:p>
+            <a:pPr>
+              <a:spcAft>
+                <a:spcPts val="800"/>
+              </a:spcAft>
+            </a:pPr>
+            <a:r>
+              <a:rPr sz="1300">
+                <a:solidFill>
+                  <a:srgbClr val="333333"/>
+                </a:solidFill>
+                <a:latin typeface="Calibri"/>
+              </a:rPr>
+              <a:t>• </a:t>
+            </a:r>
+            <a:r>
+              <a:rPr sz="1300">
+                <a:solidFill>
+                  <a:srgbClr val="333333"/>
+                </a:solidFill>
+                <a:latin typeface="Calibri"/>
+              </a:rPr>
+              <a:t>This data was used to design the fz≈15.4Hz/fp≈26Hz lead compensator on the next slide — which failed violently on hardware, tracing back to gain this resonance skirt adds in the 15-35Hz band, not a design or coefficient error.</a:t>
+            </a:r>
+          </a:p>
+        </p:txBody>
+      </p:sp>
+      <p:pic>
+        <p:nvPicPr>
+          <p:cNvPr id="5" name="Picture 4" descr="fta_open_loop_bode_20260901_summary.png"/>
+          <p:cNvPicPr>
+            <a:picLocks noChangeAspect="1"/>
+          </p:cNvPicPr>
+          <p:nvPr/>
+        </p:nvPicPr>
+        <p:blipFill>
+          <a:blip r:embed="rId2"/>
+          <a:stretch>
+            <a:fillRect/>
+          </a:stretch>
+        </p:blipFill>
+        <p:spPr>
+          <a:xfrm>
+            <a:off x="4367667" y="3150000"/>
+            <a:ext cx="3456666" cy="3050000"/>
+          </a:xfrm>
+          <a:prstGeom prst="rect">
+            <a:avLst/>
+          </a:prstGeom>
+        </p:spPr>
+      </p:pic>
+    </p:spTree>
+  </p:cSld>
+  <p:clrMapOvr>
+    <a:masterClrMapping/>
+  </p:clrMapOvr>
+</p:sld>
+</file>
+
 <file path=ppt/slides/slide3.xml><?xml version="1.0" encoding="utf-8"?>
 <p:sld xmlns:a="http://schemas.openxmlformats.org/drawingml/2006/main" xmlns:p="http://schemas.openxmlformats.org/presentationml/2006/main" xmlns:r="http://schemas.openxmlformats.org/officeDocument/2006/relationships" xmlns:p14="http://schemas.microsoft.com/office/powerpoint/2010/main" xmlns:p15="http://schemas.microsoft.com/office/powerpoint/2012/main" xmlns:mc="http://schemas.openxmlformats.org/markup-compatibility/2006">
   <p:cSld>

--- a/docs/session_results_2026-08-18_pid_tuning.pptx
+++ b/docs/session_results_2026-08-18_pid_tuning.pptx
@@ -34,6 +34,7 @@
     <p:sldId id="281" r:id="rId28"/>
     <p:sldId id="282" r:id="rId29"/>
     <p:sldId id="283" r:id="rId30"/>
+    <p:sldId id="285" r:id="rId32"/>
   </p:sldIdLst>
   <p:sldSz cx="12192000" cy="6858000"/>
   <p:notesSz cx="7772400" cy="10058400"/>
@@ -7553,6 +7554,240 @@
                 </a:solidFill>
                 <a:latin typeface="Calibri"/>
               </a:rPr>
+              <a:t>Fresh Bode re-sweep, primary axis (dac_y -&gt; cx) — same resonance shape, used to design the lead compensator</a:t>
+            </a:r>
+          </a:p>
+        </p:txBody>
+      </p:sp>
+      <p:cxnSp>
+        <p:nvCxnSpPr>
+          <p:cNvPr id="3" name="Connector 2"/>
+          <p:cNvCxnSpPr/>
+          <p:nvPr/>
+        </p:nvCxnSpPr>
+        <p:spPr>
+          <a:xfrm>
+            <a:off x="457200" y="960120"/>
+            <a:ext cx="11247120" cy="0"/>
+          </a:xfrm>
+          <a:prstGeom prst="line">
+            <a:avLst/>
+          </a:prstGeom>
+          <a:ln w="19080">
+            <a:solidFill>
+              <a:srgbClr val="2E5C8A"/>
+            </a:solidFill>
+          </a:ln>
+        </p:spPr>
+        <p:style>
+          <a:lnRef idx="2">
+            <a:schemeClr val="accent1"/>
+          </a:lnRef>
+          <a:fillRef idx="0">
+            <a:schemeClr val="accent1"/>
+          </a:fillRef>
+          <a:effectRef idx="1">
+            <a:schemeClr val="accent1"/>
+          </a:effectRef>
+          <a:fontRef idx="minor">
+            <a:schemeClr val="tx1"/>
+          </a:fontRef>
+        </p:style>
+      </p:cxnSp>
+      <p:sp>
+        <p:nvSpPr>
+          <p:cNvPr id="4" name="TextBox 3"/>
+          <p:cNvSpPr txBox="1"/>
+          <p:nvPr/>
+        </p:nvSpPr>
+        <p:spPr>
+          <a:xfrm>
+            <a:off x="457200" y="1120000"/>
+            <a:ext cx="11246760" cy="1900000"/>
+          </a:xfrm>
+          <a:prstGeom prst="rect">
+            <a:avLst/>
+          </a:prstGeom>
+          <a:noFill/>
+        </p:spPr>
+        <p:txBody>
+          <a:bodyPr wrap="square">
+            <a:spAutoFit/>
+          </a:bodyPr>
+          <a:lstStyle/>
+          <a:p>
+            <a:pPr>
+              <a:spcAft>
+                <a:spcPts val="800"/>
+              </a:spcAft>
+            </a:pPr>
+            <a:r>
+              <a:rPr sz="1300">
+                <a:solidFill>
+                  <a:srgbClr val="333333"/>
+                </a:solidFill>
+                <a:latin typeface="Calibri"/>
+              </a:rPr>
+              <a:t>• </a:t>
+            </a:r>
+            <a:r>
+              <a:rPr sz="1300">
+                <a:solidFill>
+                  <a:srgbClr val="333333"/>
+                </a:solidFill>
+                <a:latin typeface="Calibri"/>
+              </a:rPr>
+              <a:t>Fresh 18-point re-sweep (1-55Hz, amplitude reduced 300→150 counts for margin) of the same pathway already characterized on 2026-08-19 — re-run to get a clean, trustworthy basis for a new lead-compensator design.</a:t>
+            </a:r>
+          </a:p>
+          <a:p>
+            <a:pPr>
+              <a:spcAft>
+                <a:spcPts val="800"/>
+              </a:spcAft>
+            </a:pPr>
+            <a:r>
+              <a:rPr sz="1300">
+                <a:solidFill>
+                  <a:srgbClr val="333333"/>
+                </a:solidFill>
+                <a:latin typeface="Calibri"/>
+              </a:rPr>
+              <a:t>• </a:t>
+            </a:r>
+            <a:r>
+              <a:rPr sz="1300">
+                <a:solidFill>
+                  <a:srgbClr val="333333"/>
+                </a:solidFill>
+                <a:latin typeface="Calibri"/>
+              </a:rPr>
+              <a:t>Confirms the same qualitative shape as the original sweep: flat gain 1-13Hz, real phase margin through 10-20Hz (40° lag at 10Hz, matching almost exactly), then a sharp resonant peak.</a:t>
+            </a:r>
+          </a:p>
+          <a:p>
+            <a:pPr>
+              <a:spcAft>
+                <a:spcPts val="800"/>
+              </a:spcAft>
+            </a:pPr>
+            <a:r>
+              <a:rPr sz="1300">
+                <a:solidFill>
+                  <a:srgbClr val="333333"/>
+                </a:solidFill>
+                <a:latin typeface="Calibri"/>
+              </a:rPr>
+              <a:t>• </a:t>
+            </a:r>
+            <a:r>
+              <a:rPr sz="1300">
+                <a:solidFill>
+                  <a:srgbClr val="333333"/>
+                </a:solidFill>
+                <a:latin typeface="Calibri"/>
+              </a:rPr>
+              <a:t>Grid-sampled peak lands at 40Hz (~11x the low-frequency baseline gain) — grid-limited (35/40/44Hz sampled around it), so read as consistent with, not a correction to, either the 38.5Hz or ~47-50Hz ring-down numbers already on record.</a:t>
+            </a:r>
+          </a:p>
+          <a:p>
+            <a:pPr>
+              <a:spcAft>
+                <a:spcPts val="800"/>
+              </a:spcAft>
+            </a:pPr>
+            <a:r>
+              <a:rPr sz="1300">
+                <a:solidFill>
+                  <a:srgbClr val="333333"/>
+                </a:solidFill>
+                <a:latin typeface="Calibri"/>
+              </a:rPr>
+              <a:t>• </a:t>
+            </a:r>
+            <a:r>
+              <a:rPr sz="1300">
+                <a:solidFill>
+                  <a:srgbClr val="333333"/>
+                </a:solidFill>
+                <a:latin typeface="Calibri"/>
+              </a:rPr>
+              <a:t>This data was used to design the fz≈15.4Hz/fp≈26Hz lead compensator on the next slide — which failed violently on hardware, tracing back to gain this resonance skirt adds in the 15-35Hz band, not a design or coefficient error.</a:t>
+            </a:r>
+          </a:p>
+        </p:txBody>
+      </p:sp>
+      <p:pic>
+        <p:nvPicPr>
+          <p:cNvPr id="5" name="Picture 4" descr="fta_open_loop_bode_20260901_summary.png"/>
+          <p:cNvPicPr>
+            <a:picLocks noChangeAspect="1"/>
+          </p:cNvPicPr>
+          <p:nvPr/>
+        </p:nvPicPr>
+        <p:blipFill>
+          <a:blip r:embed="rId2"/>
+          <a:stretch>
+            <a:fillRect/>
+          </a:stretch>
+        </p:blipFill>
+        <p:spPr>
+          <a:xfrm>
+            <a:off x="4367667" y="3150000"/>
+            <a:ext cx="3456666" cy="3050000"/>
+          </a:xfrm>
+          <a:prstGeom prst="rect">
+            <a:avLst/>
+          </a:prstGeom>
+        </p:spPr>
+      </p:pic>
+    </p:spTree>
+  </p:cSld>
+  <p:clrMapOvr>
+    <a:masterClrMapping/>
+  </p:clrMapOvr>
+</p:sld>
+</file>
+
+<file path=ppt/slides/slide27.xml><?xml version="1.0" encoding="utf-8"?>
+<p:sld xmlns:a="http://schemas.openxmlformats.org/drawingml/2006/main" xmlns:p="http://schemas.openxmlformats.org/presentationml/2006/main" xmlns:r="http://schemas.openxmlformats.org/officeDocument/2006/relationships">
+  <p:cSld>
+    <p:spTree>
+      <p:nvGrpSpPr>
+        <p:cNvPr id="1" name=""/>
+        <p:cNvGrpSpPr/>
+        <p:nvPr/>
+      </p:nvGrpSpPr>
+      <p:grpSpPr/>
+      <p:sp>
+        <p:nvSpPr>
+          <p:cNvPr id="2" name="TextBox 1"/>
+          <p:cNvSpPr txBox="1"/>
+          <p:nvPr/>
+        </p:nvSpPr>
+        <p:spPr>
+          <a:xfrm>
+            <a:off x="457200" y="228600"/>
+            <a:ext cx="11246760" cy="640000"/>
+          </a:xfrm>
+          <a:prstGeom prst="rect">
+            <a:avLst/>
+          </a:prstGeom>
+          <a:noFill/>
+        </p:spPr>
+        <p:txBody>
+          <a:bodyPr wrap="square">
+            <a:spAutoFit/>
+          </a:bodyPr>
+          <a:lstStyle/>
+          <a:p>
+            <a:r>
+              <a:rPr sz="2200" b="1">
+                <a:solidFill>
+                  <a:srgbClr val="1A1A2E"/>
+                </a:solidFill>
+                <a:latin typeface="Calibri"/>
+              </a:rPr>
               <a:t>Lead compensator, designed from real Bode data -- still fails, but not from a bug</a:t>
             </a:r>
           </a:p>
@@ -8043,7 +8278,7 @@
 </p:sld>
 </file>
 
-<file path=ppt/slides/slide27.xml><?xml version="1.0" encoding="utf-8"?>
+<file path=ppt/slides/slide28.xml><?xml version="1.0" encoding="utf-8"?>
 <p:sld xmlns:a="http://schemas.openxmlformats.org/drawingml/2006/main" xmlns:p="http://schemas.openxmlformats.org/presentationml/2006/main" xmlns:r="http://schemas.openxmlformats.org/officeDocument/2006/relationships">
   <p:cSld>
     <p:spTree>
@@ -8635,7 +8870,7 @@
 </p:sld>
 </file>
 
-<file path=ppt/slides/slide28.xml><?xml version="1.0" encoding="utf-8"?>
+<file path=ppt/slides/slide29.xml><?xml version="1.0" encoding="utf-8"?>
 <p:sld xmlns:a="http://schemas.openxmlformats.org/drawingml/2006/main" xmlns:p="http://schemas.openxmlformats.org/presentationml/2006/main" xmlns:r="http://schemas.openxmlformats.org/officeDocument/2006/relationships">
   <p:cSld>
     <p:spTree>
@@ -8840,240 +9075,6 @@
       <p:pic>
         <p:nvPicPr>
           <p:cNvPr id="5" name="Picture 4" descr="fta_open_loop_bode_xaxis_summary.png"/>
-          <p:cNvPicPr>
-            <a:picLocks noChangeAspect="1"/>
-          </p:cNvPicPr>
-          <p:nvPr/>
-        </p:nvPicPr>
-        <p:blipFill>
-          <a:blip r:embed="rId2"/>
-          <a:stretch>
-            <a:fillRect/>
-          </a:stretch>
-        </p:blipFill>
-        <p:spPr>
-          <a:xfrm>
-            <a:off x="4367667" y="3150000"/>
-            <a:ext cx="3456666" cy="3050000"/>
-          </a:xfrm>
-          <a:prstGeom prst="rect">
-            <a:avLst/>
-          </a:prstGeom>
-        </p:spPr>
-      </p:pic>
-    </p:spTree>
-  </p:cSld>
-  <p:clrMapOvr>
-    <a:masterClrMapping/>
-  </p:clrMapOvr>
-</p:sld>
-</file>
-
-<file path=ppt/slides/slide29.xml><?xml version="1.0" encoding="utf-8"?>
-<p:sld xmlns:a="http://schemas.openxmlformats.org/drawingml/2006/main" xmlns:p="http://schemas.openxmlformats.org/presentationml/2006/main" xmlns:r="http://schemas.openxmlformats.org/officeDocument/2006/relationships">
-  <p:cSld>
-    <p:spTree>
-      <p:nvGrpSpPr>
-        <p:cNvPr id="1" name=""/>
-        <p:cNvGrpSpPr/>
-        <p:nvPr/>
-      </p:nvGrpSpPr>
-      <p:grpSpPr/>
-      <p:sp>
-        <p:nvSpPr>
-          <p:cNvPr id="2" name="TextBox 1"/>
-          <p:cNvSpPr txBox="1"/>
-          <p:nvPr/>
-        </p:nvSpPr>
-        <p:spPr>
-          <a:xfrm>
-            <a:off x="457200" y="228600"/>
-            <a:ext cx="11246760" cy="640000"/>
-          </a:xfrm>
-          <a:prstGeom prst="rect">
-            <a:avLst/>
-          </a:prstGeom>
-          <a:noFill/>
-        </p:spPr>
-        <p:txBody>
-          <a:bodyPr wrap="square">
-            <a:spAutoFit/>
-          </a:bodyPr>
-          <a:lstStyle/>
-          <a:p>
-            <a:r>
-              <a:rPr sz="2200" b="1">
-                <a:solidFill>
-                  <a:srgbClr val="1A1A2E"/>
-                </a:solidFill>
-                <a:latin typeface="Calibri"/>
-              </a:rPr>
-              <a:t>Fresh Bode re-sweep, primary axis (dac_y -&gt; cx) — same resonance shape, used to design the lead compensator</a:t>
-            </a:r>
-          </a:p>
-        </p:txBody>
-      </p:sp>
-      <p:cxnSp>
-        <p:nvCxnSpPr>
-          <p:cNvPr id="3" name="Connector 2"/>
-          <p:cNvCxnSpPr/>
-          <p:nvPr/>
-        </p:nvCxnSpPr>
-        <p:spPr>
-          <a:xfrm>
-            <a:off x="457200" y="960120"/>
-            <a:ext cx="11247120" cy="0"/>
-          </a:xfrm>
-          <a:prstGeom prst="line">
-            <a:avLst/>
-          </a:prstGeom>
-          <a:ln w="19080">
-            <a:solidFill>
-              <a:srgbClr val="2E5C8A"/>
-            </a:solidFill>
-          </a:ln>
-        </p:spPr>
-        <p:style>
-          <a:lnRef idx="2">
-            <a:schemeClr val="accent1"/>
-          </a:lnRef>
-          <a:fillRef idx="0">
-            <a:schemeClr val="accent1"/>
-          </a:fillRef>
-          <a:effectRef idx="1">
-            <a:schemeClr val="accent1"/>
-          </a:effectRef>
-          <a:fontRef idx="minor">
-            <a:schemeClr val="tx1"/>
-          </a:fontRef>
-        </p:style>
-      </p:cxnSp>
-      <p:sp>
-        <p:nvSpPr>
-          <p:cNvPr id="4" name="TextBox 3"/>
-          <p:cNvSpPr txBox="1"/>
-          <p:nvPr/>
-        </p:nvSpPr>
-        <p:spPr>
-          <a:xfrm>
-            <a:off x="457200" y="1120000"/>
-            <a:ext cx="11246760" cy="1900000"/>
-          </a:xfrm>
-          <a:prstGeom prst="rect">
-            <a:avLst/>
-          </a:prstGeom>
-          <a:noFill/>
-        </p:spPr>
-        <p:txBody>
-          <a:bodyPr wrap="square">
-            <a:spAutoFit/>
-          </a:bodyPr>
-          <a:lstStyle/>
-          <a:p>
-            <a:pPr>
-              <a:spcAft>
-                <a:spcPts val="800"/>
-              </a:spcAft>
-            </a:pPr>
-            <a:r>
-              <a:rPr sz="1300">
-                <a:solidFill>
-                  <a:srgbClr val="333333"/>
-                </a:solidFill>
-                <a:latin typeface="Calibri"/>
-              </a:rPr>
-              <a:t>• </a:t>
-            </a:r>
-            <a:r>
-              <a:rPr sz="1300">
-                <a:solidFill>
-                  <a:srgbClr val="333333"/>
-                </a:solidFill>
-                <a:latin typeface="Calibri"/>
-              </a:rPr>
-              <a:t>Fresh 18-point re-sweep (1-55Hz, amplitude reduced 300→150 counts for margin) of the same pathway already characterized on 2026-08-19 — re-run to get a clean, trustworthy basis for a new lead-compensator design.</a:t>
-            </a:r>
-          </a:p>
-          <a:p>
-            <a:pPr>
-              <a:spcAft>
-                <a:spcPts val="800"/>
-              </a:spcAft>
-            </a:pPr>
-            <a:r>
-              <a:rPr sz="1300">
-                <a:solidFill>
-                  <a:srgbClr val="333333"/>
-                </a:solidFill>
-                <a:latin typeface="Calibri"/>
-              </a:rPr>
-              <a:t>• </a:t>
-            </a:r>
-            <a:r>
-              <a:rPr sz="1300">
-                <a:solidFill>
-                  <a:srgbClr val="333333"/>
-                </a:solidFill>
-                <a:latin typeface="Calibri"/>
-              </a:rPr>
-              <a:t>Confirms the same qualitative shape as the original sweep: flat gain 1-13Hz, real phase margin through 10-20Hz (40° lag at 10Hz, matching almost exactly), then a sharp resonant peak.</a:t>
-            </a:r>
-          </a:p>
-          <a:p>
-            <a:pPr>
-              <a:spcAft>
-                <a:spcPts val="800"/>
-              </a:spcAft>
-            </a:pPr>
-            <a:r>
-              <a:rPr sz="1300">
-                <a:solidFill>
-                  <a:srgbClr val="333333"/>
-                </a:solidFill>
-                <a:latin typeface="Calibri"/>
-              </a:rPr>
-              <a:t>• </a:t>
-            </a:r>
-            <a:r>
-              <a:rPr sz="1300">
-                <a:solidFill>
-                  <a:srgbClr val="333333"/>
-                </a:solidFill>
-                <a:latin typeface="Calibri"/>
-              </a:rPr>
-              <a:t>Grid-sampled peak lands at 40Hz (~11x the low-frequency baseline gain) — grid-limited (35/40/44Hz sampled around it), so read as consistent with, not a correction to, either the 38.5Hz or ~47-50Hz ring-down numbers already on record.</a:t>
-            </a:r>
-          </a:p>
-          <a:p>
-            <a:pPr>
-              <a:spcAft>
-                <a:spcPts val="800"/>
-              </a:spcAft>
-            </a:pPr>
-            <a:r>
-              <a:rPr sz="1300">
-                <a:solidFill>
-                  <a:srgbClr val="333333"/>
-                </a:solidFill>
-                <a:latin typeface="Calibri"/>
-              </a:rPr>
-              <a:t>• </a:t>
-            </a:r>
-            <a:r>
-              <a:rPr sz="1300">
-                <a:solidFill>
-                  <a:srgbClr val="333333"/>
-                </a:solidFill>
-                <a:latin typeface="Calibri"/>
-              </a:rPr>
-              <a:t>This data was used to design the fz≈15.4Hz/fp≈26Hz lead compensator on the next slide — which failed violently on hardware, tracing back to gain this resonance skirt adds in the 15-35Hz band, not a design or coefficient error.</a:t>
-            </a:r>
-          </a:p>
-        </p:txBody>
-      </p:sp>
-      <p:pic>
-        <p:nvPicPr>
-          <p:cNvPr id="5" name="Picture 4" descr="fta_open_loop_bode_20260901_summary.png"/>
           <p:cNvPicPr>
             <a:picLocks noChangeAspect="1"/>
           </p:cNvPicPr>
@@ -9405,6 +9406,215 @@
       <p:transition spd="slow"/>
     </mc:Fallback>
   </mc:AlternateContent>
+</p:sld>
+</file>
+
+<file path=ppt/slides/slide30.xml><?xml version="1.0" encoding="utf-8"?>
+<p:sld xmlns:a="http://schemas.openxmlformats.org/drawingml/2006/main" xmlns:p="http://schemas.openxmlformats.org/presentationml/2006/main" xmlns:r="http://schemas.openxmlformats.org/officeDocument/2006/relationships">
+  <p:cSld>
+    <p:spTree>
+      <p:nvGrpSpPr>
+        <p:cNvPr id="1" name=""/>
+        <p:cNvGrpSpPr/>
+        <p:nvPr/>
+      </p:nvGrpSpPr>
+      <p:grpSpPr/>
+      <p:sp>
+        <p:nvSpPr>
+          <p:cNvPr id="2" name="TextBox 1"/>
+          <p:cNvSpPr txBox="1"/>
+          <p:nvPr/>
+        </p:nvSpPr>
+        <p:spPr>
+          <a:xfrm>
+            <a:off x="457200" y="228600"/>
+            <a:ext cx="11246760" cy="640000"/>
+          </a:xfrm>
+          <a:prstGeom prst="rect">
+            <a:avLst/>
+          </a:prstGeom>
+          <a:noFill/>
+        </p:spPr>
+        <p:txBody>
+          <a:bodyPr wrap="square">
+            <a:spAutoFit/>
+          </a:bodyPr>
+          <a:lstStyle/>
+          <a:p>
+            <a:r>
+              <a:rPr sz="2200" b="1">
+                <a:solidFill>
+                  <a:srgbClr val="1A1A2E"/>
+                </a:solidFill>
+                <a:latin typeface="Calibri"/>
+              </a:rPr>
+              <a:t>Cross-axis coupling test: FEA's independence prediction confirmed on hardware</a:t>
+            </a:r>
+          </a:p>
+        </p:txBody>
+      </p:sp>
+      <p:cxnSp>
+        <p:nvCxnSpPr>
+          <p:cNvPr id="3" name="Connector 2"/>
+          <p:cNvCxnSpPr/>
+          <p:nvPr/>
+        </p:nvCxnSpPr>
+        <p:spPr>
+          <a:xfrm>
+            <a:off x="457200" y="960120"/>
+            <a:ext cx="11247120" cy="0"/>
+          </a:xfrm>
+          <a:prstGeom prst="line">
+            <a:avLst/>
+          </a:prstGeom>
+          <a:ln w="19080">
+            <a:solidFill>
+              <a:srgbClr val="2E5C8A"/>
+            </a:solidFill>
+          </a:ln>
+        </p:spPr>
+        <p:style>
+          <a:lnRef idx="2">
+            <a:schemeClr val="accent1"/>
+          </a:lnRef>
+          <a:fillRef idx="0">
+            <a:schemeClr val="accent1"/>
+          </a:fillRef>
+          <a:effectRef idx="1">
+            <a:schemeClr val="accent1"/>
+          </a:effectRef>
+          <a:fontRef idx="minor">
+            <a:schemeClr val="tx1"/>
+          </a:fontRef>
+        </p:style>
+      </p:cxnSp>
+      <p:sp>
+        <p:nvSpPr>
+          <p:cNvPr id="4" name="TextBox 3"/>
+          <p:cNvSpPr txBox="1"/>
+          <p:nvPr/>
+        </p:nvSpPr>
+        <p:spPr>
+          <a:xfrm>
+            <a:off x="457200" y="1120000"/>
+            <a:ext cx="11246760" cy="1550000"/>
+          </a:xfrm>
+          <a:prstGeom prst="rect">
+            <a:avLst/>
+          </a:prstGeom>
+          <a:noFill/>
+        </p:spPr>
+        <p:txBody>
+          <a:bodyPr wrap="square">
+            <a:spAutoFit/>
+          </a:bodyPr>
+          <a:lstStyle/>
+          <a:p>
+            <a:pPr>
+              <a:spcAft>
+                <a:spcPts val="700"/>
+              </a:spcAft>
+            </a:pPr>
+            <a:r>
+              <a:rPr sz="1300">
+                <a:solidFill>
+                  <a:srgbClr val="333333"/>
+                </a:solidFill>
+                <a:latin typeface="Calibri"/>
+              </a:rPr>
+              <a:t>• </a:t>
+            </a:r>
+            <a:r>
+              <a:rPr sz="1300">
+                <a:solidFill>
+                  <a:srgbClr val="333333"/>
+                </a:solidFill>
+                <a:latin typeface="Calibri"/>
+              </a:rPr>
+              <a:t>FEA predicts the two flexure axes are totally independent modes -- driven each axis at its own resonance (real, large excitation: 154.6px on dac_y@40Hz, 112.5px on dac_x@48.5Hz) and watched the OTHER axis for any response.</a:t>
+            </a:r>
+          </a:p>
+          <a:p>
+            <a:pPr>
+              <a:spcAft>
+                <a:spcPts val="700"/>
+              </a:spcAft>
+            </a:pPr>
+            <a:r>
+              <a:rPr sz="1300">
+                <a:solidFill>
+                  <a:srgbClr val="333333"/>
+                </a:solidFill>
+                <a:latin typeface="Calibri"/>
+              </a:rPr>
+              <a:t>• </a:t>
+            </a:r>
+            <a:r>
+              <a:rPr sz="1300">
+                <a:solidFill>
+                  <a:srgbClr val="333333"/>
+                </a:solidFill>
+                <a:latin typeface="Calibri"/>
+              </a:rPr>
+              <a:t>Cross-axis response in both directions was indistinguishable from that axis's own quiet-sitting noise floor (cy: 3.8px vs. 2.8px baseline std; cx: 1.3px vs. 3.5px baseline std) -- no coupling signal in either direction, despite driving right at peak excitation.</a:t>
+            </a:r>
+          </a:p>
+          <a:p>
+            <a:pPr>
+              <a:spcAft>
+                <a:spcPts val="700"/>
+              </a:spcAft>
+            </a:pPr>
+            <a:r>
+              <a:rPr sz="1300">
+                <a:solidFill>
+                  <a:srgbClr val="333333"/>
+                </a:solidFill>
+                <a:latin typeface="Calibri"/>
+              </a:rPr>
+              <a:t>• </a:t>
+            </a:r>
+            <a:r>
+              <a:rPr sz="1300">
+                <a:solidFill>
+                  <a:srgbClr val="333333"/>
+                </a:solidFill>
+                <a:latin typeface="Calibri"/>
+              </a:rPr>
+              <a:t>Confirms the FEA prediction with a real measurement, not just consistency with it -- the flexure redesign can treat the two axes as separate problems.</a:t>
+            </a:r>
+          </a:p>
+        </p:txBody>
+      </p:sp>
+      <p:pic>
+        <p:nvPicPr>
+          <p:cNvPr id="5" name="Picture 4" descr="scratch_cross_axis_coupling_plot.png"/>
+          <p:cNvPicPr>
+            <a:picLocks noChangeAspect="1"/>
+          </p:cNvPicPr>
+          <p:nvPr/>
+        </p:nvPicPr>
+        <p:blipFill>
+          <a:blip r:embed="rId2"/>
+          <a:stretch>
+            <a:fillRect/>
+          </a:stretch>
+        </p:blipFill>
+        <p:spPr>
+          <a:xfrm>
+            <a:off x="3003197" y="2750000"/>
+            <a:ext cx="6185606" cy="3550000"/>
+          </a:xfrm>
+          <a:prstGeom prst="rect">
+            <a:avLst/>
+          </a:prstGeom>
+        </p:spPr>
+      </p:pic>
+    </p:spTree>
+  </p:cSld>
+  <p:clrMapOvr>
+    <a:masterClrMapping/>
+  </p:clrMapOvr>
 </p:sld>
 </file>
 

--- a/docs/session_results_2026-08-18_pid_tuning.pptx
+++ b/docs/session_results_2026-08-18_pid_tuning.pptx
@@ -35,6 +35,7 @@
     <p:sldId id="282" r:id="rId29"/>
     <p:sldId id="283" r:id="rId30"/>
     <p:sldId id="285" r:id="rId32"/>
+    <p:sldId id="286" r:id="rId33"/>
   </p:sldIdLst>
   <p:sldSz cx="12192000" cy="6858000"/>
   <p:notesSz cx="7772400" cy="10058400"/>
@@ -9618,6 +9619,240 @@
 </p:sld>
 </file>
 
+<file path=ppt/slides/slide31.xml><?xml version="1.0" encoding="utf-8"?>
+<p:sld xmlns:a="http://schemas.openxmlformats.org/drawingml/2006/main" xmlns:p="http://schemas.openxmlformats.org/presentationml/2006/main" xmlns:r="http://schemas.openxmlformats.org/officeDocument/2006/relationships">
+  <p:cSld>
+    <p:spTree>
+      <p:nvGrpSpPr>
+        <p:cNvPr id="1" name=""/>
+        <p:cNvGrpSpPr/>
+        <p:nvPr/>
+      </p:nvGrpSpPr>
+      <p:grpSpPr/>
+      <p:sp>
+        <p:nvSpPr>
+          <p:cNvPr id="2" name="TextBox 1"/>
+          <p:cNvSpPr txBox="1"/>
+          <p:nvPr/>
+        </p:nvSpPr>
+        <p:spPr>
+          <a:xfrm>
+            <a:off x="457200" y="228600"/>
+            <a:ext cx="11246760" cy="640000"/>
+          </a:xfrm>
+          <a:prstGeom prst="rect">
+            <a:avLst/>
+          </a:prstGeom>
+          <a:noFill/>
+        </p:spPr>
+        <p:txBody>
+          <a:bodyPr wrap="square">
+            <a:spAutoFit/>
+          </a:bodyPr>
+          <a:lstStyle/>
+          <a:p>
+            <a:r>
+              <a:rPr sz="2100" b="1">
+                <a:solidFill>
+                  <a:srgbClr val="1A1A2E"/>
+                </a:solidFill>
+                <a:latin typeface="Calibri"/>
+              </a:rPr>
+              <a:t>Wire-position ring-down test: a real, partial explanation for the resonance drift</a:t>
+            </a:r>
+          </a:p>
+        </p:txBody>
+      </p:sp>
+      <p:cxnSp>
+        <p:nvCxnSpPr>
+          <p:cNvPr id="3" name="Connector 2"/>
+          <p:cNvCxnSpPr/>
+          <p:nvPr/>
+        </p:nvCxnSpPr>
+        <p:spPr>
+          <a:xfrm>
+            <a:off x="457200" y="960120"/>
+            <a:ext cx="11247120" cy="0"/>
+          </a:xfrm>
+          <a:prstGeom prst="line">
+            <a:avLst/>
+          </a:prstGeom>
+          <a:ln w="19080">
+            <a:solidFill>
+              <a:srgbClr val="2E5C8A"/>
+            </a:solidFill>
+          </a:ln>
+        </p:spPr>
+        <p:style>
+          <a:lnRef idx="2">
+            <a:schemeClr val="accent1"/>
+          </a:lnRef>
+          <a:fillRef idx="0">
+            <a:schemeClr val="accent1"/>
+          </a:fillRef>
+          <a:effectRef idx="1">
+            <a:schemeClr val="accent1"/>
+          </a:effectRef>
+          <a:fontRef idx="minor">
+            <a:schemeClr val="tx1"/>
+          </a:fontRef>
+        </p:style>
+      </p:cxnSp>
+      <p:sp>
+        <p:nvSpPr>
+          <p:cNvPr id="4" name="TextBox 3"/>
+          <p:cNvSpPr txBox="1"/>
+          <p:nvPr/>
+        </p:nvSpPr>
+        <p:spPr>
+          <a:xfrm>
+            <a:off x="457200" y="1120000"/>
+            <a:ext cx="11246760" cy="1650000"/>
+          </a:xfrm>
+          <a:prstGeom prst="rect">
+            <a:avLst/>
+          </a:prstGeom>
+          <a:noFill/>
+        </p:spPr>
+        <p:txBody>
+          <a:bodyPr wrap="square">
+            <a:spAutoFit/>
+          </a:bodyPr>
+          <a:lstStyle/>
+          <a:p>
+            <a:pPr>
+              <a:spcAft>
+                <a:spcPts val="700"/>
+              </a:spcAft>
+            </a:pPr>
+            <a:r>
+              <a:rPr sz="1250">
+                <a:solidFill>
+                  <a:srgbClr val="333333"/>
+                </a:solidFill>
+                <a:latin typeface="Calibri"/>
+              </a:rPr>
+              <a:t>• </a:t>
+            </a:r>
+            <a:r>
+              <a:rPr sz="1250">
+                <a:solidFill>
+                  <a:srgbClr val="333333"/>
+                </a:solidFill>
+                <a:latin typeface="Calibri"/>
+              </a:rPr>
+              <a:t>Tested whether cable routing explains why this project's resonance measurements have drifted session to session -- ring-down on both axes across 4 wire configurations (away / touching one side / touching the other side / back to away).</a:t>
+            </a:r>
+          </a:p>
+          <a:p>
+            <a:pPr>
+              <a:spcAft>
+                <a:spcPts val="700"/>
+              </a:spcAft>
+            </a:pPr>
+            <a:r>
+              <a:rPr sz="1250">
+                <a:solidFill>
+                  <a:srgbClr val="333333"/>
+                </a:solidFill>
+                <a:latin typeface="Calibri"/>
+              </a:rPr>
+              <a:t>• </a:t>
+            </a:r>
+            <a:r>
+              <a:rPr sz="1250">
+                <a:solidFill>
+                  <a:srgbClr val="333333"/>
+                </a:solidFill>
+                <a:latin typeface="Calibri"/>
+              </a:rPr>
+              <a:t>Real, reproducible effect on the second axis (dac_x -&gt; cy) only: touching one side pushed the resonance up (~55Hz avg vs. ~50Hz away), touching the other side landed in between (~52Hz) -- the primary axis (dac_y -&gt; cx) stayed flat (39.6-40.7Hz) through every configuration, unaffected.</a:t>
+            </a:r>
+          </a:p>
+          <a:p>
+            <a:pPr>
+              <a:spcAft>
+                <a:spcPts val="700"/>
+              </a:spcAft>
+            </a:pPr>
+            <a:r>
+              <a:rPr sz="1250">
+                <a:solidFill>
+                  <a:srgbClr val="333333"/>
+                </a:solidFill>
+                <a:latin typeface="Calibri"/>
+              </a:rPr>
+              <a:t>• </a:t>
+            </a:r>
+            <a:r>
+              <a:rPr sz="1250">
+                <a:solidFill>
+                  <a:srgbClr val="333333"/>
+                </a:solidFill>
+                <a:latin typeface="Calibri"/>
+              </a:rPr>
+              <a:t>The repeat "back to away" trial did NOT cleanly reproduce the original away measurement (43.0/40.8Hz vs. the original 46.9/52.4Hz) -- wire contact is a real, confirmed lever, but it's a partial explanation, not the full story; something else still moves this axis's resonance too.</a:t>
+            </a:r>
+          </a:p>
+          <a:p>
+            <a:pPr>
+              <a:spcAft>
+                <a:spcPts val="700"/>
+              </a:spcAft>
+            </a:pPr>
+            <a:r>
+              <a:rPr sz="1250">
+                <a:solidFill>
+                  <a:srgbClr val="333333"/>
+                </a:solidFill>
+                <a:latin typeface="Calibri"/>
+              </a:rPr>
+              <a:t>• </a:t>
+            </a:r>
+            <a:r>
+              <a:rPr sz="1250">
+                <a:solidFill>
+                  <a:srgbClr val="333333"/>
+                </a:solidFill>
+                <a:latin typeface="Calibri"/>
+              </a:rPr>
+              <a:t>Doesn't block anything: the ~47-50Hz figure already used for the FEA comparison sits comfortably inside this session's full observed range (40.8-56.6Hz) -- proceeding with the flexure redesign on that basis remains reasonable.</a:t>
+            </a:r>
+          </a:p>
+        </p:txBody>
+      </p:sp>
+      <p:pic>
+        <p:nvPicPr>
+          <p:cNvPr id="5" name="Picture 4" descr="scratch_wire_position_ringdown_plot.png"/>
+          <p:cNvPicPr>
+            <a:picLocks noChangeAspect="1"/>
+          </p:cNvPicPr>
+          <p:nvPr/>
+        </p:nvPicPr>
+        <p:blipFill>
+          <a:blip r:embed="rId2"/>
+          <a:stretch>
+            <a:fillRect/>
+          </a:stretch>
+        </p:blipFill>
+        <p:spPr>
+          <a:xfrm>
+            <a:off x="3169661" y="3200000"/>
+            <a:ext cx="5852678" cy="2850000"/>
+          </a:xfrm>
+          <a:prstGeom prst="rect">
+            <a:avLst/>
+          </a:prstGeom>
+        </p:spPr>
+      </p:pic>
+    </p:spTree>
+  </p:cSld>
+  <p:clrMapOvr>
+    <a:masterClrMapping/>
+  </p:clrMapOvr>
+</p:sld>
+</file>
+
 <file path=ppt/slides/slide4.xml><?xml version="1.0" encoding="utf-8"?>
 <p:sld xmlns:a="http://schemas.openxmlformats.org/drawingml/2006/main" xmlns:p="http://schemas.openxmlformats.org/presentationml/2006/main" xmlns:r="http://schemas.openxmlformats.org/officeDocument/2006/relationships" xmlns:p14="http://schemas.microsoft.com/office/powerpoint/2010/main" xmlns:p15="http://schemas.microsoft.com/office/powerpoint/2012/main" xmlns:mc="http://schemas.openxmlformats.org/markup-compatibility/2006">
   <p:cSld>

--- a/docs/session_results_2026-08-18_pid_tuning.pptx
+++ b/docs/session_results_2026-08-18_pid_tuning.pptx
@@ -36,6 +36,8 @@
     <p:sldId id="283" r:id="rId30"/>
     <p:sldId id="285" r:id="rId32"/>
     <p:sldId id="286" r:id="rId33"/>
+    <p:sldId id="287" r:id="rId34"/>
+    <p:sldId id="288" r:id="rId35"/>
   </p:sldIdLst>
   <p:sldSz cx="12192000" cy="6858000"/>
   <p:notesSz cx="7772400" cy="10058400"/>
@@ -9853,6 +9855,449 @@
 </p:sld>
 </file>
 
+<file path=ppt/slides/slide32.xml><?xml version="1.0" encoding="utf-8"?>
+<p:sld xmlns:a="http://schemas.openxmlformats.org/drawingml/2006/main" xmlns:p="http://schemas.openxmlformats.org/presentationml/2006/main" xmlns:r="http://schemas.openxmlformats.org/officeDocument/2006/relationships">
+  <p:cSld>
+    <p:spTree>
+      <p:nvGrpSpPr>
+        <p:cNvPr id="1" name=""/>
+        <p:cNvGrpSpPr/>
+        <p:nvPr/>
+      </p:nvGrpSpPr>
+      <p:grpSpPr/>
+      <p:sp>
+        <p:nvSpPr>
+          <p:cNvPr id="2" name="TextBox 1"/>
+          <p:cNvSpPr txBox="1"/>
+          <p:nvPr/>
+        </p:nvSpPr>
+        <p:spPr>
+          <a:xfrm>
+            <a:off x="457200" y="228600"/>
+            <a:ext cx="11246760" cy="640000"/>
+          </a:xfrm>
+          <a:prstGeom prst="rect">
+            <a:avLst/>
+          </a:prstGeom>
+          <a:noFill/>
+        </p:spPr>
+        <p:txBody>
+          <a:bodyPr wrap="square">
+            <a:spAutoFit/>
+          </a:bodyPr>
+          <a:lstStyle/>
+          <a:p>
+            <a:r>
+              <a:rPr sz="2100" b="1">
+                <a:solidFill>
+                  <a:srgbClr val="1A1A2E"/>
+                </a:solidFill>
+                <a:latin typeface="Calibri"/>
+              </a:rPr>
+              <a:t>Axis 2 (dac_x -&gt; cy) tuned independently for the first time -- beats axis 1's best-ever result</a:t>
+            </a:r>
+          </a:p>
+        </p:txBody>
+      </p:sp>
+      <p:cxnSp>
+        <p:nvCxnSpPr>
+          <p:cNvPr id="3" name="Connector 2"/>
+          <p:cNvCxnSpPr/>
+          <p:nvPr/>
+        </p:nvCxnSpPr>
+        <p:spPr>
+          <a:xfrm>
+            <a:off x="457200" y="960120"/>
+            <a:ext cx="11247120" cy="0"/>
+          </a:xfrm>
+          <a:prstGeom prst="line">
+            <a:avLst/>
+          </a:prstGeom>
+          <a:ln w="19080">
+            <a:solidFill>
+              <a:srgbClr val="2E5C8A"/>
+            </a:solidFill>
+          </a:ln>
+        </p:spPr>
+        <p:style>
+          <a:lnRef idx="2">
+            <a:schemeClr val="accent1"/>
+          </a:lnRef>
+          <a:fillRef idx="0">
+            <a:schemeClr val="accent1"/>
+          </a:fillRef>
+          <a:effectRef idx="1">
+            <a:schemeClr val="accent1"/>
+          </a:effectRef>
+          <a:fontRef idx="minor">
+            <a:schemeClr val="tx1"/>
+          </a:fontRef>
+        </p:style>
+      </p:cxnSp>
+      <p:sp>
+        <p:nvSpPr>
+          <p:cNvPr id="4" name="TextBox 3"/>
+          <p:cNvSpPr txBox="1"/>
+          <p:nvPr/>
+        </p:nvSpPr>
+        <p:spPr>
+          <a:xfrm>
+            <a:off x="457200" y="1120000"/>
+            <a:ext cx="11246760" cy="1650000"/>
+          </a:xfrm>
+          <a:prstGeom prst="rect">
+            <a:avLst/>
+          </a:prstGeom>
+          <a:noFill/>
+        </p:spPr>
+        <p:txBody>
+          <a:bodyPr wrap="square">
+            <a:spAutoFit/>
+          </a:bodyPr>
+          <a:lstStyle/>
+          <a:p>
+            <a:pPr>
+              <a:spcAft>
+                <a:spcPts val="700"/>
+              </a:spcAft>
+            </a:pPr>
+            <a:r>
+              <a:rPr sz="1300">
+                <a:solidFill>
+                  <a:srgbClr val="333333"/>
+                </a:solidFill>
+                <a:latin typeface="Calibri"/>
+              </a:rPr>
+              <a:t>• </a:t>
+            </a:r>
+            <a:r>
+              <a:rPr sz="1300">
+                <a:solidFill>
+                  <a:srgbClr val="333333"/>
+                </a:solidFill>
+                <a:latin typeface="Calibri"/>
+              </a:rPr>
+              <a:t>Axis 2 always mirrored axis 1's gains before today -- added independent set_kp2/set_ki2/set_kd2 and set_target_y (needed to command a step at all) to tune it on its own merits.</a:t>
+            </a:r>
+          </a:p>
+          <a:p>
+            <a:pPr>
+              <a:spcAft>
+                <a:spcPts val="700"/>
+              </a:spcAft>
+            </a:pPr>
+            <a:r>
+              <a:rPr sz="1300">
+                <a:solidFill>
+                  <a:srgbClr val="333333"/>
+                </a:solidFill>
+                <a:latin typeface="Calibri"/>
+              </a:rPr>
+              <a:t>• </a:t>
+            </a:r>
+            <a:r>
+              <a:rPr sz="1300">
+                <a:solidFill>
+                  <a:srgbClr val="333333"/>
+                </a:solidFill>
+                <a:latin typeface="Calibri"/>
+              </a:rPr>
+              <a:t>Ki bisected at Kp=1.75: real ceiling sits 750-800 (ringing/diverging past that).</a:t>
+            </a:r>
+          </a:p>
+          <a:p>
+            <a:pPr>
+              <a:spcAft>
+                <a:spcPts val="700"/>
+              </a:spcAft>
+            </a:pPr>
+            <a:r>
+              <a:rPr sz="1300">
+                <a:solidFill>
+                  <a:srgbClr val="333333"/>
+                </a:solidFill>
+                <a:latin typeface="Calibri"/>
+              </a:rPr>
+              <a:t>• </a:t>
+            </a:r>
+            <a:r>
+              <a:rPr sz="1300">
+                <a:solidFill>
+                  <a:srgbClr val="333333"/>
+                </a:solidFill>
+                <a:latin typeface="Calibri"/>
+              </a:rPr>
+              <a:t>Kp=1.75/Ki=700 chosen: 8.6% overshoot, 68.5ms settling -- clean AND the fastest point tested, beating axis 1's own historical best (141-193ms) with the same methodology.</a:t>
+            </a:r>
+          </a:p>
+        </p:txBody>
+      </p:sp>
+      <p:pic>
+        <p:nvPicPr>
+          <p:cNvPr id="5" name="Picture 4" descr="scratch_axis2_ki_bisection_plot.png"/>
+          <p:cNvPicPr>
+            <a:picLocks noChangeAspect="1"/>
+          </p:cNvPicPr>
+          <p:nvPr/>
+        </p:nvPicPr>
+        <p:blipFill>
+          <a:blip r:embed="rId2"/>
+          <a:stretch>
+            <a:fillRect/>
+          </a:stretch>
+        </p:blipFill>
+        <p:spPr>
+          <a:xfrm>
+            <a:off x="2817154" y="2950000"/>
+            <a:ext cx="6557692" cy="3100000"/>
+          </a:xfrm>
+          <a:prstGeom prst="rect">
+            <a:avLst/>
+          </a:prstGeom>
+        </p:spPr>
+      </p:pic>
+    </p:spTree>
+  </p:cSld>
+  <p:clrMapOvr>
+    <a:masterClrMapping/>
+  </p:clrMapOvr>
+</p:sld>
+</file>
+
+<file path=ppt/slides/slide33.xml><?xml version="1.0" encoding="utf-8"?>
+<p:sld xmlns:a="http://schemas.openxmlformats.org/drawingml/2006/main" xmlns:p="http://schemas.openxmlformats.org/presentationml/2006/main" xmlns:r="http://schemas.openxmlformats.org/officeDocument/2006/relationships">
+  <p:cSld>
+    <p:spTree>
+      <p:nvGrpSpPr>
+        <p:cNvPr id="1" name=""/>
+        <p:cNvGrpSpPr/>
+        <p:nvPr/>
+      </p:nvGrpSpPr>
+      <p:grpSpPr/>
+      <p:sp>
+        <p:nvSpPr>
+          <p:cNvPr id="2" name="TextBox 1"/>
+          <p:cNvSpPr txBox="1"/>
+          <p:nvPr/>
+        </p:nvSpPr>
+        <p:spPr>
+          <a:xfrm>
+            <a:off x="457200" y="228600"/>
+            <a:ext cx="11246760" cy="640000"/>
+          </a:xfrm>
+          <a:prstGeom prst="rect">
+            <a:avLst/>
+          </a:prstGeom>
+          <a:noFill/>
+        </p:spPr>
+        <p:txBody>
+          <a:bodyPr wrap="square">
+            <a:spAutoFit/>
+          </a:bodyPr>
+          <a:lstStyle/>
+          <a:p>
+            <a:r>
+              <a:rPr sz="2100" b="1">
+                <a:solidFill>
+                  <a:srgbClr val="1A1A2E"/>
+                </a:solidFill>
+                <a:latin typeface="Calibri"/>
+              </a:rPr>
+              <a:t>A real, severe wire-position instability found on axis 1 -- confirmed and fixed</a:t>
+            </a:r>
+          </a:p>
+        </p:txBody>
+      </p:sp>
+      <p:cxnSp>
+        <p:nvCxnSpPr>
+          <p:cNvPr id="3" name="Connector 2"/>
+          <p:cNvCxnSpPr/>
+          <p:nvPr/>
+        </p:nvCxnSpPr>
+        <p:spPr>
+          <a:xfrm>
+            <a:off x="457200" y="960120"/>
+            <a:ext cx="11247120" cy="0"/>
+          </a:xfrm>
+          <a:prstGeom prst="line">
+            <a:avLst/>
+          </a:prstGeom>
+          <a:ln w="19080">
+            <a:solidFill>
+              <a:srgbClr val="2E5C8A"/>
+            </a:solidFill>
+          </a:ln>
+        </p:spPr>
+        <p:style>
+          <a:lnRef idx="2">
+            <a:schemeClr val="accent1"/>
+          </a:lnRef>
+          <a:fillRef idx="0">
+            <a:schemeClr val="accent1"/>
+          </a:fillRef>
+          <a:effectRef idx="1">
+            <a:schemeClr val="accent1"/>
+          </a:effectRef>
+          <a:fontRef idx="minor">
+            <a:schemeClr val="tx1"/>
+          </a:fontRef>
+        </p:style>
+      </p:cxnSp>
+      <p:sp>
+        <p:nvSpPr>
+          <p:cNvPr id="4" name="TextBox 3"/>
+          <p:cNvSpPr txBox="1"/>
+          <p:nvPr/>
+        </p:nvSpPr>
+        <p:spPr>
+          <a:xfrm>
+            <a:off x="457200" y="1120000"/>
+            <a:ext cx="11246760" cy="1650000"/>
+          </a:xfrm>
+          <a:prstGeom prst="rect">
+            <a:avLst/>
+          </a:prstGeom>
+          <a:noFill/>
+        </p:spPr>
+        <p:txBody>
+          <a:bodyPr wrap="square">
+            <a:spAutoFit/>
+          </a:bodyPr>
+          <a:lstStyle/>
+          <a:p>
+            <a:pPr>
+              <a:spcAft>
+                <a:spcPts val="700"/>
+              </a:spcAft>
+            </a:pPr>
+            <a:r>
+              <a:rPr sz="1250">
+                <a:solidFill>
+                  <a:srgbClr val="333333"/>
+                </a:solidFill>
+                <a:latin typeface="Calibri"/>
+              </a:rPr>
+              <a:t>• </a:t>
+            </a:r>
+            <a:r>
+              <a:rPr sz="1250">
+                <a:solidFill>
+                  <a:srgbClr val="333333"/>
+                </a:solidFill>
+                <a:latin typeface="Calibri"/>
+              </a:rPr>
+              <a:t>Small-amplitude testing (motivated by the real disturbance being atmospheric, not periodic) hit a severe, non-monotonic axis-1 degradation -- much bigger than expected from step size alone.</a:t>
+            </a:r>
+          </a:p>
+          <a:p>
+            <a:pPr>
+              <a:spcAft>
+                <a:spcPts val="700"/>
+              </a:spcAft>
+            </a:pPr>
+            <a:r>
+              <a:rPr sz="1250">
+                <a:solidFill>
+                  <a:srgbClr val="333333"/>
+                </a:solidFill>
+                <a:latin typeface="Calibri"/>
+              </a:rPr>
+              <a:t>• </a:t>
+            </a:r>
+            <a:r>
+              <a:rPr sz="1250">
+                <a:solidFill>
+                  <a:srgbClr val="333333"/>
+                </a:solidFill>
+                <a:latin typeface="Calibri"/>
+              </a:rPr>
+              <a:t>Isolated to pure P (Kp=1.75, Ki=0, no integral at all): violent, SUSTAINED ~600px oscillation, present even holding a fixed point before any step. This project has never seen Kp=1.75 alone be unstable -- the known P-only boundary is ~Kp=6-6.5, over 3x higher.</a:t>
+            </a:r>
+          </a:p>
+          <a:p>
+            <a:pPr>
+              <a:spcAft>
+                <a:spcPts val="700"/>
+              </a:spcAft>
+            </a:pPr>
+            <a:r>
+              <a:rPr sz="1250">
+                <a:solidFill>
+                  <a:srgbClr val="333333"/>
+                </a:solidFill>
+                <a:latin typeface="Calibri"/>
+              </a:rPr>
+              <a:t>• </a:t>
+            </a:r>
+            <a:r>
+              <a:rPr sz="1250">
+                <a:solidFill>
+                  <a:srgbClr val="333333"/>
+                </a:solidFill>
+                <a:latin typeface="Calibri"/>
+              </a:rPr>
+              <a:t>Root cause: the wire manipulation from the same day's wire-position ring-down test -- confirmed by asking the wires be restored to their original position and rerunning the IDENTICAL test.</a:t>
+            </a:r>
+          </a:p>
+          <a:p>
+            <a:pPr>
+              <a:spcAft>
+                <a:spcPts val="700"/>
+              </a:spcAft>
+            </a:pPr>
+            <a:r>
+              <a:rPr sz="1250">
+                <a:solidFill>
+                  <a:srgbClr val="333333"/>
+                </a:solidFill>
+                <a:latin typeface="Calibri"/>
+              </a:rPr>
+              <a:t>• </a:t>
+            </a:r>
+            <a:r>
+              <a:rPr sz="1250">
+                <a:solidFill>
+                  <a:srgbClr val="333333"/>
+                </a:solidFill>
+                <a:latin typeface="Calibri"/>
+              </a:rPr>
+              <a:t>A real, standalone finding: wire routing can destabilize this rig's PRIMARY axis's basic closed-loop stability, not just shift the secondary axis's resonance frequency -- worth permanently securing the wires away from the flexure.</a:t>
+            </a:r>
+          </a:p>
+        </p:txBody>
+      </p:sp>
+      <p:pic>
+        <p:nvPicPr>
+          <p:cNvPr id="5" name="Picture 4" descr="scratch_wire_instability_before_after.png"/>
+          <p:cNvPicPr>
+            <a:picLocks noChangeAspect="1"/>
+          </p:cNvPicPr>
+          <p:nvPr/>
+        </p:nvPicPr>
+        <p:blipFill>
+          <a:blip r:embed="rId2"/>
+          <a:stretch>
+            <a:fillRect/>
+          </a:stretch>
+        </p:blipFill>
+        <p:spPr>
+          <a:xfrm>
+            <a:off x="2833981" y="3050000"/>
+            <a:ext cx="6524038" cy="2950000"/>
+          </a:xfrm>
+          <a:prstGeom prst="rect">
+            <a:avLst/>
+          </a:prstGeom>
+        </p:spPr>
+      </p:pic>
+    </p:spTree>
+  </p:cSld>
+  <p:clrMapOvr>
+    <a:masterClrMapping/>
+  </p:clrMapOvr>
+</p:sld>
+</file>
+
 <file path=ppt/slides/slide4.xml><?xml version="1.0" encoding="utf-8"?>
 <p:sld xmlns:a="http://schemas.openxmlformats.org/drawingml/2006/main" xmlns:p="http://schemas.openxmlformats.org/presentationml/2006/main" xmlns:r="http://schemas.openxmlformats.org/officeDocument/2006/relationships" xmlns:p14="http://schemas.microsoft.com/office/powerpoint/2010/main" xmlns:p15="http://schemas.microsoft.com/office/powerpoint/2012/main" xmlns:mc="http://schemas.openxmlformats.org/markup-compatibility/2006">
   <p:cSld>
